--- a/lecons/F2/18_F2_M2_L08_Relationships_between_Towns_and_Country_Sides.pptx
+++ b/lecons/F2/18_F2_M2_L08_Relationships_between_Towns_and_Country_Sides.pptx
@@ -54,9 +54,23 @@
     <p:sldId id="302" r:id="rId48"/>
     <p:sldId id="303" r:id="rId49"/>
     <p:sldId id="304" r:id="rId50"/>
+    <p:sldId id="305" r:id="rId51"/>
+    <p:sldId id="306" r:id="rId52"/>
+    <p:sldId id="307" r:id="rId53"/>
+    <p:sldId id="308" r:id="rId54"/>
+    <p:sldId id="309" r:id="rId55"/>
+    <p:sldId id="310" r:id="rId56"/>
+    <p:sldId id="311" r:id="rId57"/>
+    <p:sldId id="312" r:id="rId58"/>
+    <p:sldId id="313" r:id="rId59"/>
+    <p:sldId id="314" r:id="rId60"/>
+    <p:sldId id="315" r:id="rId61"/>
+    <p:sldId id="316" r:id="rId62"/>
+    <p:sldId id="317" r:id="rId63"/>
+    <p:sldId id="318" r:id="rId64"/>
   </p:sldIdLst>
   <p:notesMasterIdLst>
-    <p:notesMasterId r:id="rId51"/>
+    <p:notesMasterId r:id="rId65"/>
   </p:notesMasterIdLst>
   <p:sldSz cx="12192000" cy="6858000"/>
   <p:notesSz cx="6858000" cy="12192000"/>
@@ -726,7 +740,7 @@
           <a:p>
             <a:r>
               <a:rPr lang="en-US" dirty="0"/>
-              <a:t>Good. We want to understand the exchanges between town and village.</a:t>
+              <a:t>Good. We want to know whether towns and villages depend on each other.</a:t>
             </a:r>
             <a:endParaRPr lang="en-US" dirty="0"/>
           </a:p>
@@ -1166,7 +1180,7 @@
           <a:p>
             <a:r>
               <a:rPr lang="en-US" dirty="0"/>
-              <a:t>From this situation, the action we are working towards in this lesson is the following: support exchanges between your village and your town.</a:t>
+              <a:t>From this situation, the action we are working towards in this lesson is the following: support exchanges and development projects between your village and your town.</a:t>
             </a:r>
             <a:endParaRPr lang="en-US" dirty="0"/>
           </a:p>
@@ -1430,7 +1444,7 @@
           <a:p>
             <a:r>
               <a:rPr lang="en-US" dirty="0"/>
-              <a:t>Here is the question for Activity 1: What products does the country side send to towns? Take one minute to think and write your answer in your rough notebook.</a:t>
+              <a:t>Here is the question for Activity 1: Where do the cattle sold in town markets come from? Take one minute to think and write your answer in your rough notebook.</a:t>
             </a:r>
             <a:endParaRPr lang="en-US" dirty="0"/>
           </a:p>
@@ -1606,7 +1620,7 @@
           <a:p>
             <a:r>
               <a:rPr lang="en-US" dirty="0"/>
-              <a:t>Let us check the answer together. Food crops, cattle, firewood and raw materials such as cotton.</a:t>
+              <a:t>Let us check the answer together. From the country side, where herders raise them.</a:t>
             </a:r>
             <a:endParaRPr lang="en-US" dirty="0"/>
           </a:p>
@@ -1782,7 +1796,7 @@
           <a:p>
             <a:r>
               <a:rPr lang="en-US" dirty="0"/>
-              <a:t>Here is the question for Activity 2: What products and services do towns send to the country side? Take one minute to think and write your answer in your rough notebook.</a:t>
+              <a:t>Here is the question for Activity 2: What does this vehicle bring back to the village from the town? Take one minute to think and write your answer in your rough notebook.</a:t>
             </a:r>
             <a:endParaRPr lang="en-US" dirty="0"/>
           </a:p>
@@ -1870,7 +1884,7 @@
           <a:p>
             <a:r>
               <a:rPr lang="en-US" dirty="0"/>
-              <a:t>Let us check the answer together. Manufactured goods, fertilisers, money and services such as health and education.</a:t>
+              <a:t>Let us check the answer together. Manufactured goods such as soap, oil, sugar, clothes and fertilisers.</a:t>
             </a:r>
             <a:endParaRPr lang="en-US" dirty="0"/>
           </a:p>
@@ -2046,7 +2060,7 @@
           <a:p>
             <a:r>
               <a:rPr lang="en-US" dirty="0"/>
-              <a:t>Here is the question for Activity 3: Why do people travel between towns and villages? Take one minute to think and write your answer in your rough notebook.</a:t>
+              <a:t>Here is the question for Activity 3: Why are bus stations crowded before festivals? Take one minute to think and write your answer in your rough notebook.</a:t>
             </a:r>
             <a:endParaRPr lang="en-US" dirty="0"/>
           </a:p>
@@ -2134,7 +2148,7 @@
           <a:p>
             <a:r>
               <a:rPr lang="en-US" dirty="0"/>
-              <a:t>Let us check the answer together. For work, school, trade, family visits and festivals.</a:t>
+              <a:t>Let us check the answer together. Town dwellers travel back to their villages for festivals and family ceremonies.</a:t>
             </a:r>
             <a:endParaRPr lang="en-US" dirty="0"/>
           </a:p>
@@ -2310,7 +2324,7 @@
           <a:p>
             <a:r>
               <a:rPr lang="en-US" dirty="0"/>
-              <a:t>Here is the question for Activity 4: Give two socio-cultural links between towns and villages. Take one minute to think and write your answer in your rough notebook.</a:t>
+              <a:t>Here is the question for Activity 4: How do the elites in town help their village? Take one minute to think and write your answer in your rough notebook.</a:t>
             </a:r>
             <a:endParaRPr lang="en-US" dirty="0"/>
           </a:p>
@@ -2398,7 +2412,7 @@
           <a:p>
             <a:r>
               <a:rPr lang="en-US" dirty="0"/>
-              <a:t>Let us check the answer together. Festivals and funerals in the village, and development associations of town dwellers.</a:t>
+              <a:t>Let us check the answer together. Through development associations that build schools, wells and roads.</a:t>
             </a:r>
             <a:endParaRPr lang="en-US" dirty="0"/>
           </a:p>
@@ -2486,7 +2500,7 @@
           <a:p>
             <a:r>
               <a:rPr lang="en-US" dirty="0"/>
-              <a:t>Our topic is Space Occupation, and the sub-topic is Towns and Country Sides of Africa. The key notions we shall use today are: flows, population flows, goods, information, rural exodus. At the end, you should be able to do this: learners are able to describe the flows between towns and country sides and explain why they depend on each other.</a:t>
+              <a:t>Our topic is Space Occupation, and the sub-topic is Towns and Country Sides of Africa. The key notions we shall use today are: flows: population flows, flows of goods, information (newspapers). At the end, you should be able to do this: learners are able to identify the flows between towns and country sides and explain why they depend on each other.</a:t>
             </a:r>
             <a:endParaRPr lang="en-US" dirty="0"/>
           </a:p>
@@ -2662,7 +2676,7 @@
           <a:p>
             <a:r>
               <a:rPr lang="en-US" dirty="0"/>
-              <a:t>Here is the question for Activity 5: How does information circulate between towns and villages? Take one minute to think and write your answer in your rough notebook.</a:t>
+              <a:t>Here is the question for Activity 5: How does this farmer learn the price of his crops in town? Take one minute to think and write your answer in your rough notebook.</a:t>
             </a:r>
             <a:endParaRPr lang="en-US" dirty="0"/>
           </a:p>
@@ -2750,7 +2764,7 @@
           <a:p>
             <a:r>
               <a:rPr lang="en-US" dirty="0"/>
-              <a:t>Let us check the answer together. By phone, radio, newspapers and travellers.</a:t>
+              <a:t>Let us check the answer together. By phone; news also comes by radio, newspapers and travellers.</a:t>
             </a:r>
             <a:endParaRPr lang="en-US" dirty="0"/>
           </a:p>
@@ -2926,7 +2940,7 @@
           <a:p>
             <a:r>
               <a:rPr lang="en-US" dirty="0"/>
-              <a:t>Let us copy the definitions. The key terms of this lesson are defined as follows. On this slide we have Flow. Write each point on a new line, with the key term first, and explain it in your own words when we revise.</a:t>
+              <a:t>Let us copy the definitions. The key terms of this lesson are defined as follows. On this slide we have Flow and Population flow. Write each point on a new line, with the key term first, and explain it in your own words when we revise.</a:t>
             </a:r>
             <a:endParaRPr lang="en-US" dirty="0"/>
           </a:p>
@@ -3014,7 +3028,7 @@
           <a:p>
             <a:r>
               <a:rPr lang="en-US" dirty="0"/>
-              <a:t>Let us copy Economic Relationships. Towns and country sides exchange the following. On this slide we have From villages to towns and From towns to villages. Write each point on a new line, with the key term first, and explain it in your own words when we revise.</a:t>
+              <a:t>Let us copy From the Country Side to the Town. The country side sends the following to towns. Copy the point on Food on the left, then draw the diagram on the right: a town market. Give it a title and label it clearly.</a:t>
             </a:r>
             <a:endParaRPr lang="en-US" dirty="0"/>
           </a:p>
@@ -3102,7 +3116,7 @@
           <a:p>
             <a:r>
               <a:rPr lang="en-US" dirty="0"/>
-              <a:t>Let us copy Socio-cultural Relationships. Towns and villages are linked socially as follows. On this slide we have Population flows and Culture and solidarity. Write each point on a new line, with the key term first, and explain it in your own words when we revise.</a:t>
+              <a:t>Copy the point on Livestock on the left, then draw the diagram on the right: a cattle market. Give it a title and label it clearly.</a:t>
             </a:r>
             <a:endParaRPr lang="en-US" dirty="0"/>
           </a:p>
@@ -3190,7 +3204,7 @@
           <a:p>
             <a:r>
               <a:rPr lang="en-US" dirty="0"/>
-              <a:t>Let us copy Information. Information flows as follows. On this slide we have Media and People. Write each point on a new line, with the key term first, and explain it in your own words when we revise.</a:t>
+              <a:t>We continue with From the Country Side to the Town. On this slide we have Raw materials, Firewood and charcoal and Labour. Write each point on a new line, with the key term first, and explain it in your own words when we revise.</a:t>
             </a:r>
             <a:endParaRPr lang="en-US" dirty="0"/>
           </a:p>
@@ -3278,7 +3292,7 @@
           <a:p>
             <a:r>
               <a:rPr lang="en-US" dirty="0"/>
-              <a:t>Now let us check what you have understood. Question 1: Give two products sent from villages to towns. Answer in your exercise book.</a:t>
+              <a:t>Let us copy From the Town to the Country Side. Towns send the following to the country side. Copy the point on Manufactured goods on the left, then draw the diagram on the right: goods carried to villages. Give it a title and label it clearly.</a:t>
             </a:r>
             <a:endParaRPr lang="en-US" dirty="0"/>
           </a:p>
@@ -3366,7 +3380,7 @@
           <a:p>
             <a:r>
               <a:rPr lang="en-US" dirty="0"/>
-              <a:t>The expected answer is: food crops and cattle. If you got it right, well done.</a:t>
+              <a:t>We continue with From the Town to the Country Side. On this slide we have Farm inputs and Money. Write each point on a new line, with the key term first, and explain it in your own words when we revise. When you finish, we go to the next slide.</a:t>
             </a:r>
             <a:endParaRPr lang="en-US" dirty="0"/>
           </a:p>
@@ -3542,7 +3556,7 @@
           <a:p>
             <a:r>
               <a:rPr lang="en-US" dirty="0"/>
-              <a:t>Now let us check what you have understood. Question 2: Give two socio-cultural links. Answer in your exercise book.</a:t>
+              <a:t>We continue with From the Town to the Country Side. On this slide we have Services. Write each point on a new line, with the key term first, and explain it in your own words when we revise.</a:t>
             </a:r>
             <a:endParaRPr lang="en-US" dirty="0"/>
           </a:p>
@@ -3630,7 +3644,7 @@
           <a:p>
             <a:r>
               <a:rPr lang="en-US" dirty="0"/>
-              <a:t>The expected answer is: festivals and development associations. If you got it right, well done.</a:t>
+              <a:t>Let us copy The Actors of the Exchanges. The following actors link towns and country sides. Copy the point on Buyam-sellams on the left, then draw the diagram on the right: a trader. Give it a title and label it clearly.</a:t>
             </a:r>
             <a:endParaRPr lang="en-US" dirty="0"/>
           </a:p>
@@ -3718,7 +3732,7 @@
           <a:p>
             <a:r>
               <a:rPr lang="en-US" dirty="0"/>
-              <a:t>For those who need more practice, fill in the blanks in your exercise book. The answers are: number 1, buyam-sellam; number 2, flow; number 3, radio (or phone).</a:t>
+              <a:t>We continue with The Actors of the Exchanges. On this slide we have Clandestine transporters and Cooperatives and CIGs. Write each point on a new line, with the key term first, and explain it in your own words when we revise. When you finish, we go to the next slide.</a:t>
             </a:r>
             <a:endParaRPr lang="en-US" dirty="0"/>
           </a:p>
@@ -3806,7 +3820,7 @@
           <a:p>
             <a:r>
               <a:rPr lang="en-US" dirty="0"/>
-              <a:t>For your homework: List three products your family buys from villages and three goods villagers buy in town. We shall correct it at the beginning of our next lesson.</a:t>
+              <a:t>We continue with The Actors of the Exchanges. On this slide we have Councils. Write each point on a new line, with the key term first, and explain it in your own words when we revise.</a:t>
             </a:r>
             <a:endParaRPr lang="en-US" dirty="0"/>
           </a:p>
@@ -3894,7 +3908,7 @@
           <a:p>
             <a:r>
               <a:rPr lang="en-US" dirty="0"/>
-              <a:t>Our next lesson will be on Further Study 7: Rural Exodus in Cameroon. Thank you for your attention, and see you next time.</a:t>
+              <a:t>Let us copy Socio-cultural Relationships. Towns and country sides are linked socially and culturally as follows. Copy the point on Population flows on the left, then draw the diagram on the right: a bus station. Give it a title and label it clearly.</a:t>
             </a:r>
             <a:endParaRPr lang="en-US" dirty="0"/>
           </a:p>
@@ -3982,7 +3996,7 @@
           <a:p>
             <a:r>
               <a:rPr lang="en-US" dirty="0"/>
-              <a:t>Let us play the bilingual game. I say a word in English, and you give me the French word. Then we do the reverse.</a:t>
+              <a:t>We continue with Socio-cultural Relationships. On this slide we have Festivals and ceremonies. Write each point on a new line, with the key term first, and explain it in your own words when we revise.</a:t>
             </a:r>
             <a:endParaRPr lang="en-US" dirty="0"/>
           </a:p>
@@ -4070,7 +4084,7 @@
           <a:p>
             <a:r>
               <a:rPr lang="en-US" dirty="0"/>
-              <a:t>I record this information in the official logbook of the class after the lesson.</a:t>
+              <a:t>Copy the point on Development associations on the left, then draw the diagram on the right: a village chiefdom. Give it a title and label it clearly.</a:t>
             </a:r>
             <a:endParaRPr lang="en-US" dirty="0"/>
           </a:p>
@@ -4158,7 +4172,7 @@
           <a:p>
             <a:r>
               <a:rPr lang="en-US" dirty="0"/>
-              <a:t>I complete the second page of the logbook: the matter taught, the evaluation, the homework and the attendance.</a:t>
+              <a:t>We continue with Socio-cultural Relationships. On this slide we have Education and health and Spread of town ways of life. Write each point on a new line, with the key term first, and explain it in your own words when we revise.</a:t>
             </a:r>
             <a:endParaRPr lang="en-US" dirty="0"/>
           </a:p>
@@ -4246,7 +4260,7 @@
           <a:p>
             <a:r>
               <a:rPr lang="en-US" dirty="0"/>
-              <a:t>This slide is for me, the teacher: it gives the timing of the lesson and what to do if the projector is not available.</a:t>
+              <a:t>Let us copy Information. Information flows between towns and country sides as follows. On this slide we have Radio and television. Write each point on a new line, with the key term first, and explain it in your own words when we revise.</a:t>
             </a:r>
             <a:endParaRPr lang="en-US" dirty="0"/>
           </a:p>
@@ -4334,7 +4348,7 @@
           <a:p>
             <a:r>
               <a:rPr lang="en-US" dirty="0"/>
-              <a:t>These are the references and picture credits used to prepare this lesson.</a:t>
+              <a:t>Copy the point on Telephone and internet on the left, then draw the diagram on the right: a farmer using a phone. Give it a title and label it clearly.</a:t>
             </a:r>
             <a:endParaRPr lang="en-US" dirty="0"/>
           </a:p>
@@ -4464,6 +4478,886 @@
 </p:notes>
 </file>
 
+<file path=ppt/notesSlides/notesSlide50.xml><?xml version="1.0" encoding="utf-8"?>
+<p:notes xmlns:a="http://schemas.openxmlformats.org/drawingml/2006/main" xmlns:r="http://schemas.openxmlformats.org/officeDocument/2006/relationships" xmlns:p="http://schemas.openxmlformats.org/presentationml/2006/main">
+  <p:cSld>
+    <p:spTree>
+      <p:nvGrpSpPr>
+        <p:cNvPr id="1" name=""/>
+        <p:cNvGrpSpPr/>
+        <p:nvPr/>
+      </p:nvGrpSpPr>
+      <p:grpSpPr>
+        <a:xfrm>
+          <a:off x="0" y="0"/>
+          <a:ext cx="0" cy="0"/>
+          <a:chOff x="0" y="0"/>
+          <a:chExt cx="0" cy="0"/>
+        </a:xfrm>
+      </p:grpSpPr>
+      <p:sp>
+        <p:nvSpPr>
+          <p:cNvPr id="2" name="Slide Image Placeholder 1"/>
+          <p:cNvSpPr>
+            <a:spLocks noGrp="1" noRot="1" noChangeAspect="1"/>
+          </p:cNvSpPr>
+          <p:nvPr>
+            <p:ph type="sldImg"/>
+          </p:nvPr>
+        </p:nvSpPr>
+        <p:spPr/>
+      </p:sp>
+      <p:sp>
+        <p:nvSpPr>
+          <p:cNvPr id="3" name="Notes Placeholder 2"/>
+          <p:cNvSpPr>
+            <a:spLocks noGrp="1"/>
+          </p:cNvSpPr>
+          <p:nvPr>
+            <p:ph type="body" idx="1"/>
+          </p:nvPr>
+        </p:nvSpPr>
+        <p:spPr/>
+        <p:txBody>
+          <a:bodyPr/>
+          <a:lstStyle/>
+          <a:p>
+            <a:r>
+              <a:rPr lang="en-US" dirty="0"/>
+              <a:t>We continue with Information. On this slide we have Newspapers and People. Write each point on a new line, with the key term first, and explain it in your own words when we revise.</a:t>
+            </a:r>
+            <a:endParaRPr lang="en-US" dirty="0"/>
+          </a:p>
+        </p:txBody>
+      </p:sp>
+      <p:sp>
+        <p:nvSpPr>
+          <p:cNvPr id="4" name="Slide Number Placeholder 3"/>
+          <p:cNvSpPr>
+            <a:spLocks noGrp="1"/>
+          </p:cNvSpPr>
+          <p:nvPr>
+            <p:ph type="sldNum" sz="quarter" idx="10"/>
+          </p:nvPr>
+        </p:nvSpPr>
+        <p:spPr/>
+        <p:txBody>
+          <a:bodyPr/>
+          <a:lstStyle/>
+          <a:p>
+            <a:fld id="{F7021451-1387-4CA6-816F-3879F97B5CBC}" type="slidenum">
+              <a:rPr lang="en-US"/>
+              <a:t>50</a:t>
+            </a:fld>
+            <a:endParaRPr lang="en-US"/>
+          </a:p>
+        </p:txBody>
+      </p:sp>
+    </p:spTree>
+    <p:extLst>
+      <p:ext uri="{BB962C8B-B14F-4D97-AF65-F5344CB8AC3E}">
+        <p14:creationId xmlns:p14="http://schemas.microsoft.com/office/powerpoint/2010/main" val="1024086991"/>
+      </p:ext>
+    </p:extLst>
+  </p:cSld>
+  <p:clrMapOvr>
+    <a:masterClrMapping/>
+  </p:clrMapOvr>
+</p:notes>
+</file>
+
+<file path=ppt/notesSlides/notesSlide51.xml><?xml version="1.0" encoding="utf-8"?>
+<p:notes xmlns:a="http://schemas.openxmlformats.org/drawingml/2006/main" xmlns:r="http://schemas.openxmlformats.org/officeDocument/2006/relationships" xmlns:p="http://schemas.openxmlformats.org/presentationml/2006/main">
+  <p:cSld>
+    <p:spTree>
+      <p:nvGrpSpPr>
+        <p:cNvPr id="1" name=""/>
+        <p:cNvGrpSpPr/>
+        <p:nvPr/>
+      </p:nvGrpSpPr>
+      <p:grpSpPr>
+        <a:xfrm>
+          <a:off x="0" y="0"/>
+          <a:ext cx="0" cy="0"/>
+          <a:chOff x="0" y="0"/>
+          <a:chExt cx="0" cy="0"/>
+        </a:xfrm>
+      </p:grpSpPr>
+      <p:sp>
+        <p:nvSpPr>
+          <p:cNvPr id="2" name="Slide Image Placeholder 1"/>
+          <p:cNvSpPr>
+            <a:spLocks noGrp="1" noRot="1" noChangeAspect="1"/>
+          </p:cNvSpPr>
+          <p:nvPr>
+            <p:ph type="sldImg"/>
+          </p:nvPr>
+        </p:nvSpPr>
+        <p:spPr/>
+      </p:sp>
+      <p:sp>
+        <p:nvSpPr>
+          <p:cNvPr id="3" name="Notes Placeholder 2"/>
+          <p:cNvSpPr>
+            <a:spLocks noGrp="1"/>
+          </p:cNvSpPr>
+          <p:nvPr>
+            <p:ph type="body" idx="1"/>
+          </p:nvPr>
+        </p:nvSpPr>
+        <p:spPr/>
+        <p:txBody>
+          <a:bodyPr/>
+          <a:lstStyle/>
+          <a:p>
+            <a:r>
+              <a:rPr lang="en-US" dirty="0"/>
+              <a:t>Now let us check what you have understood. Question 1: Give two products sent from villages to towns. Answer in your exercise book.</a:t>
+            </a:r>
+            <a:endParaRPr lang="en-US" dirty="0"/>
+          </a:p>
+        </p:txBody>
+      </p:sp>
+      <p:sp>
+        <p:nvSpPr>
+          <p:cNvPr id="4" name="Slide Number Placeholder 3"/>
+          <p:cNvSpPr>
+            <a:spLocks noGrp="1"/>
+          </p:cNvSpPr>
+          <p:nvPr>
+            <p:ph type="sldNum" sz="quarter" idx="10"/>
+          </p:nvPr>
+        </p:nvSpPr>
+        <p:spPr/>
+        <p:txBody>
+          <a:bodyPr/>
+          <a:lstStyle/>
+          <a:p>
+            <a:fld id="{F7021451-1387-4CA6-816F-3879F97B5CBC}" type="slidenum">
+              <a:rPr lang="en-US"/>
+              <a:t>51</a:t>
+            </a:fld>
+            <a:endParaRPr lang="en-US"/>
+          </a:p>
+        </p:txBody>
+      </p:sp>
+    </p:spTree>
+    <p:extLst>
+      <p:ext uri="{BB962C8B-B14F-4D97-AF65-F5344CB8AC3E}">
+        <p14:creationId xmlns:p14="http://schemas.microsoft.com/office/powerpoint/2010/main" val="1024086991"/>
+      </p:ext>
+    </p:extLst>
+  </p:cSld>
+  <p:clrMapOvr>
+    <a:masterClrMapping/>
+  </p:clrMapOvr>
+</p:notes>
+</file>
+
+<file path=ppt/notesSlides/notesSlide52.xml><?xml version="1.0" encoding="utf-8"?>
+<p:notes xmlns:a="http://schemas.openxmlformats.org/drawingml/2006/main" xmlns:r="http://schemas.openxmlformats.org/officeDocument/2006/relationships" xmlns:p="http://schemas.openxmlformats.org/presentationml/2006/main">
+  <p:cSld>
+    <p:spTree>
+      <p:nvGrpSpPr>
+        <p:cNvPr id="1" name=""/>
+        <p:cNvGrpSpPr/>
+        <p:nvPr/>
+      </p:nvGrpSpPr>
+      <p:grpSpPr>
+        <a:xfrm>
+          <a:off x="0" y="0"/>
+          <a:ext cx="0" cy="0"/>
+          <a:chOff x="0" y="0"/>
+          <a:chExt cx="0" cy="0"/>
+        </a:xfrm>
+      </p:grpSpPr>
+      <p:sp>
+        <p:nvSpPr>
+          <p:cNvPr id="2" name="Slide Image Placeholder 1"/>
+          <p:cNvSpPr>
+            <a:spLocks noGrp="1" noRot="1" noChangeAspect="1"/>
+          </p:cNvSpPr>
+          <p:nvPr>
+            <p:ph type="sldImg"/>
+          </p:nvPr>
+        </p:nvSpPr>
+        <p:spPr/>
+      </p:sp>
+      <p:sp>
+        <p:nvSpPr>
+          <p:cNvPr id="3" name="Notes Placeholder 2"/>
+          <p:cNvSpPr>
+            <a:spLocks noGrp="1"/>
+          </p:cNvSpPr>
+          <p:nvPr>
+            <p:ph type="body" idx="1"/>
+          </p:nvPr>
+        </p:nvSpPr>
+        <p:spPr/>
+        <p:txBody>
+          <a:bodyPr/>
+          <a:lstStyle/>
+          <a:p>
+            <a:r>
+              <a:rPr lang="en-US" dirty="0"/>
+              <a:t>The expected answer is: food crops and cattle. If you got it right, well done.</a:t>
+            </a:r>
+            <a:endParaRPr lang="en-US" dirty="0"/>
+          </a:p>
+        </p:txBody>
+      </p:sp>
+      <p:sp>
+        <p:nvSpPr>
+          <p:cNvPr id="4" name="Slide Number Placeholder 3"/>
+          <p:cNvSpPr>
+            <a:spLocks noGrp="1"/>
+          </p:cNvSpPr>
+          <p:nvPr>
+            <p:ph type="sldNum" sz="quarter" idx="10"/>
+          </p:nvPr>
+        </p:nvSpPr>
+        <p:spPr/>
+        <p:txBody>
+          <a:bodyPr/>
+          <a:lstStyle/>
+          <a:p>
+            <a:fld id="{F7021451-1387-4CA6-816F-3879F97B5CBC}" type="slidenum">
+              <a:rPr lang="en-US"/>
+              <a:t>52</a:t>
+            </a:fld>
+            <a:endParaRPr lang="en-US"/>
+          </a:p>
+        </p:txBody>
+      </p:sp>
+    </p:spTree>
+    <p:extLst>
+      <p:ext uri="{BB962C8B-B14F-4D97-AF65-F5344CB8AC3E}">
+        <p14:creationId xmlns:p14="http://schemas.microsoft.com/office/powerpoint/2010/main" val="1024086991"/>
+      </p:ext>
+    </p:extLst>
+  </p:cSld>
+  <p:clrMapOvr>
+    <a:masterClrMapping/>
+  </p:clrMapOvr>
+</p:notes>
+</file>
+
+<file path=ppt/notesSlides/notesSlide53.xml><?xml version="1.0" encoding="utf-8"?>
+<p:notes xmlns:a="http://schemas.openxmlformats.org/drawingml/2006/main" xmlns:r="http://schemas.openxmlformats.org/officeDocument/2006/relationships" xmlns:p="http://schemas.openxmlformats.org/presentationml/2006/main">
+  <p:cSld>
+    <p:spTree>
+      <p:nvGrpSpPr>
+        <p:cNvPr id="1" name=""/>
+        <p:cNvGrpSpPr/>
+        <p:nvPr/>
+      </p:nvGrpSpPr>
+      <p:grpSpPr>
+        <a:xfrm>
+          <a:off x="0" y="0"/>
+          <a:ext cx="0" cy="0"/>
+          <a:chOff x="0" y="0"/>
+          <a:chExt cx="0" cy="0"/>
+        </a:xfrm>
+      </p:grpSpPr>
+      <p:sp>
+        <p:nvSpPr>
+          <p:cNvPr id="2" name="Slide Image Placeholder 1"/>
+          <p:cNvSpPr>
+            <a:spLocks noGrp="1" noRot="1" noChangeAspect="1"/>
+          </p:cNvSpPr>
+          <p:nvPr>
+            <p:ph type="sldImg"/>
+          </p:nvPr>
+        </p:nvSpPr>
+        <p:spPr/>
+      </p:sp>
+      <p:sp>
+        <p:nvSpPr>
+          <p:cNvPr id="3" name="Notes Placeholder 2"/>
+          <p:cNvSpPr>
+            <a:spLocks noGrp="1"/>
+          </p:cNvSpPr>
+          <p:nvPr>
+            <p:ph type="body" idx="1"/>
+          </p:nvPr>
+        </p:nvSpPr>
+        <p:spPr/>
+        <p:txBody>
+          <a:bodyPr/>
+          <a:lstStyle/>
+          <a:p>
+            <a:r>
+              <a:rPr lang="en-US" dirty="0"/>
+              <a:t>Now let us check what you have understood. Question 2: Give two socio-cultural links. Answer in your exercise book.</a:t>
+            </a:r>
+            <a:endParaRPr lang="en-US" dirty="0"/>
+          </a:p>
+        </p:txBody>
+      </p:sp>
+      <p:sp>
+        <p:nvSpPr>
+          <p:cNvPr id="4" name="Slide Number Placeholder 3"/>
+          <p:cNvSpPr>
+            <a:spLocks noGrp="1"/>
+          </p:cNvSpPr>
+          <p:nvPr>
+            <p:ph type="sldNum" sz="quarter" idx="10"/>
+          </p:nvPr>
+        </p:nvSpPr>
+        <p:spPr/>
+        <p:txBody>
+          <a:bodyPr/>
+          <a:lstStyle/>
+          <a:p>
+            <a:fld id="{F7021451-1387-4CA6-816F-3879F97B5CBC}" type="slidenum">
+              <a:rPr lang="en-US"/>
+              <a:t>53</a:t>
+            </a:fld>
+            <a:endParaRPr lang="en-US"/>
+          </a:p>
+        </p:txBody>
+      </p:sp>
+    </p:spTree>
+    <p:extLst>
+      <p:ext uri="{BB962C8B-B14F-4D97-AF65-F5344CB8AC3E}">
+        <p14:creationId xmlns:p14="http://schemas.microsoft.com/office/powerpoint/2010/main" val="1024086991"/>
+      </p:ext>
+    </p:extLst>
+  </p:cSld>
+  <p:clrMapOvr>
+    <a:masterClrMapping/>
+  </p:clrMapOvr>
+</p:notes>
+</file>
+
+<file path=ppt/notesSlides/notesSlide54.xml><?xml version="1.0" encoding="utf-8"?>
+<p:notes xmlns:a="http://schemas.openxmlformats.org/drawingml/2006/main" xmlns:r="http://schemas.openxmlformats.org/officeDocument/2006/relationships" xmlns:p="http://schemas.openxmlformats.org/presentationml/2006/main">
+  <p:cSld>
+    <p:spTree>
+      <p:nvGrpSpPr>
+        <p:cNvPr id="1" name=""/>
+        <p:cNvGrpSpPr/>
+        <p:nvPr/>
+      </p:nvGrpSpPr>
+      <p:grpSpPr>
+        <a:xfrm>
+          <a:off x="0" y="0"/>
+          <a:ext cx="0" cy="0"/>
+          <a:chOff x="0" y="0"/>
+          <a:chExt cx="0" cy="0"/>
+        </a:xfrm>
+      </p:grpSpPr>
+      <p:sp>
+        <p:nvSpPr>
+          <p:cNvPr id="2" name="Slide Image Placeholder 1"/>
+          <p:cNvSpPr>
+            <a:spLocks noGrp="1" noRot="1" noChangeAspect="1"/>
+          </p:cNvSpPr>
+          <p:nvPr>
+            <p:ph type="sldImg"/>
+          </p:nvPr>
+        </p:nvSpPr>
+        <p:spPr/>
+      </p:sp>
+      <p:sp>
+        <p:nvSpPr>
+          <p:cNvPr id="3" name="Notes Placeholder 2"/>
+          <p:cNvSpPr>
+            <a:spLocks noGrp="1"/>
+          </p:cNvSpPr>
+          <p:nvPr>
+            <p:ph type="body" idx="1"/>
+          </p:nvPr>
+        </p:nvSpPr>
+        <p:spPr/>
+        <p:txBody>
+          <a:bodyPr/>
+          <a:lstStyle/>
+          <a:p>
+            <a:r>
+              <a:rPr lang="en-US" dirty="0"/>
+              <a:t>The expected answer is: festivals and development associations. If you got it right, well done.</a:t>
+            </a:r>
+            <a:endParaRPr lang="en-US" dirty="0"/>
+          </a:p>
+        </p:txBody>
+      </p:sp>
+      <p:sp>
+        <p:nvSpPr>
+          <p:cNvPr id="4" name="Slide Number Placeholder 3"/>
+          <p:cNvSpPr>
+            <a:spLocks noGrp="1"/>
+          </p:cNvSpPr>
+          <p:nvPr>
+            <p:ph type="sldNum" sz="quarter" idx="10"/>
+          </p:nvPr>
+        </p:nvSpPr>
+        <p:spPr/>
+        <p:txBody>
+          <a:bodyPr/>
+          <a:lstStyle/>
+          <a:p>
+            <a:fld id="{F7021451-1387-4CA6-816F-3879F97B5CBC}" type="slidenum">
+              <a:rPr lang="en-US"/>
+              <a:t>54</a:t>
+            </a:fld>
+            <a:endParaRPr lang="en-US"/>
+          </a:p>
+        </p:txBody>
+      </p:sp>
+    </p:spTree>
+    <p:extLst>
+      <p:ext uri="{BB962C8B-B14F-4D97-AF65-F5344CB8AC3E}">
+        <p14:creationId xmlns:p14="http://schemas.microsoft.com/office/powerpoint/2010/main" val="1024086991"/>
+      </p:ext>
+    </p:extLst>
+  </p:cSld>
+  <p:clrMapOvr>
+    <a:masterClrMapping/>
+  </p:clrMapOvr>
+</p:notes>
+</file>
+
+<file path=ppt/notesSlides/notesSlide55.xml><?xml version="1.0" encoding="utf-8"?>
+<p:notes xmlns:a="http://schemas.openxmlformats.org/drawingml/2006/main" xmlns:r="http://schemas.openxmlformats.org/officeDocument/2006/relationships" xmlns:p="http://schemas.openxmlformats.org/presentationml/2006/main">
+  <p:cSld>
+    <p:spTree>
+      <p:nvGrpSpPr>
+        <p:cNvPr id="1" name=""/>
+        <p:cNvGrpSpPr/>
+        <p:nvPr/>
+      </p:nvGrpSpPr>
+      <p:grpSpPr>
+        <a:xfrm>
+          <a:off x="0" y="0"/>
+          <a:ext cx="0" cy="0"/>
+          <a:chOff x="0" y="0"/>
+          <a:chExt cx="0" cy="0"/>
+        </a:xfrm>
+      </p:grpSpPr>
+      <p:sp>
+        <p:nvSpPr>
+          <p:cNvPr id="2" name="Slide Image Placeholder 1"/>
+          <p:cNvSpPr>
+            <a:spLocks noGrp="1" noRot="1" noChangeAspect="1"/>
+          </p:cNvSpPr>
+          <p:nvPr>
+            <p:ph type="sldImg"/>
+          </p:nvPr>
+        </p:nvSpPr>
+        <p:spPr/>
+      </p:sp>
+      <p:sp>
+        <p:nvSpPr>
+          <p:cNvPr id="3" name="Notes Placeholder 2"/>
+          <p:cNvSpPr>
+            <a:spLocks noGrp="1"/>
+          </p:cNvSpPr>
+          <p:nvPr>
+            <p:ph type="body" idx="1"/>
+          </p:nvPr>
+        </p:nvSpPr>
+        <p:spPr/>
+        <p:txBody>
+          <a:bodyPr/>
+          <a:lstStyle/>
+          <a:p>
+            <a:r>
+              <a:rPr lang="en-US" dirty="0"/>
+              <a:t>For those who need more practice, fill in the blanks in your exercise book. The answers are: number 1, buyam-sellam; number 2, flow; number 3, cooperative (or CIG).</a:t>
+            </a:r>
+            <a:endParaRPr lang="en-US" dirty="0"/>
+          </a:p>
+        </p:txBody>
+      </p:sp>
+      <p:sp>
+        <p:nvSpPr>
+          <p:cNvPr id="4" name="Slide Number Placeholder 3"/>
+          <p:cNvSpPr>
+            <a:spLocks noGrp="1"/>
+          </p:cNvSpPr>
+          <p:nvPr>
+            <p:ph type="sldNum" sz="quarter" idx="10"/>
+          </p:nvPr>
+        </p:nvSpPr>
+        <p:spPr/>
+        <p:txBody>
+          <a:bodyPr/>
+          <a:lstStyle/>
+          <a:p>
+            <a:fld id="{F7021451-1387-4CA6-816F-3879F97B5CBC}" type="slidenum">
+              <a:rPr lang="en-US"/>
+              <a:t>55</a:t>
+            </a:fld>
+            <a:endParaRPr lang="en-US"/>
+          </a:p>
+        </p:txBody>
+      </p:sp>
+    </p:spTree>
+    <p:extLst>
+      <p:ext uri="{BB962C8B-B14F-4D97-AF65-F5344CB8AC3E}">
+        <p14:creationId xmlns:p14="http://schemas.microsoft.com/office/powerpoint/2010/main" val="1024086991"/>
+      </p:ext>
+    </p:extLst>
+  </p:cSld>
+  <p:clrMapOvr>
+    <a:masterClrMapping/>
+  </p:clrMapOvr>
+</p:notes>
+</file>
+
+<file path=ppt/notesSlides/notesSlide56.xml><?xml version="1.0" encoding="utf-8"?>
+<p:notes xmlns:a="http://schemas.openxmlformats.org/drawingml/2006/main" xmlns:r="http://schemas.openxmlformats.org/officeDocument/2006/relationships" xmlns:p="http://schemas.openxmlformats.org/presentationml/2006/main">
+  <p:cSld>
+    <p:spTree>
+      <p:nvGrpSpPr>
+        <p:cNvPr id="1" name=""/>
+        <p:cNvGrpSpPr/>
+        <p:nvPr/>
+      </p:nvGrpSpPr>
+      <p:grpSpPr>
+        <a:xfrm>
+          <a:off x="0" y="0"/>
+          <a:ext cx="0" cy="0"/>
+          <a:chOff x="0" y="0"/>
+          <a:chExt cx="0" cy="0"/>
+        </a:xfrm>
+      </p:grpSpPr>
+      <p:sp>
+        <p:nvSpPr>
+          <p:cNvPr id="2" name="Slide Image Placeholder 1"/>
+          <p:cNvSpPr>
+            <a:spLocks noGrp="1" noRot="1" noChangeAspect="1"/>
+          </p:cNvSpPr>
+          <p:nvPr>
+            <p:ph type="sldImg"/>
+          </p:nvPr>
+        </p:nvSpPr>
+        <p:spPr/>
+      </p:sp>
+      <p:sp>
+        <p:nvSpPr>
+          <p:cNvPr id="3" name="Notes Placeholder 2"/>
+          <p:cNvSpPr>
+            <a:spLocks noGrp="1"/>
+          </p:cNvSpPr>
+          <p:nvPr>
+            <p:ph type="body" idx="1"/>
+          </p:nvPr>
+        </p:nvSpPr>
+        <p:spPr/>
+        <p:txBody>
+          <a:bodyPr/>
+          <a:lstStyle/>
+          <a:p>
+            <a:r>
+              <a:rPr lang="en-US" dirty="0"/>
+              <a:t>For your homework: List three products your family buys from villages and three goods villagers buy in town. We shall correct it at the beginning of our next lesson.</a:t>
+            </a:r>
+            <a:endParaRPr lang="en-US" dirty="0"/>
+          </a:p>
+        </p:txBody>
+      </p:sp>
+      <p:sp>
+        <p:nvSpPr>
+          <p:cNvPr id="4" name="Slide Number Placeholder 3"/>
+          <p:cNvSpPr>
+            <a:spLocks noGrp="1"/>
+          </p:cNvSpPr>
+          <p:nvPr>
+            <p:ph type="sldNum" sz="quarter" idx="10"/>
+          </p:nvPr>
+        </p:nvSpPr>
+        <p:spPr/>
+        <p:txBody>
+          <a:bodyPr/>
+          <a:lstStyle/>
+          <a:p>
+            <a:fld id="{F7021451-1387-4CA6-816F-3879F97B5CBC}" type="slidenum">
+              <a:rPr lang="en-US"/>
+              <a:t>56</a:t>
+            </a:fld>
+            <a:endParaRPr lang="en-US"/>
+          </a:p>
+        </p:txBody>
+      </p:sp>
+    </p:spTree>
+    <p:extLst>
+      <p:ext uri="{BB962C8B-B14F-4D97-AF65-F5344CB8AC3E}">
+        <p14:creationId xmlns:p14="http://schemas.microsoft.com/office/powerpoint/2010/main" val="1024086991"/>
+      </p:ext>
+    </p:extLst>
+  </p:cSld>
+  <p:clrMapOvr>
+    <a:masterClrMapping/>
+  </p:clrMapOvr>
+</p:notes>
+</file>
+
+<file path=ppt/notesSlides/notesSlide57.xml><?xml version="1.0" encoding="utf-8"?>
+<p:notes xmlns:a="http://schemas.openxmlformats.org/drawingml/2006/main" xmlns:r="http://schemas.openxmlformats.org/officeDocument/2006/relationships" xmlns:p="http://schemas.openxmlformats.org/presentationml/2006/main">
+  <p:cSld>
+    <p:spTree>
+      <p:nvGrpSpPr>
+        <p:cNvPr id="1" name=""/>
+        <p:cNvGrpSpPr/>
+        <p:nvPr/>
+      </p:nvGrpSpPr>
+      <p:grpSpPr>
+        <a:xfrm>
+          <a:off x="0" y="0"/>
+          <a:ext cx="0" cy="0"/>
+          <a:chOff x="0" y="0"/>
+          <a:chExt cx="0" cy="0"/>
+        </a:xfrm>
+      </p:grpSpPr>
+      <p:sp>
+        <p:nvSpPr>
+          <p:cNvPr id="2" name="Slide Image Placeholder 1"/>
+          <p:cNvSpPr>
+            <a:spLocks noGrp="1" noRot="1" noChangeAspect="1"/>
+          </p:cNvSpPr>
+          <p:nvPr>
+            <p:ph type="sldImg"/>
+          </p:nvPr>
+        </p:nvSpPr>
+        <p:spPr/>
+      </p:sp>
+      <p:sp>
+        <p:nvSpPr>
+          <p:cNvPr id="3" name="Notes Placeholder 2"/>
+          <p:cNvSpPr>
+            <a:spLocks noGrp="1"/>
+          </p:cNvSpPr>
+          <p:nvPr>
+            <p:ph type="body" idx="1"/>
+          </p:nvPr>
+        </p:nvSpPr>
+        <p:spPr/>
+        <p:txBody>
+          <a:bodyPr/>
+          <a:lstStyle/>
+          <a:p>
+            <a:r>
+              <a:rPr lang="en-US" dirty="0"/>
+              <a:t>Our next lesson will be on Further Study 7: Rural Exodus in Cameroon. Thank you for your attention, and see you next time.</a:t>
+            </a:r>
+            <a:endParaRPr lang="en-US" dirty="0"/>
+          </a:p>
+        </p:txBody>
+      </p:sp>
+      <p:sp>
+        <p:nvSpPr>
+          <p:cNvPr id="4" name="Slide Number Placeholder 3"/>
+          <p:cNvSpPr>
+            <a:spLocks noGrp="1"/>
+          </p:cNvSpPr>
+          <p:nvPr>
+            <p:ph type="sldNum" sz="quarter" idx="10"/>
+          </p:nvPr>
+        </p:nvSpPr>
+        <p:spPr/>
+        <p:txBody>
+          <a:bodyPr/>
+          <a:lstStyle/>
+          <a:p>
+            <a:fld id="{F7021451-1387-4CA6-816F-3879F97B5CBC}" type="slidenum">
+              <a:rPr lang="en-US"/>
+              <a:t>57</a:t>
+            </a:fld>
+            <a:endParaRPr lang="en-US"/>
+          </a:p>
+        </p:txBody>
+      </p:sp>
+    </p:spTree>
+    <p:extLst>
+      <p:ext uri="{BB962C8B-B14F-4D97-AF65-F5344CB8AC3E}">
+        <p14:creationId xmlns:p14="http://schemas.microsoft.com/office/powerpoint/2010/main" val="1024086991"/>
+      </p:ext>
+    </p:extLst>
+  </p:cSld>
+  <p:clrMapOvr>
+    <a:masterClrMapping/>
+  </p:clrMapOvr>
+</p:notes>
+</file>
+
+<file path=ppt/notesSlides/notesSlide58.xml><?xml version="1.0" encoding="utf-8"?>
+<p:notes xmlns:a="http://schemas.openxmlformats.org/drawingml/2006/main" xmlns:r="http://schemas.openxmlformats.org/officeDocument/2006/relationships" xmlns:p="http://schemas.openxmlformats.org/presentationml/2006/main">
+  <p:cSld>
+    <p:spTree>
+      <p:nvGrpSpPr>
+        <p:cNvPr id="1" name=""/>
+        <p:cNvGrpSpPr/>
+        <p:nvPr/>
+      </p:nvGrpSpPr>
+      <p:grpSpPr>
+        <a:xfrm>
+          <a:off x="0" y="0"/>
+          <a:ext cx="0" cy="0"/>
+          <a:chOff x="0" y="0"/>
+          <a:chExt cx="0" cy="0"/>
+        </a:xfrm>
+      </p:grpSpPr>
+      <p:sp>
+        <p:nvSpPr>
+          <p:cNvPr id="2" name="Slide Image Placeholder 1"/>
+          <p:cNvSpPr>
+            <a:spLocks noGrp="1" noRot="1" noChangeAspect="1"/>
+          </p:cNvSpPr>
+          <p:nvPr>
+            <p:ph type="sldImg"/>
+          </p:nvPr>
+        </p:nvSpPr>
+        <p:spPr/>
+      </p:sp>
+      <p:sp>
+        <p:nvSpPr>
+          <p:cNvPr id="3" name="Notes Placeholder 2"/>
+          <p:cNvSpPr>
+            <a:spLocks noGrp="1"/>
+          </p:cNvSpPr>
+          <p:nvPr>
+            <p:ph type="body" idx="1"/>
+          </p:nvPr>
+        </p:nvSpPr>
+        <p:spPr/>
+        <p:txBody>
+          <a:bodyPr/>
+          <a:lstStyle/>
+          <a:p>
+            <a:r>
+              <a:rPr lang="en-US" dirty="0"/>
+              <a:t>Let us play the bilingual game. I say a word in English, and you give me the French word. Then we do the reverse.</a:t>
+            </a:r>
+            <a:endParaRPr lang="en-US" dirty="0"/>
+          </a:p>
+        </p:txBody>
+      </p:sp>
+      <p:sp>
+        <p:nvSpPr>
+          <p:cNvPr id="4" name="Slide Number Placeholder 3"/>
+          <p:cNvSpPr>
+            <a:spLocks noGrp="1"/>
+          </p:cNvSpPr>
+          <p:nvPr>
+            <p:ph type="sldNum" sz="quarter" idx="10"/>
+          </p:nvPr>
+        </p:nvSpPr>
+        <p:spPr/>
+        <p:txBody>
+          <a:bodyPr/>
+          <a:lstStyle/>
+          <a:p>
+            <a:fld id="{F7021451-1387-4CA6-816F-3879F97B5CBC}" type="slidenum">
+              <a:rPr lang="en-US"/>
+              <a:t>58</a:t>
+            </a:fld>
+            <a:endParaRPr lang="en-US"/>
+          </a:p>
+        </p:txBody>
+      </p:sp>
+    </p:spTree>
+    <p:extLst>
+      <p:ext uri="{BB962C8B-B14F-4D97-AF65-F5344CB8AC3E}">
+        <p14:creationId xmlns:p14="http://schemas.microsoft.com/office/powerpoint/2010/main" val="1024086991"/>
+      </p:ext>
+    </p:extLst>
+  </p:cSld>
+  <p:clrMapOvr>
+    <a:masterClrMapping/>
+  </p:clrMapOvr>
+</p:notes>
+</file>
+
+<file path=ppt/notesSlides/notesSlide59.xml><?xml version="1.0" encoding="utf-8"?>
+<p:notes xmlns:a="http://schemas.openxmlformats.org/drawingml/2006/main" xmlns:r="http://schemas.openxmlformats.org/officeDocument/2006/relationships" xmlns:p="http://schemas.openxmlformats.org/presentationml/2006/main">
+  <p:cSld>
+    <p:spTree>
+      <p:nvGrpSpPr>
+        <p:cNvPr id="1" name=""/>
+        <p:cNvGrpSpPr/>
+        <p:nvPr/>
+      </p:nvGrpSpPr>
+      <p:grpSpPr>
+        <a:xfrm>
+          <a:off x="0" y="0"/>
+          <a:ext cx="0" cy="0"/>
+          <a:chOff x="0" y="0"/>
+          <a:chExt cx="0" cy="0"/>
+        </a:xfrm>
+      </p:grpSpPr>
+      <p:sp>
+        <p:nvSpPr>
+          <p:cNvPr id="2" name="Slide Image Placeholder 1"/>
+          <p:cNvSpPr>
+            <a:spLocks noGrp="1" noRot="1" noChangeAspect="1"/>
+          </p:cNvSpPr>
+          <p:nvPr>
+            <p:ph type="sldImg"/>
+          </p:nvPr>
+        </p:nvSpPr>
+        <p:spPr/>
+      </p:sp>
+      <p:sp>
+        <p:nvSpPr>
+          <p:cNvPr id="3" name="Notes Placeholder 2"/>
+          <p:cNvSpPr>
+            <a:spLocks noGrp="1"/>
+          </p:cNvSpPr>
+          <p:nvPr>
+            <p:ph type="body" idx="1"/>
+          </p:nvPr>
+        </p:nvSpPr>
+        <p:spPr/>
+        <p:txBody>
+          <a:bodyPr/>
+          <a:lstStyle/>
+          <a:p>
+            <a:r>
+              <a:rPr lang="en-US" dirty="0"/>
+              <a:t>I record this information in the official logbook of the class after the lesson.</a:t>
+            </a:r>
+            <a:endParaRPr lang="en-US" dirty="0"/>
+          </a:p>
+        </p:txBody>
+      </p:sp>
+      <p:sp>
+        <p:nvSpPr>
+          <p:cNvPr id="4" name="Slide Number Placeholder 3"/>
+          <p:cNvSpPr>
+            <a:spLocks noGrp="1"/>
+          </p:cNvSpPr>
+          <p:nvPr>
+            <p:ph type="sldNum" sz="quarter" idx="10"/>
+          </p:nvPr>
+        </p:nvSpPr>
+        <p:spPr/>
+        <p:txBody>
+          <a:bodyPr/>
+          <a:lstStyle/>
+          <a:p>
+            <a:fld id="{F7021451-1387-4CA6-816F-3879F97B5CBC}" type="slidenum">
+              <a:rPr lang="en-US"/>
+              <a:t>59</a:t>
+            </a:fld>
+            <a:endParaRPr lang="en-US"/>
+          </a:p>
+        </p:txBody>
+      </p:sp>
+    </p:spTree>
+    <p:extLst>
+      <p:ext uri="{BB962C8B-B14F-4D97-AF65-F5344CB8AC3E}">
+        <p14:creationId xmlns:p14="http://schemas.microsoft.com/office/powerpoint/2010/main" val="1024086991"/>
+      </p:ext>
+    </p:extLst>
+  </p:cSld>
+  <p:clrMapOvr>
+    <a:masterClrMapping/>
+  </p:clrMapOvr>
+</p:notes>
+</file>
+
 <file path=ppt/notesSlides/notesSlide6.xml><?xml version="1.0" encoding="utf-8"?>
 <p:notes xmlns:a="http://schemas.openxmlformats.org/drawingml/2006/main" xmlns:r="http://schemas.openxmlformats.org/officeDocument/2006/relationships" xmlns:p="http://schemas.openxmlformats.org/presentationml/2006/main">
   <p:cSld>
@@ -4534,6 +5428,358 @@
             <a:fld id="{F7021451-1387-4CA6-816F-3879F97B5CBC}" type="slidenum">
               <a:rPr lang="en-US"/>
               <a:t>6</a:t>
+            </a:fld>
+            <a:endParaRPr lang="en-US"/>
+          </a:p>
+        </p:txBody>
+      </p:sp>
+    </p:spTree>
+    <p:extLst>
+      <p:ext uri="{BB962C8B-B14F-4D97-AF65-F5344CB8AC3E}">
+        <p14:creationId xmlns:p14="http://schemas.microsoft.com/office/powerpoint/2010/main" val="1024086991"/>
+      </p:ext>
+    </p:extLst>
+  </p:cSld>
+  <p:clrMapOvr>
+    <a:masterClrMapping/>
+  </p:clrMapOvr>
+</p:notes>
+</file>
+
+<file path=ppt/notesSlides/notesSlide60.xml><?xml version="1.0" encoding="utf-8"?>
+<p:notes xmlns:a="http://schemas.openxmlformats.org/drawingml/2006/main" xmlns:r="http://schemas.openxmlformats.org/officeDocument/2006/relationships" xmlns:p="http://schemas.openxmlformats.org/presentationml/2006/main">
+  <p:cSld>
+    <p:spTree>
+      <p:nvGrpSpPr>
+        <p:cNvPr id="1" name=""/>
+        <p:cNvGrpSpPr/>
+        <p:nvPr/>
+      </p:nvGrpSpPr>
+      <p:grpSpPr>
+        <a:xfrm>
+          <a:off x="0" y="0"/>
+          <a:ext cx="0" cy="0"/>
+          <a:chOff x="0" y="0"/>
+          <a:chExt cx="0" cy="0"/>
+        </a:xfrm>
+      </p:grpSpPr>
+      <p:sp>
+        <p:nvSpPr>
+          <p:cNvPr id="2" name="Slide Image Placeholder 1"/>
+          <p:cNvSpPr>
+            <a:spLocks noGrp="1" noRot="1" noChangeAspect="1"/>
+          </p:cNvSpPr>
+          <p:nvPr>
+            <p:ph type="sldImg"/>
+          </p:nvPr>
+        </p:nvSpPr>
+        <p:spPr/>
+      </p:sp>
+      <p:sp>
+        <p:nvSpPr>
+          <p:cNvPr id="3" name="Notes Placeholder 2"/>
+          <p:cNvSpPr>
+            <a:spLocks noGrp="1"/>
+          </p:cNvSpPr>
+          <p:nvPr>
+            <p:ph type="body" idx="1"/>
+          </p:nvPr>
+        </p:nvSpPr>
+        <p:spPr/>
+        <p:txBody>
+          <a:bodyPr/>
+          <a:lstStyle/>
+          <a:p>
+            <a:r>
+              <a:rPr lang="en-US" dirty="0"/>
+              <a:t>I complete the second page of the logbook: the matter taught, the evaluation, the homework and the attendance.</a:t>
+            </a:r>
+            <a:endParaRPr lang="en-US" dirty="0"/>
+          </a:p>
+        </p:txBody>
+      </p:sp>
+      <p:sp>
+        <p:nvSpPr>
+          <p:cNvPr id="4" name="Slide Number Placeholder 3"/>
+          <p:cNvSpPr>
+            <a:spLocks noGrp="1"/>
+          </p:cNvSpPr>
+          <p:nvPr>
+            <p:ph type="sldNum" sz="quarter" idx="10"/>
+          </p:nvPr>
+        </p:nvSpPr>
+        <p:spPr/>
+        <p:txBody>
+          <a:bodyPr/>
+          <a:lstStyle/>
+          <a:p>
+            <a:fld id="{F7021451-1387-4CA6-816F-3879F97B5CBC}" type="slidenum">
+              <a:rPr lang="en-US"/>
+              <a:t>60</a:t>
+            </a:fld>
+            <a:endParaRPr lang="en-US"/>
+          </a:p>
+        </p:txBody>
+      </p:sp>
+    </p:spTree>
+    <p:extLst>
+      <p:ext uri="{BB962C8B-B14F-4D97-AF65-F5344CB8AC3E}">
+        <p14:creationId xmlns:p14="http://schemas.microsoft.com/office/powerpoint/2010/main" val="1024086991"/>
+      </p:ext>
+    </p:extLst>
+  </p:cSld>
+  <p:clrMapOvr>
+    <a:masterClrMapping/>
+  </p:clrMapOvr>
+</p:notes>
+</file>
+
+<file path=ppt/notesSlides/notesSlide61.xml><?xml version="1.0" encoding="utf-8"?>
+<p:notes xmlns:a="http://schemas.openxmlformats.org/drawingml/2006/main" xmlns:r="http://schemas.openxmlformats.org/officeDocument/2006/relationships" xmlns:p="http://schemas.openxmlformats.org/presentationml/2006/main">
+  <p:cSld>
+    <p:spTree>
+      <p:nvGrpSpPr>
+        <p:cNvPr id="1" name=""/>
+        <p:cNvGrpSpPr/>
+        <p:nvPr/>
+      </p:nvGrpSpPr>
+      <p:grpSpPr>
+        <a:xfrm>
+          <a:off x="0" y="0"/>
+          <a:ext cx="0" cy="0"/>
+          <a:chOff x="0" y="0"/>
+          <a:chExt cx="0" cy="0"/>
+        </a:xfrm>
+      </p:grpSpPr>
+      <p:sp>
+        <p:nvSpPr>
+          <p:cNvPr id="2" name="Slide Image Placeholder 1"/>
+          <p:cNvSpPr>
+            <a:spLocks noGrp="1" noRot="1" noChangeAspect="1"/>
+          </p:cNvSpPr>
+          <p:nvPr>
+            <p:ph type="sldImg"/>
+          </p:nvPr>
+        </p:nvSpPr>
+        <p:spPr/>
+      </p:sp>
+      <p:sp>
+        <p:nvSpPr>
+          <p:cNvPr id="3" name="Notes Placeholder 2"/>
+          <p:cNvSpPr>
+            <a:spLocks noGrp="1"/>
+          </p:cNvSpPr>
+          <p:nvPr>
+            <p:ph type="body" idx="1"/>
+          </p:nvPr>
+        </p:nvSpPr>
+        <p:spPr/>
+        <p:txBody>
+          <a:bodyPr/>
+          <a:lstStyle/>
+          <a:p>
+            <a:r>
+              <a:rPr lang="en-US" dirty="0"/>
+              <a:t>This slide is for me, the teacher: it gives the timing of the lesson and what to do if the projector is not available.</a:t>
+            </a:r>
+            <a:endParaRPr lang="en-US" dirty="0"/>
+          </a:p>
+        </p:txBody>
+      </p:sp>
+      <p:sp>
+        <p:nvSpPr>
+          <p:cNvPr id="4" name="Slide Number Placeholder 3"/>
+          <p:cNvSpPr>
+            <a:spLocks noGrp="1"/>
+          </p:cNvSpPr>
+          <p:nvPr>
+            <p:ph type="sldNum" sz="quarter" idx="10"/>
+          </p:nvPr>
+        </p:nvSpPr>
+        <p:spPr/>
+        <p:txBody>
+          <a:bodyPr/>
+          <a:lstStyle/>
+          <a:p>
+            <a:fld id="{F7021451-1387-4CA6-816F-3879F97B5CBC}" type="slidenum">
+              <a:rPr lang="en-US"/>
+              <a:t>61</a:t>
+            </a:fld>
+            <a:endParaRPr lang="en-US"/>
+          </a:p>
+        </p:txBody>
+      </p:sp>
+    </p:spTree>
+    <p:extLst>
+      <p:ext uri="{BB962C8B-B14F-4D97-AF65-F5344CB8AC3E}">
+        <p14:creationId xmlns:p14="http://schemas.microsoft.com/office/powerpoint/2010/main" val="1024086991"/>
+      </p:ext>
+    </p:extLst>
+  </p:cSld>
+  <p:clrMapOvr>
+    <a:masterClrMapping/>
+  </p:clrMapOvr>
+</p:notes>
+</file>
+
+<file path=ppt/notesSlides/notesSlide62.xml><?xml version="1.0" encoding="utf-8"?>
+<p:notes xmlns:a="http://schemas.openxmlformats.org/drawingml/2006/main" xmlns:r="http://schemas.openxmlformats.org/officeDocument/2006/relationships" xmlns:p="http://schemas.openxmlformats.org/presentationml/2006/main">
+  <p:cSld>
+    <p:spTree>
+      <p:nvGrpSpPr>
+        <p:cNvPr id="1" name=""/>
+        <p:cNvGrpSpPr/>
+        <p:nvPr/>
+      </p:nvGrpSpPr>
+      <p:grpSpPr>
+        <a:xfrm>
+          <a:off x="0" y="0"/>
+          <a:ext cx="0" cy="0"/>
+          <a:chOff x="0" y="0"/>
+          <a:chExt cx="0" cy="0"/>
+        </a:xfrm>
+      </p:grpSpPr>
+      <p:sp>
+        <p:nvSpPr>
+          <p:cNvPr id="2" name="Slide Image Placeholder 1"/>
+          <p:cNvSpPr>
+            <a:spLocks noGrp="1" noRot="1" noChangeAspect="1"/>
+          </p:cNvSpPr>
+          <p:nvPr>
+            <p:ph type="sldImg"/>
+          </p:nvPr>
+        </p:nvSpPr>
+        <p:spPr/>
+      </p:sp>
+      <p:sp>
+        <p:nvSpPr>
+          <p:cNvPr id="3" name="Notes Placeholder 2"/>
+          <p:cNvSpPr>
+            <a:spLocks noGrp="1"/>
+          </p:cNvSpPr>
+          <p:nvPr>
+            <p:ph type="body" idx="1"/>
+          </p:nvPr>
+        </p:nvSpPr>
+        <p:spPr/>
+        <p:txBody>
+          <a:bodyPr/>
+          <a:lstStyle/>
+          <a:p>
+            <a:r>
+              <a:rPr lang="en-US" dirty="0"/>
+              <a:t>Take your time to copy this part; we will continue together.</a:t>
+            </a:r>
+            <a:endParaRPr lang="en-US" dirty="0"/>
+          </a:p>
+        </p:txBody>
+      </p:sp>
+      <p:sp>
+        <p:nvSpPr>
+          <p:cNvPr id="4" name="Slide Number Placeholder 3"/>
+          <p:cNvSpPr>
+            <a:spLocks noGrp="1"/>
+          </p:cNvSpPr>
+          <p:nvPr>
+            <p:ph type="sldNum" sz="quarter" idx="10"/>
+          </p:nvPr>
+        </p:nvSpPr>
+        <p:spPr/>
+        <p:txBody>
+          <a:bodyPr/>
+          <a:lstStyle/>
+          <a:p>
+            <a:fld id="{F7021451-1387-4CA6-816F-3879F97B5CBC}" type="slidenum">
+              <a:rPr lang="en-US"/>
+              <a:t>62</a:t>
+            </a:fld>
+            <a:endParaRPr lang="en-US"/>
+          </a:p>
+        </p:txBody>
+      </p:sp>
+    </p:spTree>
+    <p:extLst>
+      <p:ext uri="{BB962C8B-B14F-4D97-AF65-F5344CB8AC3E}">
+        <p14:creationId xmlns:p14="http://schemas.microsoft.com/office/powerpoint/2010/main" val="1024086991"/>
+      </p:ext>
+    </p:extLst>
+  </p:cSld>
+  <p:clrMapOvr>
+    <a:masterClrMapping/>
+  </p:clrMapOvr>
+</p:notes>
+</file>
+
+<file path=ppt/notesSlides/notesSlide63.xml><?xml version="1.0" encoding="utf-8"?>
+<p:notes xmlns:a="http://schemas.openxmlformats.org/drawingml/2006/main" xmlns:r="http://schemas.openxmlformats.org/officeDocument/2006/relationships" xmlns:p="http://schemas.openxmlformats.org/presentationml/2006/main">
+  <p:cSld>
+    <p:spTree>
+      <p:nvGrpSpPr>
+        <p:cNvPr id="1" name=""/>
+        <p:cNvGrpSpPr/>
+        <p:nvPr/>
+      </p:nvGrpSpPr>
+      <p:grpSpPr>
+        <a:xfrm>
+          <a:off x="0" y="0"/>
+          <a:ext cx="0" cy="0"/>
+          <a:chOff x="0" y="0"/>
+          <a:chExt cx="0" cy="0"/>
+        </a:xfrm>
+      </p:grpSpPr>
+      <p:sp>
+        <p:nvSpPr>
+          <p:cNvPr id="2" name="Slide Image Placeholder 1"/>
+          <p:cNvSpPr>
+            <a:spLocks noGrp="1" noRot="1" noChangeAspect="1"/>
+          </p:cNvSpPr>
+          <p:nvPr>
+            <p:ph type="sldImg"/>
+          </p:nvPr>
+        </p:nvSpPr>
+        <p:spPr/>
+      </p:sp>
+      <p:sp>
+        <p:nvSpPr>
+          <p:cNvPr id="3" name="Notes Placeholder 2"/>
+          <p:cNvSpPr>
+            <a:spLocks noGrp="1"/>
+          </p:cNvSpPr>
+          <p:nvPr>
+            <p:ph type="body" idx="1"/>
+          </p:nvPr>
+        </p:nvSpPr>
+        <p:spPr/>
+        <p:txBody>
+          <a:bodyPr/>
+          <a:lstStyle/>
+          <a:p>
+            <a:r>
+              <a:rPr lang="en-US" dirty="0"/>
+              <a:t>These are the references and picture credits used to prepare this lesson.</a:t>
+            </a:r>
+            <a:endParaRPr lang="en-US" dirty="0"/>
+          </a:p>
+        </p:txBody>
+      </p:sp>
+      <p:sp>
+        <p:nvSpPr>
+          <p:cNvPr id="4" name="Slide Number Placeholder 3"/>
+          <p:cNvSpPr>
+            <a:spLocks noGrp="1"/>
+          </p:cNvSpPr>
+          <p:nvPr>
+            <p:ph type="sldNum" sz="quarter" idx="10"/>
+          </p:nvPr>
+        </p:nvSpPr>
+        <p:spPr/>
+        <p:txBody>
+          <a:bodyPr/>
+          <a:lstStyle/>
+          <a:p>
+            <a:fld id="{F7021451-1387-4CA6-816F-3879F97B5CBC}" type="slidenum">
+              <a:rPr lang="en-US"/>
+              <a:t>63</a:t>
             </a:fld>
             <a:endParaRPr lang="en-US"/>
           </a:p>
@@ -4774,7 +6020,7 @@
           <a:p>
             <a:r>
               <a:rPr lang="en-US" dirty="0"/>
-              <a:t>Listen carefully to this situation from real life. Every Friday, a buyam-sellam takes onions and groundnuts from a village near Garoua to the town market, and returns with soap, oil and clothes for the villagers. At festivals, town dwellers go back to the village. Think about it, because I am going to ask you some questions.</a:t>
+              <a:t>Listen carefully to this situation from real life. Every Friday, a buyam-sellam takes onions and groundnuts from a village near Garoua to the town market and returns with soap, oil and clothes. At festivals, town dwellers go back to the village. A pupil asks: "Could the town live without the village, or the village without the town?" Think about it, because I am going to ask you some questions.</a:t>
             </a:r>
             <a:endParaRPr lang="en-US" dirty="0"/>
           </a:p>
@@ -6457,7 +7703,7 @@
                 <a:ea typeface="Times New Roman" pitchFamily="34" charset="-122"/>
                 <a:cs typeface="Times New Roman" pitchFamily="34" charset="-120"/>
               </a:rPr>
-              <a:t>We want to understand the exchanges between town and village.</a:t>
+              <a:t>We want to know whether towns and villages depend on each other.</a:t>
             </a:r>
             <a:endParaRPr lang="en-US" sz="4000" dirty="0"/>
           </a:p>
@@ -7552,7 +8798,7 @@
                 <a:ea typeface="Times New Roman" pitchFamily="34" charset="-122"/>
                 <a:cs typeface="Times New Roman" pitchFamily="34" charset="-120"/>
               </a:rPr>
-              <a:t>Support exchanges between your village and your town.</a:t>
+              <a:t>Support exchanges and development projects between your village and your town.</a:t>
             </a:r>
             <a:endParaRPr lang="en-US" sz="4000" dirty="0"/>
           </a:p>
@@ -8204,7 +9450,7 @@
                 <a:ea typeface="Times New Roman" pitchFamily="34" charset="-122"/>
                 <a:cs typeface="Times New Roman" pitchFamily="34" charset="-120"/>
               </a:rPr>
-              <a:t>What products does the country side send to towns?</a:t>
+              <a:t>Where do the cattle sold in town markets come from?</a:t>
             </a:r>
             <a:endParaRPr lang="en-US" sz="4000" dirty="0"/>
           </a:p>
@@ -9018,7 +10264,7 @@
                 <a:ea typeface="Times New Roman" pitchFamily="34" charset="-122"/>
                 <a:cs typeface="Times New Roman" pitchFamily="34" charset="-120"/>
               </a:rPr>
-              <a:t>Food crops, cattle, firewood and raw materials such as cotton.</a:t>
+              <a:t>From the country side, where herders raise them.</a:t>
             </a:r>
             <a:endParaRPr lang="en-US" sz="4000" dirty="0"/>
           </a:p>
@@ -9451,7 +10697,7 @@
                 <a:ea typeface="Times New Roman" pitchFamily="34" charset="-122"/>
                 <a:cs typeface="Times New Roman" pitchFamily="34" charset="-120"/>
               </a:rPr>
-              <a:t>What products and services do towns send to the country side?</a:t>
+              <a:t>What does this vehicle bring back to the village from the town?</a:t>
             </a:r>
             <a:endParaRPr lang="en-US" sz="4000" dirty="0"/>
           </a:p>
@@ -9670,7 +10916,7 @@
                 <a:ea typeface="Times New Roman" pitchFamily="34" charset="-122"/>
                 <a:cs typeface="Times New Roman" pitchFamily="34" charset="-120"/>
               </a:rPr>
-              <a:t>Manufactured goods, fertilisers, money and services such as health and education.</a:t>
+              <a:t>Manufactured goods such as soap, oil, sugar, clothes and fertilisers.</a:t>
             </a:r>
             <a:endParaRPr lang="en-US" sz="4000" dirty="0"/>
           </a:p>
@@ -9782,7 +11028,7 @@
                 <a:ea typeface="Calibri" pitchFamily="34" charset="-122"/>
                 <a:cs typeface="Calibri" pitchFamily="34" charset="-120"/>
               </a:rPr>
-              <a:t>2. POPULATION FLOWS</a:t>
+              <a:t>2. SOCIO-CULTURAL RELATIONSHIPS</a:t>
             </a:r>
             <a:endParaRPr lang="en-US" sz="1400" dirty="0"/>
           </a:p>
@@ -9996,7 +11242,7 @@
                 <a:ea typeface="Calibri" pitchFamily="34" charset="-122"/>
                 <a:cs typeface="Calibri" pitchFamily="34" charset="-120"/>
               </a:rPr>
-              <a:t>2. POPULATION FLOWS</a:t>
+              <a:t>2. SOCIO-CULTURAL RELATIONSHIPS</a:t>
             </a:r>
             <a:endParaRPr lang="en-US" sz="1400" dirty="0"/>
           </a:p>
@@ -10103,7 +11349,7 @@
                 <a:ea typeface="Times New Roman" pitchFamily="34" charset="-122"/>
                 <a:cs typeface="Times New Roman" pitchFamily="34" charset="-120"/>
               </a:rPr>
-              <a:t>Why do people travel between towns and villages?</a:t>
+              <a:t>Why are bus stations crowded before festivals?</a:t>
             </a:r>
             <a:endParaRPr lang="en-US" sz="4000" dirty="0"/>
           </a:p>
@@ -10215,7 +11461,7 @@
                 <a:ea typeface="Calibri" pitchFamily="34" charset="-122"/>
                 <a:cs typeface="Calibri" pitchFamily="34" charset="-120"/>
               </a:rPr>
-              <a:t>2. POPULATION FLOWS</a:t>
+              <a:t>2. SOCIO-CULTURAL RELATIONSHIPS</a:t>
             </a:r>
             <a:endParaRPr lang="en-US" sz="1400" dirty="0"/>
           </a:p>
@@ -10322,7 +11568,7 @@
                 <a:ea typeface="Times New Roman" pitchFamily="34" charset="-122"/>
                 <a:cs typeface="Times New Roman" pitchFamily="34" charset="-120"/>
               </a:rPr>
-              <a:t>For work, school, trade, family visits and festivals.</a:t>
+              <a:t>Town dwellers travel back to their villages for festivals and family ceremonies.</a:t>
             </a:r>
             <a:endParaRPr lang="en-US" sz="4000" dirty="0"/>
           </a:p>
@@ -10755,7 +12001,7 @@
                 <a:ea typeface="Times New Roman" pitchFamily="34" charset="-122"/>
                 <a:cs typeface="Times New Roman" pitchFamily="34" charset="-120"/>
               </a:rPr>
-              <a:t>Give two socio-cultural links between towns and villages.</a:t>
+              <a:t>How do the elites in town help their village?</a:t>
             </a:r>
             <a:endParaRPr lang="en-US" sz="4000" dirty="0"/>
           </a:p>
@@ -10974,7 +12220,7 @@
                 <a:ea typeface="Times New Roman" pitchFamily="34" charset="-122"/>
                 <a:cs typeface="Times New Roman" pitchFamily="34" charset="-120"/>
               </a:rPr>
-              <a:t>Festivals and funerals in the village, and development associations of town dwellers.</a:t>
+              <a:t>Through development associations that build schools, wells and roads.</a:t>
             </a:r>
             <a:endParaRPr lang="en-US" sz="4000" dirty="0"/>
           </a:p>
@@ -11657,7 +12903,7 @@
                           <a:ea typeface="Calibri" pitchFamily="34" charset="-122"/>
                           <a:cs typeface="Calibri" pitchFamily="34" charset="-120"/>
                         </a:rPr>
-                        <a:t>Flows, population flows, goods, information, rural exodus.</a:t>
+                        <a:t>Flows: population flows, flows of goods, information (newspapers).</a:t>
                       </a:r>
                       <a:endParaRPr lang="en-US" sz="1700" dirty="0">
                         <a:latin typeface="Calibri" charset="0"/>
@@ -11933,7 +13179,7 @@
                           <a:ea typeface="Calibri" pitchFamily="34" charset="-122"/>
                           <a:cs typeface="Calibri" pitchFamily="34" charset="-120"/>
                         </a:rPr>
-                        <a:t>Learners are able to describe the flows between towns and country sides and explain why they depend on each other.</a:t>
+                        <a:t>Learners are able to identify the flows between towns and country sides and explain why they depend on each other.</a:t>
                       </a:r>
                       <a:endParaRPr lang="en-US" sz="1700" dirty="0">
                         <a:latin typeface="Calibri" charset="0"/>
@@ -12416,7 +13662,7 @@
                 <a:ea typeface="Times New Roman" pitchFamily="34" charset="-122"/>
                 <a:cs typeface="Times New Roman" pitchFamily="34" charset="-120"/>
               </a:rPr>
-              <a:t>How does information circulate between towns and villages?</a:t>
+              <a:t>How does this farmer learn the price of his crops in town?</a:t>
             </a:r>
             <a:endParaRPr lang="en-US" sz="4000" dirty="0"/>
           </a:p>
@@ -12635,7 +13881,7 @@
                 <a:ea typeface="Times New Roman" pitchFamily="34" charset="-122"/>
                 <a:cs typeface="Times New Roman" pitchFamily="34" charset="-120"/>
               </a:rPr>
-              <a:t>By phone, radio, newspapers and travellers.</a:t>
+              <a:t>By phone; news also comes by radio, newspapers and travellers.</a:t>
             </a:r>
             <a:endParaRPr lang="en-US" sz="4000" dirty="0"/>
           </a:p>
@@ -13029,7 +14275,7 @@
         <p:spPr>
           <a:xfrm>
             <a:off x="0" y="658368"/>
-            <a:ext cx="5120640" cy="5833872"/>
+            <a:ext cx="1463040" cy="5833872"/>
           </a:xfrm>
           <a:prstGeom prst="rect">
             <a:avLst/>
@@ -13044,8 +14290,8 @@
         </p:nvSpPr>
         <p:spPr>
           <a:xfrm>
-            <a:off x="5349240" y="1005840"/>
-            <a:ext cx="6522415" cy="731520"/>
+            <a:off x="1691640" y="1005840"/>
+            <a:ext cx="10180015" cy="731520"/>
           </a:xfrm>
           <a:prstGeom prst="rect">
             <a:avLst/>
@@ -13085,8 +14331,8 @@
         </p:nvSpPr>
         <p:spPr>
           <a:xfrm>
-            <a:off x="5349240" y="1783080"/>
-            <a:ext cx="6522415" cy="4663440"/>
+            <a:off x="1691640" y="1783080"/>
+            <a:ext cx="10180015" cy="4663440"/>
           </a:xfrm>
           <a:prstGeom prst="rect">
             <a:avLst/>
@@ -13151,6 +14397,43 @@
                 <a:cs typeface="Times New Roman" pitchFamily="34" charset="-120"/>
               </a:rPr>
               <a:t>It is the movement of people, goods, money or information between two places.</a:t>
+            </a:r>
+            <a:endParaRPr lang="en-US" sz="4000" dirty="0"/>
+          </a:p>
+          <a:p>
+            <a:pPr algn="l" indent="0" marL="0">
+              <a:spcAft>
+                <a:spcPts val="800"/>
+              </a:spcAft>
+              <a:buNone/>
+            </a:pPr>
+            <a:r>
+              <a:rPr lang="en-US" sz="4000" b="1" dirty="0">
+                <a:solidFill>
+                  <a:srgbClr val="111111"/>
+                </a:solidFill>
+                <a:latin typeface="Times New Roman" pitchFamily="34" charset="0"/>
+                <a:ea typeface="Times New Roman" pitchFamily="34" charset="-122"/>
+                <a:cs typeface="Times New Roman" pitchFamily="34" charset="-120"/>
+              </a:rPr>
+              <a:t>Population flow: </a:t>
+            </a:r>
+            <a:pPr algn="l" indent="0" marL="0">
+              <a:spcAft>
+                <a:spcPts val="800"/>
+              </a:spcAft>
+              <a:buNone/>
+            </a:pPr>
+            <a:r>
+              <a:rPr lang="en-US" sz="4000" dirty="0">
+                <a:solidFill>
+                  <a:srgbClr val="111111"/>
+                </a:solidFill>
+                <a:latin typeface="Times New Roman" pitchFamily="34" charset="0"/>
+                <a:ea typeface="Times New Roman" pitchFamily="34" charset="-122"/>
+                <a:cs typeface="Times New Roman" pitchFamily="34" charset="-120"/>
+              </a:rPr>
+              <a:t>It is the movement of people between places, for example between a village and a town.</a:t>
             </a:r>
             <a:endParaRPr lang="en-US" sz="4000" dirty="0"/>
           </a:p>
@@ -13268,9 +14551,170 @@
           </a:p>
         </p:txBody>
       </p:sp>
+      <p:sp>
+        <p:nvSpPr>
+          <p:cNvPr id="3" name="Text 1"/>
+          <p:cNvSpPr/>
+          <p:nvPr/>
+        </p:nvSpPr>
+        <p:spPr>
+          <a:xfrm>
+            <a:off x="365760" y="1005840"/>
+            <a:ext cx="11460175" cy="731520"/>
+          </a:xfrm>
+          <a:prstGeom prst="rect">
+            <a:avLst/>
+          </a:prstGeom>
+          <a:noFill/>
+          <a:ln/>
+        </p:spPr>
+        <p:txBody>
+          <a:bodyPr wrap="square" lIns="0" tIns="0" rIns="0" bIns="0" rtlCol="0" anchor="ctr">
+            <a:normAutofit/>
+          </a:bodyPr>
+          <a:lstStyle/>
+          <a:p>
+            <a:pPr algn="ctr" indent="0" marL="0">
+              <a:buNone/>
+            </a:pPr>
+            <a:r>
+              <a:rPr lang="en-US" sz="3600" b="1" dirty="0">
+                <a:solidFill>
+                  <a:srgbClr val="990011"/>
+                </a:solidFill>
+                <a:latin typeface="Times New Roman" pitchFamily="34" charset="0"/>
+                <a:ea typeface="Times New Roman" pitchFamily="34" charset="-122"/>
+                <a:cs typeface="Times New Roman" pitchFamily="34" charset="-120"/>
+              </a:rPr>
+              <a:t>1. Economic Relationships</a:t>
+            </a:r>
+            <a:endParaRPr lang="en-US" sz="3600" dirty="0"/>
+          </a:p>
+        </p:txBody>
+      </p:sp>
+      <p:sp>
+        <p:nvSpPr>
+          <p:cNvPr id="4" name="Text 2"/>
+          <p:cNvSpPr/>
+          <p:nvPr/>
+        </p:nvSpPr>
+        <p:spPr>
+          <a:xfrm>
+            <a:off x="365760" y="1737360"/>
+            <a:ext cx="5120640" cy="457200"/>
+          </a:xfrm>
+          <a:prstGeom prst="rect">
+            <a:avLst/>
+          </a:prstGeom>
+          <a:noFill/>
+          <a:ln/>
+        </p:spPr>
+        <p:txBody>
+          <a:bodyPr wrap="square" lIns="0" tIns="0" rIns="0" bIns="0" rtlCol="0" anchor="ctr">
+            <a:normAutofit/>
+          </a:bodyPr>
+          <a:lstStyle/>
+          <a:p>
+            <a:pPr algn="l" indent="0" marL="0">
+              <a:buNone/>
+            </a:pPr>
+            <a:r>
+              <a:rPr lang="en-US" sz="3000" b="1" dirty="0">
+                <a:solidFill>
+                  <a:srgbClr val="990011"/>
+                </a:solidFill>
+                <a:latin typeface="Times New Roman" pitchFamily="34" charset="0"/>
+                <a:ea typeface="Times New Roman" pitchFamily="34" charset="-122"/>
+                <a:cs typeface="Times New Roman" pitchFamily="34" charset="-120"/>
+              </a:rPr>
+              <a:t>A) From the Country Side to the Town</a:t>
+            </a:r>
+            <a:endParaRPr lang="en-US" sz="3000" dirty="0"/>
+          </a:p>
+        </p:txBody>
+      </p:sp>
+      <p:sp>
+        <p:nvSpPr>
+          <p:cNvPr id="5" name="Text 3"/>
+          <p:cNvSpPr/>
+          <p:nvPr/>
+        </p:nvSpPr>
+        <p:spPr>
+          <a:xfrm>
+            <a:off x="365760" y="2240280"/>
+            <a:ext cx="4846320" cy="4160520"/>
+          </a:xfrm>
+          <a:prstGeom prst="rect">
+            <a:avLst/>
+          </a:prstGeom>
+          <a:noFill/>
+          <a:ln/>
+        </p:spPr>
+        <p:txBody>
+          <a:bodyPr wrap="square" lIns="0" tIns="0" rIns="0" bIns="0" rtlCol="0" anchor="t"/>
+          <a:lstStyle/>
+          <a:p>
+            <a:pPr algn="l" indent="0" marL="0">
+              <a:spcAft>
+                <a:spcPts val="800"/>
+              </a:spcAft>
+              <a:buNone/>
+            </a:pPr>
+            <a:r>
+              <a:rPr lang="en-US" sz="3600" i="1" dirty="0">
+                <a:solidFill>
+                  <a:srgbClr val="111111"/>
+                </a:solidFill>
+                <a:latin typeface="Times New Roman" pitchFamily="34" charset="0"/>
+                <a:ea typeface="Times New Roman" pitchFamily="34" charset="-122"/>
+                <a:cs typeface="Times New Roman" pitchFamily="34" charset="-120"/>
+              </a:rPr>
+              <a:t>The country side sends the following to towns:</a:t>
+            </a:r>
+            <a:endParaRPr lang="en-US" sz="3600" dirty="0"/>
+          </a:p>
+          <a:p>
+            <a:pPr algn="l" indent="0" marL="0">
+              <a:spcAft>
+                <a:spcPts val="800"/>
+              </a:spcAft>
+              <a:buNone/>
+            </a:pPr>
+            <a:r>
+              <a:rPr lang="en-US" sz="3600" b="1" dirty="0">
+                <a:solidFill>
+                  <a:srgbClr val="111111"/>
+                </a:solidFill>
+                <a:latin typeface="Times New Roman" pitchFamily="34" charset="0"/>
+                <a:ea typeface="Times New Roman" pitchFamily="34" charset="-122"/>
+                <a:cs typeface="Times New Roman" pitchFamily="34" charset="-120"/>
+              </a:rPr>
+              <a:t>Food: </a:t>
+            </a:r>
+            <a:pPr algn="l" indent="0" marL="0">
+              <a:spcAft>
+                <a:spcPts val="800"/>
+              </a:spcAft>
+              <a:buNone/>
+            </a:pPr>
+            <a:r>
+              <a:rPr lang="en-US" sz="3600" dirty="0">
+                <a:solidFill>
+                  <a:srgbClr val="111111"/>
+                </a:solidFill>
+                <a:latin typeface="Times New Roman" pitchFamily="34" charset="0"/>
+                <a:ea typeface="Times New Roman" pitchFamily="34" charset="-122"/>
+                <a:cs typeface="Times New Roman" pitchFamily="34" charset="-120"/>
+              </a:rPr>
+              <a:t>Villages supply towns with cereals, tubers, vegetables, fruits and fish.</a:t>
+            </a:r>
+            <a:endParaRPr lang="en-US" sz="3600" dirty="0"/>
+          </a:p>
+        </p:txBody>
+      </p:sp>
       <p:pic>
         <p:nvPicPr>
-          <p:cNvPr id="3" name="Image 0" descr="/home/claude/f4/img/minesec_sheet.png">    </p:cNvPr>
+          <p:cNvPr id="6" name="Image 0" descr="/home/claude/f4/img/v2/f2t_market.jpg">    </p:cNvPr>
           <p:cNvPicPr>
             <a:picLocks noChangeAspect="1"/>
           </p:cNvPicPr>
@@ -13284,8 +14728,8 @@
         </p:blipFill>
         <p:spPr>
           <a:xfrm>
-            <a:off x="0" y="658368"/>
-            <a:ext cx="2468880" cy="5833872"/>
+            <a:off x="5349240" y="2071212"/>
+            <a:ext cx="6659575" cy="3693983"/>
           </a:xfrm>
           <a:prstGeom prst="rect">
             <a:avLst/>
@@ -13294,14 +14738,14 @@
       </p:pic>
       <p:sp>
         <p:nvSpPr>
-          <p:cNvPr id="4" name="Text 1"/>
+          <p:cNvPr id="7" name="Text 4"/>
           <p:cNvSpPr/>
           <p:nvPr/>
         </p:nvSpPr>
         <p:spPr>
           <a:xfrm>
-            <a:off x="2697480" y="1005840"/>
-            <a:ext cx="9174175" cy="731520"/>
+            <a:off x="5349240" y="6089904"/>
+            <a:ext cx="6659575" cy="347472"/>
           </a:xfrm>
           <a:prstGeom prst="rect">
             <a:avLst/>
@@ -13310,142 +14754,24 @@
           <a:ln/>
         </p:spPr>
         <p:txBody>
-          <a:bodyPr wrap="square" lIns="0" tIns="0" rIns="0" bIns="0" rtlCol="0" anchor="ctr">
-            <a:normAutofit/>
-          </a:bodyPr>
+          <a:bodyPr wrap="square" lIns="0" tIns="0" rIns="0" bIns="0" rtlCol="0" anchor="ctr"/>
           <a:lstStyle/>
           <a:p>
             <a:pPr algn="ctr" indent="0" marL="0">
               <a:buNone/>
             </a:pPr>
             <a:r>
-              <a:rPr lang="en-US" sz="3600" b="1" dirty="0">
-                <a:solidFill>
-                  <a:srgbClr val="990011"/>
+              <a:rPr lang="en-US" sz="1600" i="1" dirty="0">
+                <a:solidFill>
+                  <a:srgbClr val="555555"/>
                 </a:solidFill>
                 <a:latin typeface="Times New Roman" pitchFamily="34" charset="0"/>
                 <a:ea typeface="Times New Roman" pitchFamily="34" charset="-122"/>
                 <a:cs typeface="Times New Roman" pitchFamily="34" charset="-120"/>
               </a:rPr>
-              <a:t>1. Economic Relationships</a:t>
-            </a:r>
-            <a:endParaRPr lang="en-US" sz="3600" dirty="0"/>
-          </a:p>
-        </p:txBody>
-      </p:sp>
-      <p:sp>
-        <p:nvSpPr>
-          <p:cNvPr id="5" name="Text 2"/>
-          <p:cNvSpPr/>
-          <p:nvPr/>
-        </p:nvSpPr>
-        <p:spPr>
-          <a:xfrm>
-            <a:off x="2697480" y="1783080"/>
-            <a:ext cx="9174175" cy="4663440"/>
-          </a:xfrm>
-          <a:prstGeom prst="rect">
-            <a:avLst/>
-          </a:prstGeom>
-          <a:noFill/>
-          <a:ln/>
-        </p:spPr>
-        <p:txBody>
-          <a:bodyPr wrap="square" lIns="0" tIns="0" rIns="0" bIns="0" rtlCol="0" anchor="t"/>
-          <a:lstStyle/>
-          <a:p>
-            <a:pPr algn="l" indent="0" marL="0">
-              <a:spcAft>
-                <a:spcPts val="800"/>
-              </a:spcAft>
-              <a:buNone/>
-            </a:pPr>
-            <a:r>
-              <a:rPr lang="en-US" sz="4000" i="1" dirty="0">
-                <a:solidFill>
-                  <a:srgbClr val="111111"/>
-                </a:solidFill>
-                <a:latin typeface="Times New Roman" pitchFamily="34" charset="0"/>
-                <a:ea typeface="Times New Roman" pitchFamily="34" charset="-122"/>
-                <a:cs typeface="Times New Roman" pitchFamily="34" charset="-120"/>
-              </a:rPr>
-              <a:t>Towns and country sides exchange the following:</a:t>
-            </a:r>
-            <a:endParaRPr lang="en-US" sz="4000" dirty="0"/>
-          </a:p>
-          <a:p>
-            <a:pPr algn="l" indent="0" marL="0">
-              <a:spcAft>
-                <a:spcPts val="800"/>
-              </a:spcAft>
-              <a:buNone/>
-            </a:pPr>
-            <a:r>
-              <a:rPr lang="en-US" sz="4000" b="1" dirty="0">
-                <a:solidFill>
-                  <a:srgbClr val="111111"/>
-                </a:solidFill>
-                <a:latin typeface="Times New Roman" pitchFamily="34" charset="0"/>
-                <a:ea typeface="Times New Roman" pitchFamily="34" charset="-122"/>
-                <a:cs typeface="Times New Roman" pitchFamily="34" charset="-120"/>
-              </a:rPr>
-              <a:t>From villages to towns: </a:t>
-            </a:r>
-            <a:pPr algn="l" indent="0" marL="0">
-              <a:spcAft>
-                <a:spcPts val="800"/>
-              </a:spcAft>
-              <a:buNone/>
-            </a:pPr>
-            <a:r>
-              <a:rPr lang="en-US" sz="4000" dirty="0">
-                <a:solidFill>
-                  <a:srgbClr val="111111"/>
-                </a:solidFill>
-                <a:latin typeface="Times New Roman" pitchFamily="34" charset="0"/>
-                <a:ea typeface="Times New Roman" pitchFamily="34" charset="-122"/>
-                <a:cs typeface="Times New Roman" pitchFamily="34" charset="-120"/>
-              </a:rPr>
-              <a:t>Villages send food, cattle, firewood and raw materials.</a:t>
-            </a:r>
-            <a:endParaRPr lang="en-US" sz="4000" dirty="0"/>
-          </a:p>
-          <a:p>
-            <a:pPr algn="l" indent="0" marL="0">
-              <a:spcAft>
-                <a:spcPts val="800"/>
-              </a:spcAft>
-              <a:buNone/>
-            </a:pPr>
-            <a:r>
-              <a:rPr lang="en-US" sz="4000" b="1" dirty="0">
-                <a:solidFill>
-                  <a:srgbClr val="111111"/>
-                </a:solidFill>
-                <a:latin typeface="Times New Roman" pitchFamily="34" charset="0"/>
-                <a:ea typeface="Times New Roman" pitchFamily="34" charset="-122"/>
-                <a:cs typeface="Times New Roman" pitchFamily="34" charset="-120"/>
-              </a:rPr>
-              <a:t>From towns to villages: </a:t>
-            </a:r>
-            <a:pPr algn="l" indent="0" marL="0">
-              <a:spcAft>
-                <a:spcPts val="800"/>
-              </a:spcAft>
-              <a:buNone/>
-            </a:pPr>
-            <a:r>
-              <a:rPr lang="en-US" sz="4000" dirty="0">
-                <a:solidFill>
-                  <a:srgbClr val="111111"/>
-                </a:solidFill>
-                <a:latin typeface="Times New Roman" pitchFamily="34" charset="0"/>
-                <a:ea typeface="Times New Roman" pitchFamily="34" charset="-122"/>
-                <a:cs typeface="Times New Roman" pitchFamily="34" charset="-120"/>
-              </a:rPr>
-              <a:t>Towns send manufactured goods, money and services.</a:t>
-            </a:r>
-            <a:endParaRPr lang="en-US" sz="4000" dirty="0"/>
+              <a:t>Illustration: a town market</a:t>
+            </a:r>
+            <a:endParaRPr lang="en-US" sz="1600" dirty="0"/>
           </a:p>
         </p:txBody>
       </p:sp>
@@ -13561,9 +14887,150 @@
           </a:p>
         </p:txBody>
       </p:sp>
+      <p:sp>
+        <p:nvSpPr>
+          <p:cNvPr id="3" name="Text 1"/>
+          <p:cNvSpPr/>
+          <p:nvPr/>
+        </p:nvSpPr>
+        <p:spPr>
+          <a:xfrm>
+            <a:off x="365760" y="1005840"/>
+            <a:ext cx="11460175" cy="731520"/>
+          </a:xfrm>
+          <a:prstGeom prst="rect">
+            <a:avLst/>
+          </a:prstGeom>
+          <a:noFill/>
+          <a:ln/>
+        </p:spPr>
+        <p:txBody>
+          <a:bodyPr wrap="square" lIns="0" tIns="0" rIns="0" bIns="0" rtlCol="0" anchor="ctr">
+            <a:normAutofit/>
+          </a:bodyPr>
+          <a:lstStyle/>
+          <a:p>
+            <a:pPr algn="ctr" indent="0" marL="0">
+              <a:buNone/>
+            </a:pPr>
+            <a:r>
+              <a:rPr lang="en-US" sz="3600" b="1" dirty="0">
+                <a:solidFill>
+                  <a:srgbClr val="990011"/>
+                </a:solidFill>
+                <a:latin typeface="Times New Roman" pitchFamily="34" charset="0"/>
+                <a:ea typeface="Times New Roman" pitchFamily="34" charset="-122"/>
+                <a:cs typeface="Times New Roman" pitchFamily="34" charset="-120"/>
+              </a:rPr>
+              <a:t>1. Economic Relationships</a:t>
+            </a:r>
+            <a:endParaRPr lang="en-US" sz="3600" dirty="0"/>
+          </a:p>
+        </p:txBody>
+      </p:sp>
+      <p:sp>
+        <p:nvSpPr>
+          <p:cNvPr id="4" name="Text 2"/>
+          <p:cNvSpPr/>
+          <p:nvPr/>
+        </p:nvSpPr>
+        <p:spPr>
+          <a:xfrm>
+            <a:off x="365760" y="1737360"/>
+            <a:ext cx="5120640" cy="457200"/>
+          </a:xfrm>
+          <a:prstGeom prst="rect">
+            <a:avLst/>
+          </a:prstGeom>
+          <a:noFill/>
+          <a:ln/>
+        </p:spPr>
+        <p:txBody>
+          <a:bodyPr wrap="square" lIns="0" tIns="0" rIns="0" bIns="0" rtlCol="0" anchor="ctr">
+            <a:normAutofit/>
+          </a:bodyPr>
+          <a:lstStyle/>
+          <a:p>
+            <a:pPr algn="l" indent="0" marL="0">
+              <a:buNone/>
+            </a:pPr>
+            <a:r>
+              <a:rPr lang="en-US" sz="3000" b="1" dirty="0">
+                <a:solidFill>
+                  <a:srgbClr val="990011"/>
+                </a:solidFill>
+                <a:latin typeface="Times New Roman" pitchFamily="34" charset="0"/>
+                <a:ea typeface="Times New Roman" pitchFamily="34" charset="-122"/>
+                <a:cs typeface="Times New Roman" pitchFamily="34" charset="-120"/>
+              </a:rPr>
+              <a:t>A) From the Country Side to the Town</a:t>
+            </a:r>
+            <a:endParaRPr lang="en-US" sz="3000" dirty="0"/>
+          </a:p>
+        </p:txBody>
+      </p:sp>
+      <p:sp>
+        <p:nvSpPr>
+          <p:cNvPr id="5" name="Text 3"/>
+          <p:cNvSpPr/>
+          <p:nvPr/>
+        </p:nvSpPr>
+        <p:spPr>
+          <a:xfrm>
+            <a:off x="365760" y="2240280"/>
+            <a:ext cx="4846320" cy="4160520"/>
+          </a:xfrm>
+          <a:prstGeom prst="rect">
+            <a:avLst/>
+          </a:prstGeom>
+          <a:noFill/>
+          <a:ln/>
+        </p:spPr>
+        <p:txBody>
+          <a:bodyPr wrap="square" lIns="0" tIns="0" rIns="0" bIns="0" rtlCol="0" anchor="t"/>
+          <a:lstStyle/>
+          <a:p>
+            <a:pPr algn="l" indent="0" marL="0">
+              <a:spcAft>
+                <a:spcPts val="800"/>
+              </a:spcAft>
+              <a:buNone/>
+            </a:pPr>
+            <a:r>
+              <a:rPr lang="en-US" sz="3600" b="1" dirty="0">
+                <a:solidFill>
+                  <a:srgbClr val="111111"/>
+                </a:solidFill>
+                <a:latin typeface="Times New Roman" pitchFamily="34" charset="0"/>
+                <a:ea typeface="Times New Roman" pitchFamily="34" charset="-122"/>
+                <a:cs typeface="Times New Roman" pitchFamily="34" charset="-120"/>
+              </a:rPr>
+              <a:t>Livestock: </a:t>
+            </a:r>
+            <a:pPr algn="l" indent="0" marL="0">
+              <a:spcAft>
+                <a:spcPts val="800"/>
+              </a:spcAft>
+              <a:buNone/>
+            </a:pPr>
+            <a:r>
+              <a:rPr lang="en-US" sz="3600" dirty="0">
+                <a:solidFill>
+                  <a:srgbClr val="111111"/>
+                </a:solidFill>
+                <a:latin typeface="Times New Roman" pitchFamily="34" charset="0"/>
+                <a:ea typeface="Times New Roman" pitchFamily="34" charset="-122"/>
+                <a:cs typeface="Times New Roman" pitchFamily="34" charset="-120"/>
+              </a:rPr>
+              <a:t>Cattle, sheep, goats and poultry are sold in town markets.</a:t>
+            </a:r>
+            <a:endParaRPr lang="en-US" sz="3600" dirty="0"/>
+          </a:p>
+        </p:txBody>
+      </p:sp>
       <p:pic>
         <p:nvPicPr>
-          <p:cNvPr id="3" name="Image 0" descr="/home/claude/f4/img/minesec_sheet.png">    </p:cNvPr>
+          <p:cNvPr id="6" name="Image 0" descr="/home/claude/f4/img/v2/f2t_cattle_market.jpg">    </p:cNvPr>
           <p:cNvPicPr>
             <a:picLocks noChangeAspect="1"/>
           </p:cNvPicPr>
@@ -13577,8 +15044,8 @@
         </p:blipFill>
         <p:spPr>
           <a:xfrm>
-            <a:off x="0" y="658368"/>
-            <a:ext cx="2468880" cy="5833872"/>
+            <a:off x="5349240" y="2071212"/>
+            <a:ext cx="6659575" cy="3693983"/>
           </a:xfrm>
           <a:prstGeom prst="rect">
             <a:avLst/>
@@ -13587,14 +15054,14 @@
       </p:pic>
       <p:sp>
         <p:nvSpPr>
-          <p:cNvPr id="4" name="Text 1"/>
+          <p:cNvPr id="7" name="Text 4"/>
           <p:cNvSpPr/>
           <p:nvPr/>
         </p:nvSpPr>
         <p:spPr>
           <a:xfrm>
-            <a:off x="2697480" y="1005840"/>
-            <a:ext cx="9174175" cy="731520"/>
+            <a:off x="5349240" y="6089904"/>
+            <a:ext cx="6659575" cy="347472"/>
           </a:xfrm>
           <a:prstGeom prst="rect">
             <a:avLst/>
@@ -13603,142 +15070,24 @@
           <a:ln/>
         </p:spPr>
         <p:txBody>
-          <a:bodyPr wrap="square" lIns="0" tIns="0" rIns="0" bIns="0" rtlCol="0" anchor="ctr">
-            <a:normAutofit/>
-          </a:bodyPr>
+          <a:bodyPr wrap="square" lIns="0" tIns="0" rIns="0" bIns="0" rtlCol="0" anchor="ctr"/>
           <a:lstStyle/>
           <a:p>
             <a:pPr algn="ctr" indent="0" marL="0">
               <a:buNone/>
             </a:pPr>
             <a:r>
-              <a:rPr lang="en-US" sz="3600" b="1" dirty="0">
-                <a:solidFill>
-                  <a:srgbClr val="990011"/>
+              <a:rPr lang="en-US" sz="1600" i="1" dirty="0">
+                <a:solidFill>
+                  <a:srgbClr val="555555"/>
                 </a:solidFill>
                 <a:latin typeface="Times New Roman" pitchFamily="34" charset="0"/>
                 <a:ea typeface="Times New Roman" pitchFamily="34" charset="-122"/>
                 <a:cs typeface="Times New Roman" pitchFamily="34" charset="-120"/>
               </a:rPr>
-              <a:t>2. Socio-cultural Relationships</a:t>
-            </a:r>
-            <a:endParaRPr lang="en-US" sz="3600" dirty="0"/>
-          </a:p>
-        </p:txBody>
-      </p:sp>
-      <p:sp>
-        <p:nvSpPr>
-          <p:cNvPr id="5" name="Text 2"/>
-          <p:cNvSpPr/>
-          <p:nvPr/>
-        </p:nvSpPr>
-        <p:spPr>
-          <a:xfrm>
-            <a:off x="2697480" y="1783080"/>
-            <a:ext cx="9174175" cy="4663440"/>
-          </a:xfrm>
-          <a:prstGeom prst="rect">
-            <a:avLst/>
-          </a:prstGeom>
-          <a:noFill/>
-          <a:ln/>
-        </p:spPr>
-        <p:txBody>
-          <a:bodyPr wrap="square" lIns="0" tIns="0" rIns="0" bIns="0" rtlCol="0" anchor="t"/>
-          <a:lstStyle/>
-          <a:p>
-            <a:pPr algn="l" indent="0" marL="0">
-              <a:spcAft>
-                <a:spcPts val="800"/>
-              </a:spcAft>
-              <a:buNone/>
-            </a:pPr>
-            <a:r>
-              <a:rPr lang="en-US" sz="4000" i="1" dirty="0">
-                <a:solidFill>
-                  <a:srgbClr val="111111"/>
-                </a:solidFill>
-                <a:latin typeface="Times New Roman" pitchFamily="34" charset="0"/>
-                <a:ea typeface="Times New Roman" pitchFamily="34" charset="-122"/>
-                <a:cs typeface="Times New Roman" pitchFamily="34" charset="-120"/>
-              </a:rPr>
-              <a:t>Towns and villages are linked socially as follows:</a:t>
-            </a:r>
-            <a:endParaRPr lang="en-US" sz="4000" dirty="0"/>
-          </a:p>
-          <a:p>
-            <a:pPr algn="l" indent="0" marL="0">
-              <a:spcAft>
-                <a:spcPts val="800"/>
-              </a:spcAft>
-              <a:buNone/>
-            </a:pPr>
-            <a:r>
-              <a:rPr lang="en-US" sz="4000" b="1" dirty="0">
-                <a:solidFill>
-                  <a:srgbClr val="111111"/>
-                </a:solidFill>
-                <a:latin typeface="Times New Roman" pitchFamily="34" charset="0"/>
-                <a:ea typeface="Times New Roman" pitchFamily="34" charset="-122"/>
-                <a:cs typeface="Times New Roman" pitchFamily="34" charset="-120"/>
-              </a:rPr>
-              <a:t>Population flows: </a:t>
-            </a:r>
-            <a:pPr algn="l" indent="0" marL="0">
-              <a:spcAft>
-                <a:spcPts val="800"/>
-              </a:spcAft>
-              <a:buNone/>
-            </a:pPr>
-            <a:r>
-              <a:rPr lang="en-US" sz="4000" dirty="0">
-                <a:solidFill>
-                  <a:srgbClr val="111111"/>
-                </a:solidFill>
-                <a:latin typeface="Times New Roman" pitchFamily="34" charset="0"/>
-                <a:ea typeface="Times New Roman" pitchFamily="34" charset="-122"/>
-                <a:cs typeface="Times New Roman" pitchFamily="34" charset="-120"/>
-              </a:rPr>
-              <a:t>People move for work, school, trade and family visits.</a:t>
-            </a:r>
-            <a:endParaRPr lang="en-US" sz="4000" dirty="0"/>
-          </a:p>
-          <a:p>
-            <a:pPr algn="l" indent="0" marL="0">
-              <a:spcAft>
-                <a:spcPts val="800"/>
-              </a:spcAft>
-              <a:buNone/>
-            </a:pPr>
-            <a:r>
-              <a:rPr lang="en-US" sz="4000" b="1" dirty="0">
-                <a:solidFill>
-                  <a:srgbClr val="111111"/>
-                </a:solidFill>
-                <a:latin typeface="Times New Roman" pitchFamily="34" charset="0"/>
-                <a:ea typeface="Times New Roman" pitchFamily="34" charset="-122"/>
-                <a:cs typeface="Times New Roman" pitchFamily="34" charset="-120"/>
-              </a:rPr>
-              <a:t>Culture and solidarity: </a:t>
-            </a:r>
-            <a:pPr algn="l" indent="0" marL="0">
-              <a:spcAft>
-                <a:spcPts val="800"/>
-              </a:spcAft>
-              <a:buNone/>
-            </a:pPr>
-            <a:r>
-              <a:rPr lang="en-US" sz="4000" dirty="0">
-                <a:solidFill>
-                  <a:srgbClr val="111111"/>
-                </a:solidFill>
-                <a:latin typeface="Times New Roman" pitchFamily="34" charset="0"/>
-                <a:ea typeface="Times New Roman" pitchFamily="34" charset="-122"/>
-                <a:cs typeface="Times New Roman" pitchFamily="34" charset="-120"/>
-              </a:rPr>
-              <a:t>Town dwellers return for festivals and funerals and help through development associations.</a:t>
-            </a:r>
-            <a:endParaRPr lang="en-US" sz="4000" dirty="0"/>
+              <a:t>Illustration: a cattle market</a:t>
+            </a:r>
+            <a:endParaRPr lang="en-US" sz="1600" dirty="0"/>
           </a:p>
         </p:txBody>
       </p:sp>
@@ -13871,7 +15220,7 @@
         <p:spPr>
           <a:xfrm>
             <a:off x="0" y="658368"/>
-            <a:ext cx="3840480" cy="5833872"/>
+            <a:ext cx="1463040" cy="5833872"/>
           </a:xfrm>
           <a:prstGeom prst="rect">
             <a:avLst/>
@@ -13886,8 +15235,8 @@
         </p:nvSpPr>
         <p:spPr>
           <a:xfrm>
-            <a:off x="4069080" y="1005840"/>
-            <a:ext cx="7802575" cy="731520"/>
+            <a:off x="1691640" y="1005840"/>
+            <a:ext cx="10180015" cy="731520"/>
           </a:xfrm>
           <a:prstGeom prst="rect">
             <a:avLst/>
@@ -13913,7 +15262,7 @@
                 <a:ea typeface="Times New Roman" pitchFamily="34" charset="-122"/>
                 <a:cs typeface="Times New Roman" pitchFamily="34" charset="-120"/>
               </a:rPr>
-              <a:t>3. Information</a:t>
+              <a:t>1. Economic Relationships</a:t>
             </a:r>
             <a:endParaRPr lang="en-US" sz="3600" dirty="0"/>
           </a:p>
@@ -13927,8 +15276,47 @@
         </p:nvSpPr>
         <p:spPr>
           <a:xfrm>
-            <a:off x="4069080" y="1783080"/>
-            <a:ext cx="7802575" cy="4663440"/>
+            <a:off x="1691640" y="1737360"/>
+            <a:ext cx="10180015" cy="457200"/>
+          </a:xfrm>
+          <a:prstGeom prst="rect">
+            <a:avLst/>
+          </a:prstGeom>
+          <a:noFill/>
+          <a:ln/>
+        </p:spPr>
+        <p:txBody>
+          <a:bodyPr wrap="square" lIns="0" tIns="0" rIns="0" bIns="0" rtlCol="0" anchor="ctr"/>
+          <a:lstStyle/>
+          <a:p>
+            <a:pPr algn="l" indent="0" marL="0">
+              <a:buNone/>
+            </a:pPr>
+            <a:r>
+              <a:rPr lang="en-US" sz="3200" b="1" dirty="0">
+                <a:solidFill>
+                  <a:srgbClr val="990011"/>
+                </a:solidFill>
+                <a:latin typeface="Times New Roman" pitchFamily="34" charset="0"/>
+                <a:ea typeface="Times New Roman" pitchFamily="34" charset="-122"/>
+                <a:cs typeface="Times New Roman" pitchFamily="34" charset="-120"/>
+              </a:rPr>
+              <a:t>A) From the Country Side to the Town</a:t>
+            </a:r>
+            <a:endParaRPr lang="en-US" sz="3200" dirty="0"/>
+          </a:p>
+        </p:txBody>
+      </p:sp>
+      <p:sp>
+        <p:nvSpPr>
+          <p:cNvPr id="6" name="Text 3"/>
+          <p:cNvSpPr/>
+          <p:nvPr/>
+        </p:nvSpPr>
+        <p:spPr>
+          <a:xfrm>
+            <a:off x="1691640" y="2240280"/>
+            <a:ext cx="10180015" cy="4206240"/>
           </a:xfrm>
           <a:prstGeom prst="rect">
             <a:avLst/>
@@ -13947,7 +15335,7 @@
               <a:buNone/>
             </a:pPr>
             <a:r>
-              <a:rPr lang="en-US" sz="4000" i="1" dirty="0">
+              <a:rPr lang="en-US" sz="4000" b="1" dirty="0">
                 <a:solidFill>
                   <a:srgbClr val="111111"/>
                 </a:solidFill>
@@ -13955,11 +15343,8 @@
                 <a:ea typeface="Times New Roman" pitchFamily="34" charset="-122"/>
                 <a:cs typeface="Times New Roman" pitchFamily="34" charset="-120"/>
               </a:rPr>
-              <a:t>Information flows as follows:</a:t>
-            </a:r>
-            <a:endParaRPr lang="en-US" sz="4000" dirty="0"/>
-          </a:p>
-          <a:p>
+              <a:t>Raw materials: </a:t>
+            </a:r>
             <a:pPr algn="l" indent="0" marL="0">
               <a:spcAft>
                 <a:spcPts val="800"/>
@@ -13967,7 +15352,7 @@
               <a:buNone/>
             </a:pPr>
             <a:r>
-              <a:rPr lang="en-US" sz="4000" b="1" dirty="0">
+              <a:rPr lang="en-US" sz="4000" dirty="0">
                 <a:solidFill>
                   <a:srgbClr val="111111"/>
                 </a:solidFill>
@@ -13975,8 +15360,11 @@
                 <a:ea typeface="Times New Roman" pitchFamily="34" charset="-122"/>
                 <a:cs typeface="Times New Roman" pitchFamily="34" charset="-120"/>
               </a:rPr>
-              <a:t>Media: </a:t>
-            </a:r>
+              <a:t>Cotton, cocoa, coffee and timber feed town industries and ports.</a:t>
+            </a:r>
+            <a:endParaRPr lang="en-US" sz="4000" dirty="0"/>
+          </a:p>
+          <a:p>
             <a:pPr algn="l" indent="0" marL="0">
               <a:spcAft>
                 <a:spcPts val="800"/>
@@ -13984,7 +15372,7 @@
               <a:buNone/>
             </a:pPr>
             <a:r>
-              <a:rPr lang="en-US" sz="4000" dirty="0">
+              <a:rPr lang="en-US" sz="4000" b="1" dirty="0">
                 <a:solidFill>
                   <a:srgbClr val="111111"/>
                 </a:solidFill>
@@ -13992,11 +15380,8 @@
                 <a:ea typeface="Times New Roman" pitchFamily="34" charset="-122"/>
                 <a:cs typeface="Times New Roman" pitchFamily="34" charset="-120"/>
               </a:rPr>
-              <a:t>Radio, phones and newspapers bring news to villages.</a:t>
-            </a:r>
-            <a:endParaRPr lang="en-US" sz="4000" dirty="0"/>
-          </a:p>
-          <a:p>
+              <a:t>Firewood and charcoal: </a:t>
+            </a:r>
             <a:pPr algn="l" indent="0" marL="0">
               <a:spcAft>
                 <a:spcPts val="800"/>
@@ -14004,7 +15389,7 @@
               <a:buNone/>
             </a:pPr>
             <a:r>
-              <a:rPr lang="en-US" sz="4000" b="1" dirty="0">
+              <a:rPr lang="en-US" sz="4000" dirty="0">
                 <a:solidFill>
                   <a:srgbClr val="111111"/>
                 </a:solidFill>
@@ -14012,8 +15397,11 @@
                 <a:ea typeface="Times New Roman" pitchFamily="34" charset="-122"/>
                 <a:cs typeface="Times New Roman" pitchFamily="34" charset="-120"/>
               </a:rPr>
-              <a:t>People: </a:t>
-            </a:r>
+              <a:t>Most town households cook with wood and charcoal from the country side.</a:t>
+            </a:r>
+            <a:endParaRPr lang="en-US" sz="4000" dirty="0"/>
+          </a:p>
+          <a:p>
             <a:pPr algn="l" indent="0" marL="0">
               <a:spcAft>
                 <a:spcPts val="800"/>
@@ -14021,7 +15409,7 @@
               <a:buNone/>
             </a:pPr>
             <a:r>
-              <a:rPr lang="en-US" sz="4000" dirty="0">
+              <a:rPr lang="en-US" sz="4000" b="1" dirty="0">
                 <a:solidFill>
                   <a:srgbClr val="111111"/>
                 </a:solidFill>
@@ -14029,7 +15417,24 @@
                 <a:ea typeface="Times New Roman" pitchFamily="34" charset="-122"/>
                 <a:cs typeface="Times New Roman" pitchFamily="34" charset="-120"/>
               </a:rPr>
-              <a:t>Travellers and traders carry news between towns and villages.</a:t>
+              <a:t>Labour: </a:t>
+            </a:r>
+            <a:pPr algn="l" indent="0" marL="0">
+              <a:spcAft>
+                <a:spcPts val="800"/>
+              </a:spcAft>
+              <a:buNone/>
+            </a:pPr>
+            <a:r>
+              <a:rPr lang="en-US" sz="4000" dirty="0">
+                <a:solidFill>
+                  <a:srgbClr val="111111"/>
+                </a:solidFill>
+                <a:latin typeface="Times New Roman" pitchFamily="34" charset="0"/>
+                <a:ea typeface="Times New Roman" pitchFamily="34" charset="-122"/>
+                <a:cs typeface="Times New Roman" pitchFamily="34" charset="-120"/>
+              </a:rPr>
+              <a:t>Young villagers go to work in towns.</a:t>
             </a:r>
             <a:endParaRPr lang="en-US" sz="4000" dirty="0"/>
           </a:p>
@@ -14141,15 +15546,176 @@
                 <a:ea typeface="Calibri" pitchFamily="34" charset="-122"/>
                 <a:cs typeface="Calibri" pitchFamily="34" charset="-120"/>
               </a:rPr>
-              <a:t>FORMATIVE EVALUATION</a:t>
+              <a:t>BOARD SUMMARY</a:t>
             </a:r>
             <a:endParaRPr lang="en-US" sz="1400" dirty="0"/>
+          </a:p>
+        </p:txBody>
+      </p:sp>
+      <p:sp>
+        <p:nvSpPr>
+          <p:cNvPr id="3" name="Text 1"/>
+          <p:cNvSpPr/>
+          <p:nvPr/>
+        </p:nvSpPr>
+        <p:spPr>
+          <a:xfrm>
+            <a:off x="365760" y="1005840"/>
+            <a:ext cx="11460175" cy="731520"/>
+          </a:xfrm>
+          <a:prstGeom prst="rect">
+            <a:avLst/>
+          </a:prstGeom>
+          <a:noFill/>
+          <a:ln/>
+        </p:spPr>
+        <p:txBody>
+          <a:bodyPr wrap="square" lIns="0" tIns="0" rIns="0" bIns="0" rtlCol="0" anchor="ctr">
+            <a:normAutofit/>
+          </a:bodyPr>
+          <a:lstStyle/>
+          <a:p>
+            <a:pPr algn="ctr" indent="0" marL="0">
+              <a:buNone/>
+            </a:pPr>
+            <a:r>
+              <a:rPr lang="en-US" sz="3600" b="1" dirty="0">
+                <a:solidFill>
+                  <a:srgbClr val="990011"/>
+                </a:solidFill>
+                <a:latin typeface="Times New Roman" pitchFamily="34" charset="0"/>
+                <a:ea typeface="Times New Roman" pitchFamily="34" charset="-122"/>
+                <a:cs typeface="Times New Roman" pitchFamily="34" charset="-120"/>
+              </a:rPr>
+              <a:t>1. Economic Relationships</a:t>
+            </a:r>
+            <a:endParaRPr lang="en-US" sz="3600" dirty="0"/>
+          </a:p>
+        </p:txBody>
+      </p:sp>
+      <p:sp>
+        <p:nvSpPr>
+          <p:cNvPr id="4" name="Text 2"/>
+          <p:cNvSpPr/>
+          <p:nvPr/>
+        </p:nvSpPr>
+        <p:spPr>
+          <a:xfrm>
+            <a:off x="365760" y="1737360"/>
+            <a:ext cx="5120640" cy="457200"/>
+          </a:xfrm>
+          <a:prstGeom prst="rect">
+            <a:avLst/>
+          </a:prstGeom>
+          <a:noFill/>
+          <a:ln/>
+        </p:spPr>
+        <p:txBody>
+          <a:bodyPr wrap="square" lIns="0" tIns="0" rIns="0" bIns="0" rtlCol="0" anchor="ctr">
+            <a:normAutofit/>
+          </a:bodyPr>
+          <a:lstStyle/>
+          <a:p>
+            <a:pPr algn="l" indent="0" marL="0">
+              <a:buNone/>
+            </a:pPr>
+            <a:r>
+              <a:rPr lang="en-US" sz="3000" b="1" dirty="0">
+                <a:solidFill>
+                  <a:srgbClr val="990011"/>
+                </a:solidFill>
+                <a:latin typeface="Times New Roman" pitchFamily="34" charset="0"/>
+                <a:ea typeface="Times New Roman" pitchFamily="34" charset="-122"/>
+                <a:cs typeface="Times New Roman" pitchFamily="34" charset="-120"/>
+              </a:rPr>
+              <a:t>B) From the Town to the Country Side</a:t>
+            </a:r>
+            <a:endParaRPr lang="en-US" sz="3000" dirty="0"/>
+          </a:p>
+        </p:txBody>
+      </p:sp>
+      <p:sp>
+        <p:nvSpPr>
+          <p:cNvPr id="5" name="Text 3"/>
+          <p:cNvSpPr/>
+          <p:nvPr/>
+        </p:nvSpPr>
+        <p:spPr>
+          <a:xfrm>
+            <a:off x="365760" y="2240280"/>
+            <a:ext cx="4846320" cy="4160520"/>
+          </a:xfrm>
+          <a:prstGeom prst="rect">
+            <a:avLst/>
+          </a:prstGeom>
+          <a:noFill/>
+          <a:ln/>
+        </p:spPr>
+        <p:txBody>
+          <a:bodyPr wrap="square" lIns="0" tIns="0" rIns="0" bIns="0" rtlCol="0" anchor="t"/>
+          <a:lstStyle/>
+          <a:p>
+            <a:pPr algn="l" indent="0" marL="0">
+              <a:spcAft>
+                <a:spcPts val="800"/>
+              </a:spcAft>
+              <a:buNone/>
+            </a:pPr>
+            <a:r>
+              <a:rPr lang="en-US" sz="3400" i="1" dirty="0">
+                <a:solidFill>
+                  <a:srgbClr val="111111"/>
+                </a:solidFill>
+                <a:latin typeface="Times New Roman" pitchFamily="34" charset="0"/>
+                <a:ea typeface="Times New Roman" pitchFamily="34" charset="-122"/>
+                <a:cs typeface="Times New Roman" pitchFamily="34" charset="-120"/>
+              </a:rPr>
+              <a:t>Towns send the following to the country side:</a:t>
+            </a:r>
+            <a:endParaRPr lang="en-US" sz="3400" dirty="0"/>
+          </a:p>
+          <a:p>
+            <a:pPr algn="l" indent="0" marL="0">
+              <a:spcAft>
+                <a:spcPts val="800"/>
+              </a:spcAft>
+              <a:buNone/>
+            </a:pPr>
+            <a:r>
+              <a:rPr lang="en-US" sz="3400" b="1" dirty="0">
+                <a:solidFill>
+                  <a:srgbClr val="111111"/>
+                </a:solidFill>
+                <a:latin typeface="Times New Roman" pitchFamily="34" charset="0"/>
+                <a:ea typeface="Times New Roman" pitchFamily="34" charset="-122"/>
+                <a:cs typeface="Times New Roman" pitchFamily="34" charset="-120"/>
+              </a:rPr>
+              <a:t>Manufactured goods: </a:t>
+            </a:r>
+            <a:pPr algn="l" indent="0" marL="0">
+              <a:spcAft>
+                <a:spcPts val="800"/>
+              </a:spcAft>
+              <a:buNone/>
+            </a:pPr>
+            <a:r>
+              <a:rPr lang="en-US" sz="3400" dirty="0">
+                <a:solidFill>
+                  <a:srgbClr val="111111"/>
+                </a:solidFill>
+                <a:latin typeface="Times New Roman" pitchFamily="34" charset="0"/>
+                <a:ea typeface="Times New Roman" pitchFamily="34" charset="-122"/>
+                <a:cs typeface="Times New Roman" pitchFamily="34" charset="-120"/>
+              </a:rPr>
+              <a:t>Soap, oil, sugar, clothes, tools and phones are sold in villages.</a:t>
+            </a:r>
+            <a:endParaRPr lang="en-US" sz="3400" dirty="0"/>
           </a:p>
         </p:txBody>
       </p:sp>
       <p:pic>
         <p:nvPicPr>
-          <p:cNvPr id="3" name="Image 0" descr="/home/claude/f4/img/minesec_sheet.png">    </p:cNvPr>
+          <p:cNvPr id="6" name="Image 0" descr="/home/claude/f4/img/v2/usa_truck.jpg">    </p:cNvPr>
           <p:cNvPicPr>
             <a:picLocks noChangeAspect="1"/>
           </p:cNvPicPr>
@@ -14163,8 +15729,8 @@
         </p:blipFill>
         <p:spPr>
           <a:xfrm>
-            <a:off x="0" y="658368"/>
-            <a:ext cx="5120640" cy="5833872"/>
+            <a:off x="5349240" y="2071212"/>
+            <a:ext cx="6659575" cy="3693983"/>
           </a:xfrm>
           <a:prstGeom prst="rect">
             <a:avLst/>
@@ -14173,14 +15739,14 @@
       </p:pic>
       <p:sp>
         <p:nvSpPr>
-          <p:cNvPr id="4" name="Text 1"/>
+          <p:cNvPr id="7" name="Text 4"/>
           <p:cNvSpPr/>
           <p:nvPr/>
         </p:nvSpPr>
         <p:spPr>
           <a:xfrm>
-            <a:off x="5349240" y="1005840"/>
-            <a:ext cx="6522415" cy="731520"/>
+            <a:off x="5349240" y="6089904"/>
+            <a:ext cx="6659575" cy="347472"/>
           </a:xfrm>
           <a:prstGeom prst="rect">
             <a:avLst/>
@@ -14189,68 +15755,24 @@
           <a:ln/>
         </p:spPr>
         <p:txBody>
-          <a:bodyPr wrap="square" lIns="0" tIns="0" rIns="0" bIns="0" rtlCol="0" anchor="ctr">
-            <a:normAutofit/>
-          </a:bodyPr>
+          <a:bodyPr wrap="square" lIns="0" tIns="0" rIns="0" bIns="0" rtlCol="0" anchor="ctr"/>
           <a:lstStyle/>
           <a:p>
             <a:pPr algn="ctr" indent="0" marL="0">
               <a:buNone/>
             </a:pPr>
             <a:r>
-              <a:rPr lang="en-US" sz="3600" b="1" dirty="0">
-                <a:solidFill>
-                  <a:srgbClr val="990011"/>
+              <a:rPr lang="en-US" sz="1600" i="1" dirty="0">
+                <a:solidFill>
+                  <a:srgbClr val="555555"/>
                 </a:solidFill>
                 <a:latin typeface="Times New Roman" pitchFamily="34" charset="0"/>
                 <a:ea typeface="Times New Roman" pitchFamily="34" charset="-122"/>
                 <a:cs typeface="Times New Roman" pitchFamily="34" charset="-120"/>
               </a:rPr>
-              <a:t>Evaluation 1</a:t>
-            </a:r>
-            <a:endParaRPr lang="en-US" sz="3600" dirty="0"/>
-          </a:p>
-        </p:txBody>
-      </p:sp>
-      <p:sp>
-        <p:nvSpPr>
-          <p:cNvPr id="5" name="Text 2"/>
-          <p:cNvSpPr/>
-          <p:nvPr/>
-        </p:nvSpPr>
-        <p:spPr>
-          <a:xfrm>
-            <a:off x="5349240" y="1783080"/>
-            <a:ext cx="6522415" cy="4663440"/>
-          </a:xfrm>
-          <a:prstGeom prst="rect">
-            <a:avLst/>
-          </a:prstGeom>
-          <a:noFill/>
-          <a:ln/>
-        </p:spPr>
-        <p:txBody>
-          <a:bodyPr wrap="square" lIns="0" tIns="0" rIns="0" bIns="0" rtlCol="0" anchor="t"/>
-          <a:lstStyle/>
-          <a:p>
-            <a:pPr algn="l" indent="0" marL="0">
-              <a:spcAft>
-                <a:spcPts val="800"/>
-              </a:spcAft>
-              <a:buNone/>
-            </a:pPr>
-            <a:r>
-              <a:rPr lang="en-US" sz="4000" dirty="0">
-                <a:solidFill>
-                  <a:srgbClr val="111111"/>
-                </a:solidFill>
-                <a:latin typeface="Times New Roman" pitchFamily="34" charset="0"/>
-                <a:ea typeface="Times New Roman" pitchFamily="34" charset="-122"/>
-                <a:cs typeface="Times New Roman" pitchFamily="34" charset="-120"/>
-              </a:rPr>
-              <a:t>Give two products sent from villages to towns.</a:t>
-            </a:r>
-            <a:endParaRPr lang="en-US" sz="4000" dirty="0"/>
+              <a:t>Illustration: goods carried to villages</a:t>
+            </a:r>
+            <a:endParaRPr lang="en-US" sz="1600" dirty="0"/>
           </a:p>
         </p:txBody>
       </p:sp>
@@ -14360,7 +15882,7 @@
                 <a:ea typeface="Calibri" pitchFamily="34" charset="-122"/>
                 <a:cs typeface="Calibri" pitchFamily="34" charset="-120"/>
               </a:rPr>
-              <a:t>FORMATIVE EVALUATION</a:t>
+              <a:t>BOARD SUMMARY</a:t>
             </a:r>
             <a:endParaRPr lang="en-US" sz="1400" dirty="0"/>
           </a:p>
@@ -14383,7 +15905,7 @@
         <p:spPr>
           <a:xfrm>
             <a:off x="0" y="658368"/>
-            <a:ext cx="5120640" cy="5833872"/>
+            <a:ext cx="3840480" cy="5833872"/>
           </a:xfrm>
           <a:prstGeom prst="rect">
             <a:avLst/>
@@ -14398,8 +15920,8 @@
         </p:nvSpPr>
         <p:spPr>
           <a:xfrm>
-            <a:off x="5349240" y="1005840"/>
-            <a:ext cx="6522415" cy="731520"/>
+            <a:off x="4069080" y="1005840"/>
+            <a:ext cx="7802575" cy="731520"/>
           </a:xfrm>
           <a:prstGeom prst="rect">
             <a:avLst/>
@@ -14425,7 +15947,7 @@
                 <a:ea typeface="Times New Roman" pitchFamily="34" charset="-122"/>
                 <a:cs typeface="Times New Roman" pitchFamily="34" charset="-120"/>
               </a:rPr>
-              <a:t>Expected Answer</a:t>
+              <a:t>1. Economic Relationships</a:t>
             </a:r>
             <a:endParaRPr lang="en-US" sz="3600" dirty="0"/>
           </a:p>
@@ -14439,8 +15961,47 @@
         </p:nvSpPr>
         <p:spPr>
           <a:xfrm>
-            <a:off x="5349240" y="1783080"/>
-            <a:ext cx="6522415" cy="4663440"/>
+            <a:off x="4069080" y="1737360"/>
+            <a:ext cx="7802575" cy="457200"/>
+          </a:xfrm>
+          <a:prstGeom prst="rect">
+            <a:avLst/>
+          </a:prstGeom>
+          <a:noFill/>
+          <a:ln/>
+        </p:spPr>
+        <p:txBody>
+          <a:bodyPr wrap="square" lIns="0" tIns="0" rIns="0" bIns="0" rtlCol="0" anchor="ctr"/>
+          <a:lstStyle/>
+          <a:p>
+            <a:pPr algn="l" indent="0" marL="0">
+              <a:buNone/>
+            </a:pPr>
+            <a:r>
+              <a:rPr lang="en-US" sz="3200" b="1" dirty="0">
+                <a:solidFill>
+                  <a:srgbClr val="990011"/>
+                </a:solidFill>
+                <a:latin typeface="Times New Roman" pitchFamily="34" charset="0"/>
+                <a:ea typeface="Times New Roman" pitchFamily="34" charset="-122"/>
+                <a:cs typeface="Times New Roman" pitchFamily="34" charset="-120"/>
+              </a:rPr>
+              <a:t>B) From the Town to the Country Side</a:t>
+            </a:r>
+            <a:endParaRPr lang="en-US" sz="3200" dirty="0"/>
+          </a:p>
+        </p:txBody>
+      </p:sp>
+      <p:sp>
+        <p:nvSpPr>
+          <p:cNvPr id="6" name="Text 3"/>
+          <p:cNvSpPr/>
+          <p:nvPr/>
+        </p:nvSpPr>
+        <p:spPr>
+          <a:xfrm>
+            <a:off x="4069080" y="2240280"/>
+            <a:ext cx="7802575" cy="4206240"/>
           </a:xfrm>
           <a:prstGeom prst="rect">
             <a:avLst/>
@@ -14459,7 +16020,7 @@
               <a:buNone/>
             </a:pPr>
             <a:r>
-              <a:rPr lang="en-US" sz="4000" dirty="0">
+              <a:rPr lang="en-US" sz="4000" b="1" dirty="0">
                 <a:solidFill>
                   <a:srgbClr val="111111"/>
                 </a:solidFill>
@@ -14467,7 +16028,61 @@
                 <a:ea typeface="Times New Roman" pitchFamily="34" charset="-122"/>
                 <a:cs typeface="Times New Roman" pitchFamily="34" charset="-120"/>
               </a:rPr>
-              <a:t>Food crops and cattle.</a:t>
+              <a:t>Farm inputs: </a:t>
+            </a:r>
+            <a:pPr algn="l" indent="0" marL="0">
+              <a:spcAft>
+                <a:spcPts val="800"/>
+              </a:spcAft>
+              <a:buNone/>
+            </a:pPr>
+            <a:r>
+              <a:rPr lang="en-US" sz="4000" dirty="0">
+                <a:solidFill>
+                  <a:srgbClr val="111111"/>
+                </a:solidFill>
+                <a:latin typeface="Times New Roman" pitchFamily="34" charset="0"/>
+                <a:ea typeface="Times New Roman" pitchFamily="34" charset="-122"/>
+                <a:cs typeface="Times New Roman" pitchFamily="34" charset="-120"/>
+              </a:rPr>
+              <a:t>Fertilisers, seeds and pesticides come from towns.</a:t>
+            </a:r>
+            <a:endParaRPr lang="en-US" sz="4000" dirty="0"/>
+          </a:p>
+          <a:p>
+            <a:pPr algn="l" indent="0" marL="0">
+              <a:spcAft>
+                <a:spcPts val="800"/>
+              </a:spcAft>
+              <a:buNone/>
+            </a:pPr>
+            <a:r>
+              <a:rPr lang="en-US" sz="4000" b="1" dirty="0">
+                <a:solidFill>
+                  <a:srgbClr val="111111"/>
+                </a:solidFill>
+                <a:latin typeface="Times New Roman" pitchFamily="34" charset="0"/>
+                <a:ea typeface="Times New Roman" pitchFamily="34" charset="-122"/>
+                <a:cs typeface="Times New Roman" pitchFamily="34" charset="-120"/>
+              </a:rPr>
+              <a:t>Money: </a:t>
+            </a:r>
+            <a:pPr algn="l" indent="0" marL="0">
+              <a:spcAft>
+                <a:spcPts val="800"/>
+              </a:spcAft>
+              <a:buNone/>
+            </a:pPr>
+            <a:r>
+              <a:rPr lang="en-US" sz="4000" dirty="0">
+                <a:solidFill>
+                  <a:srgbClr val="111111"/>
+                </a:solidFill>
+                <a:latin typeface="Times New Roman" pitchFamily="34" charset="0"/>
+                <a:ea typeface="Times New Roman" pitchFamily="34" charset="-122"/>
+                <a:cs typeface="Times New Roman" pitchFamily="34" charset="-120"/>
+              </a:rPr>
+              <a:t>Town dwellers send money to their families, and traders pay farmers for their crops.</a:t>
             </a:r>
             <a:endParaRPr lang="en-US" sz="4000" dirty="0"/>
           </a:p>
@@ -14818,7 +16433,7 @@
                 <a:ea typeface="Calibri" pitchFamily="34" charset="-122"/>
                 <a:cs typeface="Calibri" pitchFamily="34" charset="-120"/>
               </a:rPr>
-              <a:t>FORMATIVE EVALUATION</a:t>
+              <a:t>BOARD SUMMARY</a:t>
             </a:r>
             <a:endParaRPr lang="en-US" sz="1400" dirty="0"/>
           </a:p>
@@ -14883,7 +16498,7 @@
                 <a:ea typeface="Times New Roman" pitchFamily="34" charset="-122"/>
                 <a:cs typeface="Times New Roman" pitchFamily="34" charset="-120"/>
               </a:rPr>
-              <a:t>Evaluation 2</a:t>
+              <a:t>1. Economic Relationships</a:t>
             </a:r>
             <a:endParaRPr lang="en-US" sz="3600" dirty="0"/>
           </a:p>
@@ -14897,8 +16512,47 @@
         </p:nvSpPr>
         <p:spPr>
           <a:xfrm>
-            <a:off x="5349240" y="1783080"/>
-            <a:ext cx="6522415" cy="4663440"/>
+            <a:off x="5349240" y="1737360"/>
+            <a:ext cx="6522415" cy="457200"/>
+          </a:xfrm>
+          <a:prstGeom prst="rect">
+            <a:avLst/>
+          </a:prstGeom>
+          <a:noFill/>
+          <a:ln/>
+        </p:spPr>
+        <p:txBody>
+          <a:bodyPr wrap="square" lIns="0" tIns="0" rIns="0" bIns="0" rtlCol="0" anchor="ctr"/>
+          <a:lstStyle/>
+          <a:p>
+            <a:pPr algn="l" indent="0" marL="0">
+              <a:buNone/>
+            </a:pPr>
+            <a:r>
+              <a:rPr lang="en-US" sz="2100" b="1" dirty="0">
+                <a:solidFill>
+                  <a:srgbClr val="990011"/>
+                </a:solidFill>
+                <a:latin typeface="Times New Roman" pitchFamily="34" charset="0"/>
+                <a:ea typeface="Times New Roman" pitchFamily="34" charset="-122"/>
+                <a:cs typeface="Times New Roman" pitchFamily="34" charset="-120"/>
+              </a:rPr>
+              <a:t>B) From the Town to the Country Side (continued)</a:t>
+            </a:r>
+            <a:endParaRPr lang="en-US" sz="2100" dirty="0"/>
+          </a:p>
+        </p:txBody>
+      </p:sp>
+      <p:sp>
+        <p:nvSpPr>
+          <p:cNvPr id="6" name="Text 3"/>
+          <p:cNvSpPr/>
+          <p:nvPr/>
+        </p:nvSpPr>
+        <p:spPr>
+          <a:xfrm>
+            <a:off x="5349240" y="2240280"/>
+            <a:ext cx="6522415" cy="4206240"/>
           </a:xfrm>
           <a:prstGeom prst="rect">
             <a:avLst/>
@@ -14917,7 +16571,7 @@
               <a:buNone/>
             </a:pPr>
             <a:r>
-              <a:rPr lang="en-US" sz="4000" dirty="0">
+              <a:rPr lang="en-US" sz="4000" b="1" dirty="0">
                 <a:solidFill>
                   <a:srgbClr val="111111"/>
                 </a:solidFill>
@@ -14925,7 +16579,24 @@
                 <a:ea typeface="Times New Roman" pitchFamily="34" charset="-122"/>
                 <a:cs typeface="Times New Roman" pitchFamily="34" charset="-120"/>
               </a:rPr>
-              <a:t>Give two socio-cultural links.</a:t>
+              <a:t>Services: </a:t>
+            </a:r>
+            <a:pPr algn="l" indent="0" marL="0">
+              <a:spcAft>
+                <a:spcPts val="800"/>
+              </a:spcAft>
+              <a:buNone/>
+            </a:pPr>
+            <a:r>
+              <a:rPr lang="en-US" sz="4000" dirty="0">
+                <a:solidFill>
+                  <a:srgbClr val="111111"/>
+                </a:solidFill>
+                <a:latin typeface="Times New Roman" pitchFamily="34" charset="0"/>
+                <a:ea typeface="Times New Roman" pitchFamily="34" charset="-122"/>
+                <a:cs typeface="Times New Roman" pitchFamily="34" charset="-120"/>
+              </a:rPr>
+              <a:t>Towns provide hospitals, secondary schools, banks and administration.</a:t>
             </a:r>
             <a:endParaRPr lang="en-US" sz="4000" dirty="0"/>
           </a:p>
@@ -15037,15 +16708,176 @@
                 <a:ea typeface="Calibri" pitchFamily="34" charset="-122"/>
                 <a:cs typeface="Calibri" pitchFamily="34" charset="-120"/>
               </a:rPr>
-              <a:t>FORMATIVE EVALUATION</a:t>
+              <a:t>BOARD SUMMARY</a:t>
             </a:r>
             <a:endParaRPr lang="en-US" sz="1400" dirty="0"/>
+          </a:p>
+        </p:txBody>
+      </p:sp>
+      <p:sp>
+        <p:nvSpPr>
+          <p:cNvPr id="3" name="Text 1"/>
+          <p:cNvSpPr/>
+          <p:nvPr/>
+        </p:nvSpPr>
+        <p:spPr>
+          <a:xfrm>
+            <a:off x="365760" y="1005840"/>
+            <a:ext cx="11460175" cy="731520"/>
+          </a:xfrm>
+          <a:prstGeom prst="rect">
+            <a:avLst/>
+          </a:prstGeom>
+          <a:noFill/>
+          <a:ln/>
+        </p:spPr>
+        <p:txBody>
+          <a:bodyPr wrap="square" lIns="0" tIns="0" rIns="0" bIns="0" rtlCol="0" anchor="ctr">
+            <a:normAutofit/>
+          </a:bodyPr>
+          <a:lstStyle/>
+          <a:p>
+            <a:pPr algn="ctr" indent="0" marL="0">
+              <a:buNone/>
+            </a:pPr>
+            <a:r>
+              <a:rPr lang="en-US" sz="3600" b="1" dirty="0">
+                <a:solidFill>
+                  <a:srgbClr val="990011"/>
+                </a:solidFill>
+                <a:latin typeface="Times New Roman" pitchFamily="34" charset="0"/>
+                <a:ea typeface="Times New Roman" pitchFamily="34" charset="-122"/>
+                <a:cs typeface="Times New Roman" pitchFamily="34" charset="-120"/>
+              </a:rPr>
+              <a:t>1. Economic Relationships</a:t>
+            </a:r>
+            <a:endParaRPr lang="en-US" sz="3600" dirty="0"/>
+          </a:p>
+        </p:txBody>
+      </p:sp>
+      <p:sp>
+        <p:nvSpPr>
+          <p:cNvPr id="4" name="Text 2"/>
+          <p:cNvSpPr/>
+          <p:nvPr/>
+        </p:nvSpPr>
+        <p:spPr>
+          <a:xfrm>
+            <a:off x="365760" y="1737360"/>
+            <a:ext cx="5120640" cy="457200"/>
+          </a:xfrm>
+          <a:prstGeom prst="rect">
+            <a:avLst/>
+          </a:prstGeom>
+          <a:noFill/>
+          <a:ln/>
+        </p:spPr>
+        <p:txBody>
+          <a:bodyPr wrap="square" lIns="0" tIns="0" rIns="0" bIns="0" rtlCol="0" anchor="ctr">
+            <a:normAutofit/>
+          </a:bodyPr>
+          <a:lstStyle/>
+          <a:p>
+            <a:pPr algn="l" indent="0" marL="0">
+              <a:buNone/>
+            </a:pPr>
+            <a:r>
+              <a:rPr lang="en-US" sz="3000" b="1" dirty="0">
+                <a:solidFill>
+                  <a:srgbClr val="990011"/>
+                </a:solidFill>
+                <a:latin typeface="Times New Roman" pitchFamily="34" charset="0"/>
+                <a:ea typeface="Times New Roman" pitchFamily="34" charset="-122"/>
+                <a:cs typeface="Times New Roman" pitchFamily="34" charset="-120"/>
+              </a:rPr>
+              <a:t>C) The Actors of the Exchanges</a:t>
+            </a:r>
+            <a:endParaRPr lang="en-US" sz="3000" dirty="0"/>
+          </a:p>
+        </p:txBody>
+      </p:sp>
+      <p:sp>
+        <p:nvSpPr>
+          <p:cNvPr id="5" name="Text 3"/>
+          <p:cNvSpPr/>
+          <p:nvPr/>
+        </p:nvSpPr>
+        <p:spPr>
+          <a:xfrm>
+            <a:off x="365760" y="2240280"/>
+            <a:ext cx="4846320" cy="4160520"/>
+          </a:xfrm>
+          <a:prstGeom prst="rect">
+            <a:avLst/>
+          </a:prstGeom>
+          <a:noFill/>
+          <a:ln/>
+        </p:spPr>
+        <p:txBody>
+          <a:bodyPr wrap="square" lIns="0" tIns="0" rIns="0" bIns="0" rtlCol="0" anchor="t"/>
+          <a:lstStyle/>
+          <a:p>
+            <a:pPr algn="l" indent="0" marL="0">
+              <a:spcAft>
+                <a:spcPts val="800"/>
+              </a:spcAft>
+              <a:buNone/>
+            </a:pPr>
+            <a:r>
+              <a:rPr lang="en-US" sz="3600" i="1" dirty="0">
+                <a:solidFill>
+                  <a:srgbClr val="111111"/>
+                </a:solidFill>
+                <a:latin typeface="Times New Roman" pitchFamily="34" charset="0"/>
+                <a:ea typeface="Times New Roman" pitchFamily="34" charset="-122"/>
+                <a:cs typeface="Times New Roman" pitchFamily="34" charset="-120"/>
+              </a:rPr>
+              <a:t>The following actors link towns and country sides:</a:t>
+            </a:r>
+            <a:endParaRPr lang="en-US" sz="3600" dirty="0"/>
+          </a:p>
+          <a:p>
+            <a:pPr algn="l" indent="0" marL="0">
+              <a:spcAft>
+                <a:spcPts val="800"/>
+              </a:spcAft>
+              <a:buNone/>
+            </a:pPr>
+            <a:r>
+              <a:rPr lang="en-US" sz="3600" b="1" dirty="0">
+                <a:solidFill>
+                  <a:srgbClr val="111111"/>
+                </a:solidFill>
+                <a:latin typeface="Times New Roman" pitchFamily="34" charset="0"/>
+                <a:ea typeface="Times New Roman" pitchFamily="34" charset="-122"/>
+                <a:cs typeface="Times New Roman" pitchFamily="34" charset="-120"/>
+              </a:rPr>
+              <a:t>Buyam-sellams: </a:t>
+            </a:r>
+            <a:pPr algn="l" indent="0" marL="0">
+              <a:spcAft>
+                <a:spcPts val="800"/>
+              </a:spcAft>
+              <a:buNone/>
+            </a:pPr>
+            <a:r>
+              <a:rPr lang="en-US" sz="3600" dirty="0">
+                <a:solidFill>
+                  <a:srgbClr val="111111"/>
+                </a:solidFill>
+                <a:latin typeface="Times New Roman" pitchFamily="34" charset="0"/>
+                <a:ea typeface="Times New Roman" pitchFamily="34" charset="-122"/>
+                <a:cs typeface="Times New Roman" pitchFamily="34" charset="-120"/>
+              </a:rPr>
+              <a:t>They buy farm products in villages and sell them in towns.</a:t>
+            </a:r>
+            <a:endParaRPr lang="en-US" sz="3600" dirty="0"/>
           </a:p>
         </p:txBody>
       </p:sp>
       <p:pic>
         <p:nvPicPr>
-          <p:cNvPr id="3" name="Image 0" descr="/home/claude/f4/img/minesec_sheet.png">    </p:cNvPr>
+          <p:cNvPr id="6" name="Image 0" descr="/home/claude/f4/img/v2/f2t_street_vendor.jpg">    </p:cNvPr>
           <p:cNvPicPr>
             <a:picLocks noChangeAspect="1"/>
           </p:cNvPicPr>
@@ -15059,8 +16891,8 @@
         </p:blipFill>
         <p:spPr>
           <a:xfrm>
-            <a:off x="0" y="658368"/>
-            <a:ext cx="5120640" cy="5833872"/>
+            <a:off x="5349240" y="2071212"/>
+            <a:ext cx="6659575" cy="3693983"/>
           </a:xfrm>
           <a:prstGeom prst="rect">
             <a:avLst/>
@@ -15069,14 +16901,14 @@
       </p:pic>
       <p:sp>
         <p:nvSpPr>
-          <p:cNvPr id="4" name="Text 1"/>
+          <p:cNvPr id="7" name="Text 4"/>
           <p:cNvSpPr/>
           <p:nvPr/>
         </p:nvSpPr>
         <p:spPr>
           <a:xfrm>
-            <a:off x="5349240" y="1005840"/>
-            <a:ext cx="6522415" cy="731520"/>
+            <a:off x="5349240" y="6089904"/>
+            <a:ext cx="6659575" cy="347472"/>
           </a:xfrm>
           <a:prstGeom prst="rect">
             <a:avLst/>
@@ -15085,68 +16917,24 @@
           <a:ln/>
         </p:spPr>
         <p:txBody>
-          <a:bodyPr wrap="square" lIns="0" tIns="0" rIns="0" bIns="0" rtlCol="0" anchor="ctr">
-            <a:normAutofit/>
-          </a:bodyPr>
+          <a:bodyPr wrap="square" lIns="0" tIns="0" rIns="0" bIns="0" rtlCol="0" anchor="ctr"/>
           <a:lstStyle/>
           <a:p>
             <a:pPr algn="ctr" indent="0" marL="0">
               <a:buNone/>
             </a:pPr>
             <a:r>
-              <a:rPr lang="en-US" sz="3600" b="1" dirty="0">
-                <a:solidFill>
-                  <a:srgbClr val="990011"/>
+              <a:rPr lang="en-US" sz="1600" i="1" dirty="0">
+                <a:solidFill>
+                  <a:srgbClr val="555555"/>
                 </a:solidFill>
                 <a:latin typeface="Times New Roman" pitchFamily="34" charset="0"/>
                 <a:ea typeface="Times New Roman" pitchFamily="34" charset="-122"/>
                 <a:cs typeface="Times New Roman" pitchFamily="34" charset="-120"/>
               </a:rPr>
-              <a:t>Expected Answer</a:t>
-            </a:r>
-            <a:endParaRPr lang="en-US" sz="3600" dirty="0"/>
-          </a:p>
-        </p:txBody>
-      </p:sp>
-      <p:sp>
-        <p:nvSpPr>
-          <p:cNvPr id="5" name="Text 2"/>
-          <p:cNvSpPr/>
-          <p:nvPr/>
-        </p:nvSpPr>
-        <p:spPr>
-          <a:xfrm>
-            <a:off x="5349240" y="1783080"/>
-            <a:ext cx="6522415" cy="4663440"/>
-          </a:xfrm>
-          <a:prstGeom prst="rect">
-            <a:avLst/>
-          </a:prstGeom>
-          <a:noFill/>
-          <a:ln/>
-        </p:spPr>
-        <p:txBody>
-          <a:bodyPr wrap="square" lIns="0" tIns="0" rIns="0" bIns="0" rtlCol="0" anchor="t"/>
-          <a:lstStyle/>
-          <a:p>
-            <a:pPr algn="l" indent="0" marL="0">
-              <a:spcAft>
-                <a:spcPts val="800"/>
-              </a:spcAft>
-              <a:buNone/>
-            </a:pPr>
-            <a:r>
-              <a:rPr lang="en-US" sz="4000" dirty="0">
-                <a:solidFill>
-                  <a:srgbClr val="111111"/>
-                </a:solidFill>
-                <a:latin typeface="Times New Roman" pitchFamily="34" charset="0"/>
-                <a:ea typeface="Times New Roman" pitchFamily="34" charset="-122"/>
-                <a:cs typeface="Times New Roman" pitchFamily="34" charset="-120"/>
-              </a:rPr>
-              <a:t>Festivals and development associations.</a:t>
-            </a:r>
-            <a:endParaRPr lang="en-US" sz="4000" dirty="0"/>
+              <a:t>Illustration: a trader</a:t>
+            </a:r>
+            <a:endParaRPr lang="en-US" sz="1600" dirty="0"/>
           </a:p>
         </p:txBody>
       </p:sp>
@@ -15256,7 +17044,7 @@
                 <a:ea typeface="Calibri" pitchFamily="34" charset="-122"/>
                 <a:cs typeface="Calibri" pitchFamily="34" charset="-120"/>
               </a:rPr>
-              <a:t>REMEDIATION</a:t>
+              <a:t>BOARD SUMMARY</a:t>
             </a:r>
             <a:endParaRPr lang="en-US" sz="1400" dirty="0"/>
           </a:p>
@@ -15321,7 +17109,7 @@
                 <a:ea typeface="Times New Roman" pitchFamily="34" charset="-122"/>
                 <a:cs typeface="Times New Roman" pitchFamily="34" charset="-120"/>
               </a:rPr>
-              <a:t>Remediation</a:t>
+              <a:t>1. Economic Relationships</a:t>
             </a:r>
             <a:endParaRPr lang="en-US" sz="3600" dirty="0"/>
           </a:p>
@@ -15335,8 +17123,47 @@
         </p:nvSpPr>
         <p:spPr>
           <a:xfrm>
-            <a:off x="4069080" y="1783080"/>
-            <a:ext cx="7802575" cy="4663440"/>
+            <a:off x="4069080" y="1737360"/>
+            <a:ext cx="7802575" cy="457200"/>
+          </a:xfrm>
+          <a:prstGeom prst="rect">
+            <a:avLst/>
+          </a:prstGeom>
+          <a:noFill/>
+          <a:ln/>
+        </p:spPr>
+        <p:txBody>
+          <a:bodyPr wrap="square" lIns="0" tIns="0" rIns="0" bIns="0" rtlCol="0" anchor="ctr"/>
+          <a:lstStyle/>
+          <a:p>
+            <a:pPr algn="l" indent="0" marL="0">
+              <a:buNone/>
+            </a:pPr>
+            <a:r>
+              <a:rPr lang="en-US" sz="3200" b="1" dirty="0">
+                <a:solidFill>
+                  <a:srgbClr val="990011"/>
+                </a:solidFill>
+                <a:latin typeface="Times New Roman" pitchFamily="34" charset="0"/>
+                <a:ea typeface="Times New Roman" pitchFamily="34" charset="-122"/>
+                <a:cs typeface="Times New Roman" pitchFamily="34" charset="-120"/>
+              </a:rPr>
+              <a:t>C) The Actors of the Exchanges</a:t>
+            </a:r>
+            <a:endParaRPr lang="en-US" sz="3200" dirty="0"/>
+          </a:p>
+        </p:txBody>
+      </p:sp>
+      <p:sp>
+        <p:nvSpPr>
+          <p:cNvPr id="6" name="Text 3"/>
+          <p:cNvSpPr/>
+          <p:nvPr/>
+        </p:nvSpPr>
+        <p:spPr>
+          <a:xfrm>
+            <a:off x="4069080" y="2240280"/>
+            <a:ext cx="7802575" cy="4206240"/>
           </a:xfrm>
           <a:prstGeom prst="rect">
             <a:avLst/>
@@ -15363,18 +17190,13 @@
                 <a:ea typeface="Times New Roman" pitchFamily="34" charset="-122"/>
                 <a:cs typeface="Times New Roman" pitchFamily="34" charset="-120"/>
               </a:rPr>
-              <a:t>Fill in the blanks:</a:t>
-            </a:r>
-            <a:endParaRPr lang="en-US" sz="4000" dirty="0"/>
-          </a:p>
-          <a:p>
-            <a:pPr algn="l" marL="342900" indent="-342900">
+              <a:t>Clandestine transporters: </a:t>
+            </a:r>
+            <a:pPr algn="l" indent="0" marL="0">
               <a:spcAft>
                 <a:spcPts val="800"/>
               </a:spcAft>
-              <a:buSzPct val="100000"/>
-              <a:buFont typeface="+mj-lt"/>
-              <a:buAutoNum type="arabicPeriod" startAt="1"/>
+              <a:buNone/>
             </a:pPr>
             <a:r>
               <a:rPr lang="en-US" sz="4000" dirty="0">
@@ -15385,21 +17207,19 @@
                 <a:ea typeface="Times New Roman" pitchFamily="34" charset="-122"/>
                 <a:cs typeface="Times New Roman" pitchFamily="34" charset="-120"/>
               </a:rPr>
-              <a:t>A trader who buys in villages and sells in town is a ______.</a:t>
+              <a:t>They carry people and goods on rural roads with cars and motorbikes.</a:t>
             </a:r>
             <a:endParaRPr lang="en-US" sz="4000" dirty="0"/>
           </a:p>
           <a:p>
-            <a:pPr algn="l" marL="342900" indent="-342900">
+            <a:pPr algn="l" indent="0" marL="0">
               <a:spcAft>
                 <a:spcPts val="800"/>
               </a:spcAft>
-              <a:buSzPct val="100000"/>
-              <a:buFont typeface="+mj-lt"/>
-              <a:buAutoNum type="arabicPeriod" startAt="1"/>
-            </a:pPr>
-            <a:r>
-              <a:rPr lang="en-US" sz="4000" dirty="0">
+              <a:buNone/>
+            </a:pPr>
+            <a:r>
+              <a:rPr lang="en-US" sz="4000" b="1" dirty="0">
                 <a:solidFill>
                   <a:srgbClr val="111111"/>
                 </a:solidFill>
@@ -15407,18 +17227,13 @@
                 <a:ea typeface="Times New Roman" pitchFamily="34" charset="-122"/>
                 <a:cs typeface="Times New Roman" pitchFamily="34" charset="-120"/>
               </a:rPr>
-              <a:t>The movement of goods is a ______.</a:t>
-            </a:r>
-            <a:endParaRPr lang="en-US" sz="4000" dirty="0"/>
-          </a:p>
-          <a:p>
-            <a:pPr algn="l" marL="342900" indent="-342900">
+              <a:t>Cooperatives and CIGs: </a:t>
+            </a:r>
+            <a:pPr algn="l" indent="0" marL="0">
               <a:spcAft>
                 <a:spcPts val="800"/>
               </a:spcAft>
-              <a:buSzPct val="100000"/>
-              <a:buFont typeface="+mj-lt"/>
-              <a:buAutoNum type="arabicPeriod" startAt="1"/>
+              <a:buNone/>
             </a:pPr>
             <a:r>
               <a:rPr lang="en-US" sz="4000" dirty="0">
@@ -15429,7 +17244,7 @@
                 <a:ea typeface="Times New Roman" pitchFamily="34" charset="-122"/>
                 <a:cs typeface="Times New Roman" pitchFamily="34" charset="-120"/>
               </a:rPr>
-              <a:t>News reaches villages by ______.</a:t>
+              <a:t>Farmers group together to buy inputs and sell their products in towns.</a:t>
             </a:r>
             <a:endParaRPr lang="en-US" sz="4000" dirty="0"/>
           </a:p>
@@ -15541,7 +17356,7 @@
                 <a:ea typeface="Calibri" pitchFamily="34" charset="-122"/>
                 <a:cs typeface="Calibri" pitchFamily="34" charset="-120"/>
               </a:rPr>
-              <a:t>HOMEWORK</a:t>
+              <a:t>BOARD SUMMARY</a:t>
             </a:r>
             <a:endParaRPr lang="en-US" sz="1400" dirty="0"/>
           </a:p>
@@ -15606,7 +17421,7 @@
                 <a:ea typeface="Times New Roman" pitchFamily="34" charset="-122"/>
                 <a:cs typeface="Times New Roman" pitchFamily="34" charset="-120"/>
               </a:rPr>
-              <a:t>Homework</a:t>
+              <a:t>1. Economic Relationships</a:t>
             </a:r>
             <a:endParaRPr lang="en-US" sz="3600" dirty="0"/>
           </a:p>
@@ -15620,8 +17435,47 @@
         </p:nvSpPr>
         <p:spPr>
           <a:xfrm>
-            <a:off x="5349240" y="1783080"/>
-            <a:ext cx="6522415" cy="4663440"/>
+            <a:off x="5349240" y="1737360"/>
+            <a:ext cx="6522415" cy="457200"/>
+          </a:xfrm>
+          <a:prstGeom prst="rect">
+            <a:avLst/>
+          </a:prstGeom>
+          <a:noFill/>
+          <a:ln/>
+        </p:spPr>
+        <p:txBody>
+          <a:bodyPr wrap="square" lIns="0" tIns="0" rIns="0" bIns="0" rtlCol="0" anchor="ctr"/>
+          <a:lstStyle/>
+          <a:p>
+            <a:pPr algn="l" indent="0" marL="0">
+              <a:buNone/>
+            </a:pPr>
+            <a:r>
+              <a:rPr lang="en-US" sz="2400" b="1" dirty="0">
+                <a:solidFill>
+                  <a:srgbClr val="990011"/>
+                </a:solidFill>
+                <a:latin typeface="Times New Roman" pitchFamily="34" charset="0"/>
+                <a:ea typeface="Times New Roman" pitchFamily="34" charset="-122"/>
+                <a:cs typeface="Times New Roman" pitchFamily="34" charset="-120"/>
+              </a:rPr>
+              <a:t>C) The Actors of the Exchanges (continued)</a:t>
+            </a:r>
+            <a:endParaRPr lang="en-US" sz="2400" dirty="0"/>
+          </a:p>
+        </p:txBody>
+      </p:sp>
+      <p:sp>
+        <p:nvSpPr>
+          <p:cNvPr id="6" name="Text 3"/>
+          <p:cNvSpPr/>
+          <p:nvPr/>
+        </p:nvSpPr>
+        <p:spPr>
+          <a:xfrm>
+            <a:off x="5349240" y="2240280"/>
+            <a:ext cx="6522415" cy="4206240"/>
           </a:xfrm>
           <a:prstGeom prst="rect">
             <a:avLst/>
@@ -15640,7 +17494,7 @@
               <a:buNone/>
             </a:pPr>
             <a:r>
-              <a:rPr lang="en-US" sz="4000" dirty="0">
+              <a:rPr lang="en-US" sz="4000" b="1" dirty="0">
                 <a:solidFill>
                   <a:srgbClr val="111111"/>
                 </a:solidFill>
@@ -15648,7 +17502,24 @@
                 <a:ea typeface="Times New Roman" pitchFamily="34" charset="-122"/>
                 <a:cs typeface="Times New Roman" pitchFamily="34" charset="-120"/>
               </a:rPr>
-              <a:t>List three products your family buys from villages and three goods villagers buy in town.</a:t>
+              <a:t>Councils: </a:t>
+            </a:r>
+            <a:pPr algn="l" indent="0" marL="0">
+              <a:spcAft>
+                <a:spcPts val="800"/>
+              </a:spcAft>
+              <a:buNone/>
+            </a:pPr>
+            <a:r>
+              <a:rPr lang="en-US" sz="4000" dirty="0">
+                <a:solidFill>
+                  <a:srgbClr val="111111"/>
+                </a:solidFill>
+                <a:latin typeface="Times New Roman" pitchFamily="34" charset="0"/>
+                <a:ea typeface="Times New Roman" pitchFamily="34" charset="-122"/>
+                <a:cs typeface="Times New Roman" pitchFamily="34" charset="-120"/>
+              </a:rPr>
+              <a:t>They build markets and rural roads that link villages to towns.</a:t>
             </a:r>
             <a:endParaRPr lang="en-US" sz="4000" dirty="0"/>
           </a:p>
@@ -15760,15 +17631,135 @@
                 <a:ea typeface="Calibri" pitchFamily="34" charset="-122"/>
                 <a:cs typeface="Calibri" pitchFamily="34" charset="-120"/>
               </a:rPr>
-              <a:t>NEXT LESSON</a:t>
+              <a:t>BOARD SUMMARY</a:t>
             </a:r>
             <a:endParaRPr lang="en-US" sz="1400" dirty="0"/>
+          </a:p>
+        </p:txBody>
+      </p:sp>
+      <p:sp>
+        <p:nvSpPr>
+          <p:cNvPr id="3" name="Text 1"/>
+          <p:cNvSpPr/>
+          <p:nvPr/>
+        </p:nvSpPr>
+        <p:spPr>
+          <a:xfrm>
+            <a:off x="365760" y="1005840"/>
+            <a:ext cx="11460175" cy="731520"/>
+          </a:xfrm>
+          <a:prstGeom prst="rect">
+            <a:avLst/>
+          </a:prstGeom>
+          <a:noFill/>
+          <a:ln/>
+        </p:spPr>
+        <p:txBody>
+          <a:bodyPr wrap="square" lIns="0" tIns="0" rIns="0" bIns="0" rtlCol="0" anchor="ctr">
+            <a:normAutofit/>
+          </a:bodyPr>
+          <a:lstStyle/>
+          <a:p>
+            <a:pPr algn="ctr" indent="0" marL="0">
+              <a:buNone/>
+            </a:pPr>
+            <a:r>
+              <a:rPr lang="en-US" sz="3600" b="1" dirty="0">
+                <a:solidFill>
+                  <a:srgbClr val="990011"/>
+                </a:solidFill>
+                <a:latin typeface="Times New Roman" pitchFamily="34" charset="0"/>
+                <a:ea typeface="Times New Roman" pitchFamily="34" charset="-122"/>
+                <a:cs typeface="Times New Roman" pitchFamily="34" charset="-120"/>
+              </a:rPr>
+              <a:t>2. Socio-cultural Relationships</a:t>
+            </a:r>
+            <a:endParaRPr lang="en-US" sz="3600" dirty="0"/>
+          </a:p>
+        </p:txBody>
+      </p:sp>
+      <p:sp>
+        <p:nvSpPr>
+          <p:cNvPr id="4" name="Text 2"/>
+          <p:cNvSpPr/>
+          <p:nvPr/>
+        </p:nvSpPr>
+        <p:spPr>
+          <a:xfrm>
+            <a:off x="365760" y="1783080"/>
+            <a:ext cx="4846320" cy="4617720"/>
+          </a:xfrm>
+          <a:prstGeom prst="rect">
+            <a:avLst/>
+          </a:prstGeom>
+          <a:noFill/>
+          <a:ln/>
+        </p:spPr>
+        <p:txBody>
+          <a:bodyPr wrap="square" lIns="0" tIns="0" rIns="0" bIns="0" rtlCol="0" anchor="t"/>
+          <a:lstStyle/>
+          <a:p>
+            <a:pPr algn="l" indent="0" marL="0">
+              <a:spcAft>
+                <a:spcPts val="800"/>
+              </a:spcAft>
+              <a:buNone/>
+            </a:pPr>
+            <a:r>
+              <a:rPr lang="en-US" sz="3600" i="1" dirty="0">
+                <a:solidFill>
+                  <a:srgbClr val="111111"/>
+                </a:solidFill>
+                <a:latin typeface="Times New Roman" pitchFamily="34" charset="0"/>
+                <a:ea typeface="Times New Roman" pitchFamily="34" charset="-122"/>
+                <a:cs typeface="Times New Roman" pitchFamily="34" charset="-120"/>
+              </a:rPr>
+              <a:t>Towns and country sides are linked socially and culturally as follows:</a:t>
+            </a:r>
+            <a:endParaRPr lang="en-US" sz="3600" dirty="0"/>
+          </a:p>
+          <a:p>
+            <a:pPr algn="l" indent="0" marL="0">
+              <a:spcAft>
+                <a:spcPts val="800"/>
+              </a:spcAft>
+              <a:buNone/>
+            </a:pPr>
+            <a:r>
+              <a:rPr lang="en-US" sz="3600" b="1" dirty="0">
+                <a:solidFill>
+                  <a:srgbClr val="111111"/>
+                </a:solidFill>
+                <a:latin typeface="Times New Roman" pitchFamily="34" charset="0"/>
+                <a:ea typeface="Times New Roman" pitchFamily="34" charset="-122"/>
+                <a:cs typeface="Times New Roman" pitchFamily="34" charset="-120"/>
+              </a:rPr>
+              <a:t>Population flows: </a:t>
+            </a:r>
+            <a:pPr algn="l" indent="0" marL="0">
+              <a:spcAft>
+                <a:spcPts val="800"/>
+              </a:spcAft>
+              <a:buNone/>
+            </a:pPr>
+            <a:r>
+              <a:rPr lang="en-US" sz="3600" dirty="0">
+                <a:solidFill>
+                  <a:srgbClr val="111111"/>
+                </a:solidFill>
+                <a:latin typeface="Times New Roman" pitchFamily="34" charset="0"/>
+                <a:ea typeface="Times New Roman" pitchFamily="34" charset="-122"/>
+                <a:cs typeface="Times New Roman" pitchFamily="34" charset="-120"/>
+              </a:rPr>
+              <a:t>People move between villages and towns for work, school, trade and family visits.</a:t>
+            </a:r>
+            <a:endParaRPr lang="en-US" sz="3600" dirty="0"/>
           </a:p>
         </p:txBody>
       </p:sp>
       <p:pic>
         <p:nvPicPr>
-          <p:cNvPr id="3" name="Image 0" descr="/home/claude/f4/img/minesec_sheet.png">    </p:cNvPr>
+          <p:cNvPr id="5" name="Image 0" descr="/home/claude/f4/img/v2/usa_busstation.jpg">    </p:cNvPr>
           <p:cNvPicPr>
             <a:picLocks noChangeAspect="1"/>
           </p:cNvPicPr>
@@ -15782,8 +17773,8 @@
         </p:blipFill>
         <p:spPr>
           <a:xfrm>
-            <a:off x="0" y="658368"/>
-            <a:ext cx="5120640" cy="5833872"/>
+            <a:off x="5349240" y="2071212"/>
+            <a:ext cx="6659575" cy="3693983"/>
           </a:xfrm>
           <a:prstGeom prst="rect">
             <a:avLst/>
@@ -15792,14 +17783,14 @@
       </p:pic>
       <p:sp>
         <p:nvSpPr>
-          <p:cNvPr id="4" name="Text 1"/>
+          <p:cNvPr id="6" name="Text 3"/>
           <p:cNvSpPr/>
           <p:nvPr/>
         </p:nvSpPr>
         <p:spPr>
           <a:xfrm>
-            <a:off x="5349240" y="1005840"/>
-            <a:ext cx="6522415" cy="731520"/>
+            <a:off x="5349240" y="6089904"/>
+            <a:ext cx="6659575" cy="347472"/>
           </a:xfrm>
           <a:prstGeom prst="rect">
             <a:avLst/>
@@ -15808,88 +17799,24 @@
           <a:ln/>
         </p:spPr>
         <p:txBody>
-          <a:bodyPr wrap="square" lIns="0" tIns="0" rIns="0" bIns="0" rtlCol="0" anchor="ctr">
-            <a:normAutofit/>
-          </a:bodyPr>
+          <a:bodyPr wrap="square" lIns="0" tIns="0" rIns="0" bIns="0" rtlCol="0" anchor="ctr"/>
           <a:lstStyle/>
           <a:p>
             <a:pPr algn="ctr" indent="0" marL="0">
               <a:buNone/>
             </a:pPr>
             <a:r>
-              <a:rPr lang="en-US" sz="3600" b="1" dirty="0">
-                <a:solidFill>
-                  <a:srgbClr val="990011"/>
+              <a:rPr lang="en-US" sz="1600" i="1" dirty="0">
+                <a:solidFill>
+                  <a:srgbClr val="555555"/>
                 </a:solidFill>
                 <a:latin typeface="Times New Roman" pitchFamily="34" charset="0"/>
                 <a:ea typeface="Times New Roman" pitchFamily="34" charset="-122"/>
                 <a:cs typeface="Times New Roman" pitchFamily="34" charset="-120"/>
               </a:rPr>
-              <a:t>Next Lesson</a:t>
-            </a:r>
-            <a:endParaRPr lang="en-US" sz="3600" dirty="0"/>
-          </a:p>
-        </p:txBody>
-      </p:sp>
-      <p:sp>
-        <p:nvSpPr>
-          <p:cNvPr id="5" name="Text 2"/>
-          <p:cNvSpPr/>
-          <p:nvPr/>
-        </p:nvSpPr>
-        <p:spPr>
-          <a:xfrm>
-            <a:off x="5349240" y="1783080"/>
-            <a:ext cx="6522415" cy="4663440"/>
-          </a:xfrm>
-          <a:prstGeom prst="rect">
-            <a:avLst/>
-          </a:prstGeom>
-          <a:noFill/>
-          <a:ln/>
-        </p:spPr>
-        <p:txBody>
-          <a:bodyPr wrap="square" lIns="0" tIns="0" rIns="0" bIns="0" rtlCol="0" anchor="ctr"/>
-          <a:lstStyle/>
-          <a:p>
-            <a:pPr algn="ctr" indent="0" marL="0">
-              <a:spcAft>
-                <a:spcPts val="800"/>
-              </a:spcAft>
-              <a:buNone/>
-            </a:pPr>
-            <a:r>
-              <a:rPr lang="en-US" sz="4000" b="1" dirty="0">
-                <a:solidFill>
-                  <a:srgbClr val="111111"/>
-                </a:solidFill>
-                <a:latin typeface="Times New Roman" pitchFamily="34" charset="0"/>
-                <a:ea typeface="Times New Roman" pitchFamily="34" charset="-122"/>
-                <a:cs typeface="Times New Roman" pitchFamily="34" charset="-120"/>
-              </a:rPr>
-              <a:t>Our next lesson will be on:</a:t>
-            </a:r>
-            <a:endParaRPr lang="en-US" sz="4000" dirty="0"/>
-          </a:p>
-          <a:p>
-            <a:pPr algn="ctr" indent="0" marL="0">
-              <a:spcAft>
-                <a:spcPts val="800"/>
-              </a:spcAft>
-              <a:buNone/>
-            </a:pPr>
-            <a:r>
-              <a:rPr lang="en-US" sz="4000" b="1" dirty="0">
-                <a:solidFill>
-                  <a:srgbClr val="990011"/>
-                </a:solidFill>
-                <a:latin typeface="Times New Roman" pitchFamily="34" charset="0"/>
-                <a:ea typeface="Times New Roman" pitchFamily="34" charset="-122"/>
-                <a:cs typeface="Times New Roman" pitchFamily="34" charset="-120"/>
-              </a:rPr>
-              <a:t>Further Study 7: Rural Exodus in Cameroon</a:t>
-            </a:r>
-            <a:endParaRPr lang="en-US" sz="4000" dirty="0"/>
+              <a:t>Illustration: a bus station</a:t>
+            </a:r>
+            <a:endParaRPr lang="en-US" sz="1600" dirty="0"/>
           </a:p>
         </p:txBody>
       </p:sp>
@@ -15999,22 +17926,46 @@
                 <a:ea typeface="Calibri" pitchFamily="34" charset="-122"/>
                 <a:cs typeface="Calibri" pitchFamily="34" charset="-120"/>
               </a:rPr>
-              <a:t>BILINGUAL GAME</a:t>
+              <a:t>BOARD SUMMARY</a:t>
             </a:r>
             <a:endParaRPr lang="en-US" sz="1400" dirty="0"/>
           </a:p>
         </p:txBody>
       </p:sp>
-      <p:sp>
-        <p:nvSpPr>
-          <p:cNvPr id="3" name="Text 1"/>
+      <p:pic>
+        <p:nvPicPr>
+          <p:cNvPr id="3" name="Image 0" descr="/home/claude/f4/img/minesec_sheet.png">    </p:cNvPr>
+          <p:cNvPicPr>
+            <a:picLocks noChangeAspect="1"/>
+          </p:cNvPicPr>
+          <p:nvPr/>
+        </p:nvPicPr>
+        <p:blipFill>
+          <a:blip r:embed="rId1"/>
+          <a:stretch>
+            <a:fillRect/>
+          </a:stretch>
+        </p:blipFill>
+        <p:spPr>
+          <a:xfrm>
+            <a:off x="0" y="658368"/>
+            <a:ext cx="5120640" cy="5833872"/>
+          </a:xfrm>
+          <a:prstGeom prst="rect">
+            <a:avLst/>
+          </a:prstGeom>
+        </p:spPr>
+      </p:pic>
+      <p:sp>
+        <p:nvSpPr>
+          <p:cNvPr id="4" name="Text 1"/>
           <p:cNvSpPr/>
           <p:nvPr/>
         </p:nvSpPr>
         <p:spPr>
           <a:xfrm>
-            <a:off x="457200" y="1005840"/>
-            <a:ext cx="11277295" cy="731520"/>
+            <a:off x="5349240" y="1005840"/>
+            <a:ext cx="6522415" cy="731520"/>
           </a:xfrm>
           <a:prstGeom prst="rect">
             <a:avLst/>
@@ -16023,7 +17974,9 @@
           <a:ln/>
         </p:spPr>
         <p:txBody>
-          <a:bodyPr wrap="square" lIns="0" tIns="0" rIns="0" bIns="0" rtlCol="0" anchor="ctr"/>
+          <a:bodyPr wrap="square" lIns="0" tIns="0" rIns="0" bIns="0" rtlCol="0" anchor="ctr">
+            <a:normAutofit/>
+          </a:bodyPr>
           <a:lstStyle/>
           <a:p>
             <a:pPr algn="ctr" indent="0" marL="0">
@@ -16038,6 +17991,3406 @@
                 <a:ea typeface="Times New Roman" pitchFamily="34" charset="-122"/>
                 <a:cs typeface="Times New Roman" pitchFamily="34" charset="-120"/>
               </a:rPr>
+              <a:t>2. Socio-cultural Relationships</a:t>
+            </a:r>
+            <a:endParaRPr lang="en-US" sz="3600" dirty="0"/>
+          </a:p>
+        </p:txBody>
+      </p:sp>
+      <p:sp>
+        <p:nvSpPr>
+          <p:cNvPr id="5" name="Text 2"/>
+          <p:cNvSpPr/>
+          <p:nvPr/>
+        </p:nvSpPr>
+        <p:spPr>
+          <a:xfrm>
+            <a:off x="5349240" y="1783080"/>
+            <a:ext cx="6522415" cy="4663440"/>
+          </a:xfrm>
+          <a:prstGeom prst="rect">
+            <a:avLst/>
+          </a:prstGeom>
+          <a:noFill/>
+          <a:ln/>
+        </p:spPr>
+        <p:txBody>
+          <a:bodyPr wrap="square" lIns="0" tIns="0" rIns="0" bIns="0" rtlCol="0" anchor="t"/>
+          <a:lstStyle/>
+          <a:p>
+            <a:pPr algn="l" indent="0" marL="0">
+              <a:spcAft>
+                <a:spcPts val="800"/>
+              </a:spcAft>
+              <a:buNone/>
+            </a:pPr>
+            <a:r>
+              <a:rPr lang="en-US" sz="4000" b="1" dirty="0">
+                <a:solidFill>
+                  <a:srgbClr val="111111"/>
+                </a:solidFill>
+                <a:latin typeface="Times New Roman" pitchFamily="34" charset="0"/>
+                <a:ea typeface="Times New Roman" pitchFamily="34" charset="-122"/>
+                <a:cs typeface="Times New Roman" pitchFamily="34" charset="-120"/>
+              </a:rPr>
+              <a:t>Festivals and ceremonies: </a:t>
+            </a:r>
+            <a:pPr algn="l" indent="0" marL="0">
+              <a:spcAft>
+                <a:spcPts val="800"/>
+              </a:spcAft>
+              <a:buNone/>
+            </a:pPr>
+            <a:r>
+              <a:rPr lang="en-US" sz="4000" dirty="0">
+                <a:solidFill>
+                  <a:srgbClr val="111111"/>
+                </a:solidFill>
+                <a:latin typeface="Times New Roman" pitchFamily="34" charset="0"/>
+                <a:ea typeface="Times New Roman" pitchFamily="34" charset="-122"/>
+                <a:cs typeface="Times New Roman" pitchFamily="34" charset="-120"/>
+              </a:rPr>
+              <a:t>Town dwellers return for festivals, weddings and funerals.</a:t>
+            </a:r>
+            <a:endParaRPr lang="en-US" sz="4000" dirty="0"/>
+          </a:p>
+        </p:txBody>
+      </p:sp>
+      <p:sp>
+        <p:nvSpPr>
+          <p:cNvPr id="25" name="Slide Number Placeholder 0"/>
+          <p:cNvSpPr>
+            <a:spLocks noGrp="1"/>
+          </p:cNvSpPr>
+          <p:nvPr>
+            <p:ph type="sldNum" sz="quarter" idx="4294967295"/>
+          </p:nvPr>
+        </p:nvSpPr>
+        <p:spPr>
+          <a:xfrm>
+            <a:off x="27432" y="91440"/>
+            <a:ext cx="585216" cy="475488"/>
+          </a:xfrm>
+          <a:prstGeom prst="rect">
+            <a:avLst/>
+          </a:prstGeom>
+          <a:extLst>
+            <a:ext uri="{C572A759-6A51-4108-AA02-DFA0A04FC94B}">
+              <ma14:wrappingTextBoxFlag xmlns:ma14="http://schemas.microsoft.com/office/mac/drawingml/2011/main" val="0"/>
+            </a:ext>
+          </a:extLst>
+        </p:spPr>
+        <p:txBody>
+          <a:bodyPr/>
+          <a:lstStyle>
+            <a:lvl1pPr>
+              <a:defRPr sz="2000">
+                <a:solidFill>
+                  <a:srgbClr val="FFFFFF"/>
+                </a:solidFill>
+                <a:latin typeface="Calibri"/>
+                <a:ea typeface="Calibri"/>
+                <a:cs typeface="Calibri"/>
+              </a:defRPr>
+            </a:lvl1pPr>
+          </a:lstStyle>
+          <a:p>
+            <a:pPr algn="ctr"/>
+            <a:fld id="{F7021451-1387-4CA6-816F-3879F97B5CBC}" type="slidenum">
+              <a:rPr b="1" lang="en-US"/>
+              <a:t>45</a:t>
+            </a:fld>
+            <a:endParaRPr lang="en-US"/>
+          </a:p>
+        </p:txBody>
+      </p:sp>
+    </p:spTree>
+  </p:cSld>
+  <p:clrMapOvr>
+    <a:masterClrMapping/>
+  </p:clrMapOvr>
+</p:sld>
+</file>
+
+<file path=ppt/slides/slide46.xml><?xml version="1.0" encoding="utf-8"?>
+<p:sld xmlns:a="http://schemas.openxmlformats.org/drawingml/2006/main" xmlns:r="http://schemas.openxmlformats.org/officeDocument/2006/relationships" xmlns:p="http://schemas.openxmlformats.org/presentationml/2006/main">
+  <p:cSld name="Slide 46">
+    <p:spTree>
+      <p:nvGrpSpPr>
+        <p:cNvPr id="1" name=""/>
+        <p:cNvGrpSpPr/>
+        <p:nvPr/>
+      </p:nvGrpSpPr>
+      <p:grpSpPr>
+        <a:xfrm>
+          <a:off x="0" y="0"/>
+          <a:ext cx="0" cy="0"/>
+          <a:chOff x="0" y="0"/>
+          <a:chExt cx="0" cy="0"/>
+        </a:xfrm>
+      </p:grpSpPr>
+      <p:sp>
+        <p:nvSpPr>
+          <p:cNvPr id="2" name="Text 0"/>
+          <p:cNvSpPr/>
+          <p:nvPr/>
+        </p:nvSpPr>
+        <p:spPr>
+          <a:xfrm>
+            <a:off x="457200" y="713232"/>
+            <a:ext cx="11368735" cy="274320"/>
+          </a:xfrm>
+          <a:prstGeom prst="rect">
+            <a:avLst/>
+          </a:prstGeom>
+          <a:noFill/>
+          <a:ln/>
+        </p:spPr>
+        <p:txBody>
+          <a:bodyPr wrap="square" lIns="0" tIns="0" rIns="0" bIns="0" rtlCol="0" anchor="ctr"/>
+          <a:lstStyle/>
+          <a:p>
+            <a:pPr algn="r" indent="0" marL="0">
+              <a:buNone/>
+            </a:pPr>
+            <a:r>
+              <a:rPr lang="en-US" sz="1400" b="1" dirty="0">
+                <a:solidFill>
+                  <a:srgbClr val="1C3F6E"/>
+                </a:solidFill>
+                <a:latin typeface="Calibri" pitchFamily="34" charset="0"/>
+                <a:ea typeface="Calibri" pitchFamily="34" charset="-122"/>
+                <a:cs typeface="Calibri" pitchFamily="34" charset="-120"/>
+              </a:rPr>
+              <a:t>BOARD SUMMARY</a:t>
+            </a:r>
+            <a:endParaRPr lang="en-US" sz="1400" dirty="0"/>
+          </a:p>
+        </p:txBody>
+      </p:sp>
+      <p:sp>
+        <p:nvSpPr>
+          <p:cNvPr id="3" name="Text 1"/>
+          <p:cNvSpPr/>
+          <p:nvPr/>
+        </p:nvSpPr>
+        <p:spPr>
+          <a:xfrm>
+            <a:off x="365760" y="1005840"/>
+            <a:ext cx="11460175" cy="731520"/>
+          </a:xfrm>
+          <a:prstGeom prst="rect">
+            <a:avLst/>
+          </a:prstGeom>
+          <a:noFill/>
+          <a:ln/>
+        </p:spPr>
+        <p:txBody>
+          <a:bodyPr wrap="square" lIns="0" tIns="0" rIns="0" bIns="0" rtlCol="0" anchor="ctr">
+            <a:normAutofit/>
+          </a:bodyPr>
+          <a:lstStyle/>
+          <a:p>
+            <a:pPr algn="ctr" indent="0" marL="0">
+              <a:buNone/>
+            </a:pPr>
+            <a:r>
+              <a:rPr lang="en-US" sz="3600" b="1" dirty="0">
+                <a:solidFill>
+                  <a:srgbClr val="990011"/>
+                </a:solidFill>
+                <a:latin typeface="Times New Roman" pitchFamily="34" charset="0"/>
+                <a:ea typeface="Times New Roman" pitchFamily="34" charset="-122"/>
+                <a:cs typeface="Times New Roman" pitchFamily="34" charset="-120"/>
+              </a:rPr>
+              <a:t>2. Socio-cultural Relationships</a:t>
+            </a:r>
+            <a:endParaRPr lang="en-US" sz="3600" dirty="0"/>
+          </a:p>
+        </p:txBody>
+      </p:sp>
+      <p:sp>
+        <p:nvSpPr>
+          <p:cNvPr id="4" name="Text 2"/>
+          <p:cNvSpPr/>
+          <p:nvPr/>
+        </p:nvSpPr>
+        <p:spPr>
+          <a:xfrm>
+            <a:off x="365760" y="1783080"/>
+            <a:ext cx="4846320" cy="4617720"/>
+          </a:xfrm>
+          <a:prstGeom prst="rect">
+            <a:avLst/>
+          </a:prstGeom>
+          <a:noFill/>
+          <a:ln/>
+        </p:spPr>
+        <p:txBody>
+          <a:bodyPr wrap="square" lIns="0" tIns="0" rIns="0" bIns="0" rtlCol="0" anchor="t"/>
+          <a:lstStyle/>
+          <a:p>
+            <a:pPr algn="l" indent="0" marL="0">
+              <a:spcAft>
+                <a:spcPts val="800"/>
+              </a:spcAft>
+              <a:buNone/>
+            </a:pPr>
+            <a:r>
+              <a:rPr lang="en-US" sz="3600" b="1" dirty="0">
+                <a:solidFill>
+                  <a:srgbClr val="111111"/>
+                </a:solidFill>
+                <a:latin typeface="Times New Roman" pitchFamily="34" charset="0"/>
+                <a:ea typeface="Times New Roman" pitchFamily="34" charset="-122"/>
+                <a:cs typeface="Times New Roman" pitchFamily="34" charset="-120"/>
+              </a:rPr>
+              <a:t>Development associations: </a:t>
+            </a:r>
+            <a:pPr algn="l" indent="0" marL="0">
+              <a:spcAft>
+                <a:spcPts val="800"/>
+              </a:spcAft>
+              <a:buNone/>
+            </a:pPr>
+            <a:r>
+              <a:rPr lang="en-US" sz="3600" dirty="0">
+                <a:solidFill>
+                  <a:srgbClr val="111111"/>
+                </a:solidFill>
+                <a:latin typeface="Times New Roman" pitchFamily="34" charset="0"/>
+                <a:ea typeface="Times New Roman" pitchFamily="34" charset="-122"/>
+                <a:cs typeface="Times New Roman" pitchFamily="34" charset="-120"/>
+              </a:rPr>
+              <a:t>Elites in town build schools, wells and health centres in their villages.</a:t>
+            </a:r>
+            <a:endParaRPr lang="en-US" sz="3600" dirty="0"/>
+          </a:p>
+        </p:txBody>
+      </p:sp>
+      <p:pic>
+        <p:nvPicPr>
+          <p:cNvPr id="5" name="Image 0" descr="/home/claude/f4/img/v2/usa_bandjoun.jpg">    </p:cNvPr>
+          <p:cNvPicPr>
+            <a:picLocks noChangeAspect="1"/>
+          </p:cNvPicPr>
+          <p:nvPr/>
+        </p:nvPicPr>
+        <p:blipFill>
+          <a:blip r:embed="rId1"/>
+          <a:stretch>
+            <a:fillRect/>
+          </a:stretch>
+        </p:blipFill>
+        <p:spPr>
+          <a:xfrm>
+            <a:off x="5349240" y="2071212"/>
+            <a:ext cx="6659575" cy="3693983"/>
+          </a:xfrm>
+          <a:prstGeom prst="rect">
+            <a:avLst/>
+          </a:prstGeom>
+        </p:spPr>
+      </p:pic>
+      <p:sp>
+        <p:nvSpPr>
+          <p:cNvPr id="6" name="Text 3"/>
+          <p:cNvSpPr/>
+          <p:nvPr/>
+        </p:nvSpPr>
+        <p:spPr>
+          <a:xfrm>
+            <a:off x="5349240" y="6089904"/>
+            <a:ext cx="6659575" cy="347472"/>
+          </a:xfrm>
+          <a:prstGeom prst="rect">
+            <a:avLst/>
+          </a:prstGeom>
+          <a:noFill/>
+          <a:ln/>
+        </p:spPr>
+        <p:txBody>
+          <a:bodyPr wrap="square" lIns="0" tIns="0" rIns="0" bIns="0" rtlCol="0" anchor="ctr"/>
+          <a:lstStyle/>
+          <a:p>
+            <a:pPr algn="ctr" indent="0" marL="0">
+              <a:buNone/>
+            </a:pPr>
+            <a:r>
+              <a:rPr lang="en-US" sz="1600" i="1" dirty="0">
+                <a:solidFill>
+                  <a:srgbClr val="555555"/>
+                </a:solidFill>
+                <a:latin typeface="Times New Roman" pitchFamily="34" charset="0"/>
+                <a:ea typeface="Times New Roman" pitchFamily="34" charset="-122"/>
+                <a:cs typeface="Times New Roman" pitchFamily="34" charset="-120"/>
+              </a:rPr>
+              <a:t>Illustration: a village chiefdom</a:t>
+            </a:r>
+            <a:endParaRPr lang="en-US" sz="1600" dirty="0"/>
+          </a:p>
+        </p:txBody>
+      </p:sp>
+      <p:sp>
+        <p:nvSpPr>
+          <p:cNvPr id="25" name="Slide Number Placeholder 0"/>
+          <p:cNvSpPr>
+            <a:spLocks noGrp="1"/>
+          </p:cNvSpPr>
+          <p:nvPr>
+            <p:ph type="sldNum" sz="quarter" idx="4294967295"/>
+          </p:nvPr>
+        </p:nvSpPr>
+        <p:spPr>
+          <a:xfrm>
+            <a:off x="27432" y="91440"/>
+            <a:ext cx="585216" cy="475488"/>
+          </a:xfrm>
+          <a:prstGeom prst="rect">
+            <a:avLst/>
+          </a:prstGeom>
+          <a:extLst>
+            <a:ext uri="{C572A759-6A51-4108-AA02-DFA0A04FC94B}">
+              <ma14:wrappingTextBoxFlag xmlns:ma14="http://schemas.microsoft.com/office/mac/drawingml/2011/main" val="0"/>
+            </a:ext>
+          </a:extLst>
+        </p:spPr>
+        <p:txBody>
+          <a:bodyPr/>
+          <a:lstStyle>
+            <a:lvl1pPr>
+              <a:defRPr sz="2000">
+                <a:solidFill>
+                  <a:srgbClr val="FFFFFF"/>
+                </a:solidFill>
+                <a:latin typeface="Calibri"/>
+                <a:ea typeface="Calibri"/>
+                <a:cs typeface="Calibri"/>
+              </a:defRPr>
+            </a:lvl1pPr>
+          </a:lstStyle>
+          <a:p>
+            <a:pPr algn="ctr"/>
+            <a:fld id="{F7021451-1387-4CA6-816F-3879F97B5CBC}" type="slidenum">
+              <a:rPr b="1" lang="en-US"/>
+              <a:t>46</a:t>
+            </a:fld>
+            <a:endParaRPr lang="en-US"/>
+          </a:p>
+        </p:txBody>
+      </p:sp>
+    </p:spTree>
+  </p:cSld>
+  <p:clrMapOvr>
+    <a:masterClrMapping/>
+  </p:clrMapOvr>
+</p:sld>
+</file>
+
+<file path=ppt/slides/slide47.xml><?xml version="1.0" encoding="utf-8"?>
+<p:sld xmlns:a="http://schemas.openxmlformats.org/drawingml/2006/main" xmlns:r="http://schemas.openxmlformats.org/officeDocument/2006/relationships" xmlns:p="http://schemas.openxmlformats.org/presentationml/2006/main">
+  <p:cSld name="Slide 47">
+    <p:spTree>
+      <p:nvGrpSpPr>
+        <p:cNvPr id="1" name=""/>
+        <p:cNvGrpSpPr/>
+        <p:nvPr/>
+      </p:nvGrpSpPr>
+      <p:grpSpPr>
+        <a:xfrm>
+          <a:off x="0" y="0"/>
+          <a:ext cx="0" cy="0"/>
+          <a:chOff x="0" y="0"/>
+          <a:chExt cx="0" cy="0"/>
+        </a:xfrm>
+      </p:grpSpPr>
+      <p:sp>
+        <p:nvSpPr>
+          <p:cNvPr id="2" name="Text 0"/>
+          <p:cNvSpPr/>
+          <p:nvPr/>
+        </p:nvSpPr>
+        <p:spPr>
+          <a:xfrm>
+            <a:off x="457200" y="713232"/>
+            <a:ext cx="11368735" cy="274320"/>
+          </a:xfrm>
+          <a:prstGeom prst="rect">
+            <a:avLst/>
+          </a:prstGeom>
+          <a:noFill/>
+          <a:ln/>
+        </p:spPr>
+        <p:txBody>
+          <a:bodyPr wrap="square" lIns="0" tIns="0" rIns="0" bIns="0" rtlCol="0" anchor="ctr"/>
+          <a:lstStyle/>
+          <a:p>
+            <a:pPr algn="r" indent="0" marL="0">
+              <a:buNone/>
+            </a:pPr>
+            <a:r>
+              <a:rPr lang="en-US" sz="1400" b="1" dirty="0">
+                <a:solidFill>
+                  <a:srgbClr val="1C3F6E"/>
+                </a:solidFill>
+                <a:latin typeface="Calibri" pitchFamily="34" charset="0"/>
+                <a:ea typeface="Calibri" pitchFamily="34" charset="-122"/>
+                <a:cs typeface="Calibri" pitchFamily="34" charset="-120"/>
+              </a:rPr>
+              <a:t>BOARD SUMMARY</a:t>
+            </a:r>
+            <a:endParaRPr lang="en-US" sz="1400" dirty="0"/>
+          </a:p>
+        </p:txBody>
+      </p:sp>
+      <p:pic>
+        <p:nvPicPr>
+          <p:cNvPr id="3" name="Image 0" descr="/home/claude/f4/img/minesec_sheet.png">    </p:cNvPr>
+          <p:cNvPicPr>
+            <a:picLocks noChangeAspect="1"/>
+          </p:cNvPicPr>
+          <p:nvPr/>
+        </p:nvPicPr>
+        <p:blipFill>
+          <a:blip r:embed="rId1"/>
+          <a:stretch>
+            <a:fillRect/>
+          </a:stretch>
+        </p:blipFill>
+        <p:spPr>
+          <a:xfrm>
+            <a:off x="0" y="658368"/>
+            <a:ext cx="3840480" cy="5833872"/>
+          </a:xfrm>
+          <a:prstGeom prst="rect">
+            <a:avLst/>
+          </a:prstGeom>
+        </p:spPr>
+      </p:pic>
+      <p:sp>
+        <p:nvSpPr>
+          <p:cNvPr id="4" name="Text 1"/>
+          <p:cNvSpPr/>
+          <p:nvPr/>
+        </p:nvSpPr>
+        <p:spPr>
+          <a:xfrm>
+            <a:off x="4069080" y="1005840"/>
+            <a:ext cx="7802575" cy="731520"/>
+          </a:xfrm>
+          <a:prstGeom prst="rect">
+            <a:avLst/>
+          </a:prstGeom>
+          <a:noFill/>
+          <a:ln/>
+        </p:spPr>
+        <p:txBody>
+          <a:bodyPr wrap="square" lIns="0" tIns="0" rIns="0" bIns="0" rtlCol="0" anchor="ctr">
+            <a:normAutofit/>
+          </a:bodyPr>
+          <a:lstStyle/>
+          <a:p>
+            <a:pPr algn="ctr" indent="0" marL="0">
+              <a:buNone/>
+            </a:pPr>
+            <a:r>
+              <a:rPr lang="en-US" sz="3600" b="1" dirty="0">
+                <a:solidFill>
+                  <a:srgbClr val="990011"/>
+                </a:solidFill>
+                <a:latin typeface="Times New Roman" pitchFamily="34" charset="0"/>
+                <a:ea typeface="Times New Roman" pitchFamily="34" charset="-122"/>
+                <a:cs typeface="Times New Roman" pitchFamily="34" charset="-120"/>
+              </a:rPr>
+              <a:t>2. Socio-cultural Relationships</a:t>
+            </a:r>
+            <a:endParaRPr lang="en-US" sz="3600" dirty="0"/>
+          </a:p>
+        </p:txBody>
+      </p:sp>
+      <p:sp>
+        <p:nvSpPr>
+          <p:cNvPr id="5" name="Text 2"/>
+          <p:cNvSpPr/>
+          <p:nvPr/>
+        </p:nvSpPr>
+        <p:spPr>
+          <a:xfrm>
+            <a:off x="4069080" y="1783080"/>
+            <a:ext cx="7802575" cy="4663440"/>
+          </a:xfrm>
+          <a:prstGeom prst="rect">
+            <a:avLst/>
+          </a:prstGeom>
+          <a:noFill/>
+          <a:ln/>
+        </p:spPr>
+        <p:txBody>
+          <a:bodyPr wrap="square" lIns="0" tIns="0" rIns="0" bIns="0" rtlCol="0" anchor="t"/>
+          <a:lstStyle/>
+          <a:p>
+            <a:pPr algn="l" indent="0" marL="0">
+              <a:spcAft>
+                <a:spcPts val="800"/>
+              </a:spcAft>
+              <a:buNone/>
+            </a:pPr>
+            <a:r>
+              <a:rPr lang="en-US" sz="4000" b="1" dirty="0">
+                <a:solidFill>
+                  <a:srgbClr val="111111"/>
+                </a:solidFill>
+                <a:latin typeface="Times New Roman" pitchFamily="34" charset="0"/>
+                <a:ea typeface="Times New Roman" pitchFamily="34" charset="-122"/>
+                <a:cs typeface="Times New Roman" pitchFamily="34" charset="-120"/>
+              </a:rPr>
+              <a:t>Education and health: </a:t>
+            </a:r>
+            <a:pPr algn="l" indent="0" marL="0">
+              <a:spcAft>
+                <a:spcPts val="800"/>
+              </a:spcAft>
+              <a:buNone/>
+            </a:pPr>
+            <a:r>
+              <a:rPr lang="en-US" sz="4000" dirty="0">
+                <a:solidFill>
+                  <a:srgbClr val="111111"/>
+                </a:solidFill>
+                <a:latin typeface="Times New Roman" pitchFamily="34" charset="0"/>
+                <a:ea typeface="Times New Roman" pitchFamily="34" charset="-122"/>
+                <a:cs typeface="Times New Roman" pitchFamily="34" charset="-120"/>
+              </a:rPr>
+              <a:t>Village children study in town schools, and villagers go to town hospitals.</a:t>
+            </a:r>
+            <a:endParaRPr lang="en-US" sz="4000" dirty="0"/>
+          </a:p>
+          <a:p>
+            <a:pPr algn="l" indent="0" marL="0">
+              <a:spcAft>
+                <a:spcPts val="800"/>
+              </a:spcAft>
+              <a:buNone/>
+            </a:pPr>
+            <a:r>
+              <a:rPr lang="en-US" sz="4000" b="1" dirty="0">
+                <a:solidFill>
+                  <a:srgbClr val="111111"/>
+                </a:solidFill>
+                <a:latin typeface="Times New Roman" pitchFamily="34" charset="0"/>
+                <a:ea typeface="Times New Roman" pitchFamily="34" charset="-122"/>
+                <a:cs typeface="Times New Roman" pitchFamily="34" charset="-120"/>
+              </a:rPr>
+              <a:t>Spread of town ways of life: </a:t>
+            </a:r>
+            <a:pPr algn="l" indent="0" marL="0">
+              <a:spcAft>
+                <a:spcPts val="800"/>
+              </a:spcAft>
+              <a:buNone/>
+            </a:pPr>
+            <a:r>
+              <a:rPr lang="en-US" sz="4000" dirty="0">
+                <a:solidFill>
+                  <a:srgbClr val="111111"/>
+                </a:solidFill>
+                <a:latin typeface="Times New Roman" pitchFamily="34" charset="0"/>
+                <a:ea typeface="Times New Roman" pitchFamily="34" charset="-122"/>
+                <a:cs typeface="Times New Roman" pitchFamily="34" charset="-120"/>
+              </a:rPr>
+              <a:t>Fashion, music and new ideas spread from towns to villages.</a:t>
+            </a:r>
+            <a:endParaRPr lang="en-US" sz="4000" dirty="0"/>
+          </a:p>
+        </p:txBody>
+      </p:sp>
+      <p:sp>
+        <p:nvSpPr>
+          <p:cNvPr id="25" name="Slide Number Placeholder 0"/>
+          <p:cNvSpPr>
+            <a:spLocks noGrp="1"/>
+          </p:cNvSpPr>
+          <p:nvPr>
+            <p:ph type="sldNum" sz="quarter" idx="4294967295"/>
+          </p:nvPr>
+        </p:nvSpPr>
+        <p:spPr>
+          <a:xfrm>
+            <a:off x="27432" y="91440"/>
+            <a:ext cx="585216" cy="475488"/>
+          </a:xfrm>
+          <a:prstGeom prst="rect">
+            <a:avLst/>
+          </a:prstGeom>
+          <a:extLst>
+            <a:ext uri="{C572A759-6A51-4108-AA02-DFA0A04FC94B}">
+              <ma14:wrappingTextBoxFlag xmlns:ma14="http://schemas.microsoft.com/office/mac/drawingml/2011/main" val="0"/>
+            </a:ext>
+          </a:extLst>
+        </p:spPr>
+        <p:txBody>
+          <a:bodyPr/>
+          <a:lstStyle>
+            <a:lvl1pPr>
+              <a:defRPr sz="2000">
+                <a:solidFill>
+                  <a:srgbClr val="FFFFFF"/>
+                </a:solidFill>
+                <a:latin typeface="Calibri"/>
+                <a:ea typeface="Calibri"/>
+                <a:cs typeface="Calibri"/>
+              </a:defRPr>
+            </a:lvl1pPr>
+          </a:lstStyle>
+          <a:p>
+            <a:pPr algn="ctr"/>
+            <a:fld id="{F7021451-1387-4CA6-816F-3879F97B5CBC}" type="slidenum">
+              <a:rPr b="1" lang="en-US"/>
+              <a:t>47</a:t>
+            </a:fld>
+            <a:endParaRPr lang="en-US"/>
+          </a:p>
+        </p:txBody>
+      </p:sp>
+    </p:spTree>
+  </p:cSld>
+  <p:clrMapOvr>
+    <a:masterClrMapping/>
+  </p:clrMapOvr>
+</p:sld>
+</file>
+
+<file path=ppt/slides/slide48.xml><?xml version="1.0" encoding="utf-8"?>
+<p:sld xmlns:a="http://schemas.openxmlformats.org/drawingml/2006/main" xmlns:r="http://schemas.openxmlformats.org/officeDocument/2006/relationships" xmlns:p="http://schemas.openxmlformats.org/presentationml/2006/main">
+  <p:cSld name="Slide 48">
+    <p:spTree>
+      <p:nvGrpSpPr>
+        <p:cNvPr id="1" name=""/>
+        <p:cNvGrpSpPr/>
+        <p:nvPr/>
+      </p:nvGrpSpPr>
+      <p:grpSpPr>
+        <a:xfrm>
+          <a:off x="0" y="0"/>
+          <a:ext cx="0" cy="0"/>
+          <a:chOff x="0" y="0"/>
+          <a:chExt cx="0" cy="0"/>
+        </a:xfrm>
+      </p:grpSpPr>
+      <p:sp>
+        <p:nvSpPr>
+          <p:cNvPr id="2" name="Text 0"/>
+          <p:cNvSpPr/>
+          <p:nvPr/>
+        </p:nvSpPr>
+        <p:spPr>
+          <a:xfrm>
+            <a:off x="457200" y="713232"/>
+            <a:ext cx="11368735" cy="274320"/>
+          </a:xfrm>
+          <a:prstGeom prst="rect">
+            <a:avLst/>
+          </a:prstGeom>
+          <a:noFill/>
+          <a:ln/>
+        </p:spPr>
+        <p:txBody>
+          <a:bodyPr wrap="square" lIns="0" tIns="0" rIns="0" bIns="0" rtlCol="0" anchor="ctr"/>
+          <a:lstStyle/>
+          <a:p>
+            <a:pPr algn="r" indent="0" marL="0">
+              <a:buNone/>
+            </a:pPr>
+            <a:r>
+              <a:rPr lang="en-US" sz="1400" b="1" dirty="0">
+                <a:solidFill>
+                  <a:srgbClr val="1C3F6E"/>
+                </a:solidFill>
+                <a:latin typeface="Calibri" pitchFamily="34" charset="0"/>
+                <a:ea typeface="Calibri" pitchFamily="34" charset="-122"/>
+                <a:cs typeface="Calibri" pitchFamily="34" charset="-120"/>
+              </a:rPr>
+              <a:t>BOARD SUMMARY</a:t>
+            </a:r>
+            <a:endParaRPr lang="en-US" sz="1400" dirty="0"/>
+          </a:p>
+        </p:txBody>
+      </p:sp>
+      <p:pic>
+        <p:nvPicPr>
+          <p:cNvPr id="3" name="Image 0" descr="/home/claude/f4/img/minesec_sheet.png">    </p:cNvPr>
+          <p:cNvPicPr>
+            <a:picLocks noChangeAspect="1"/>
+          </p:cNvPicPr>
+          <p:nvPr/>
+        </p:nvPicPr>
+        <p:blipFill>
+          <a:blip r:embed="rId1"/>
+          <a:stretch>
+            <a:fillRect/>
+          </a:stretch>
+        </p:blipFill>
+        <p:spPr>
+          <a:xfrm>
+            <a:off x="0" y="658368"/>
+            <a:ext cx="5120640" cy="5833872"/>
+          </a:xfrm>
+          <a:prstGeom prst="rect">
+            <a:avLst/>
+          </a:prstGeom>
+        </p:spPr>
+      </p:pic>
+      <p:sp>
+        <p:nvSpPr>
+          <p:cNvPr id="4" name="Text 1"/>
+          <p:cNvSpPr/>
+          <p:nvPr/>
+        </p:nvSpPr>
+        <p:spPr>
+          <a:xfrm>
+            <a:off x="5349240" y="1005840"/>
+            <a:ext cx="6522415" cy="731520"/>
+          </a:xfrm>
+          <a:prstGeom prst="rect">
+            <a:avLst/>
+          </a:prstGeom>
+          <a:noFill/>
+          <a:ln/>
+        </p:spPr>
+        <p:txBody>
+          <a:bodyPr wrap="square" lIns="0" tIns="0" rIns="0" bIns="0" rtlCol="0" anchor="ctr">
+            <a:normAutofit/>
+          </a:bodyPr>
+          <a:lstStyle/>
+          <a:p>
+            <a:pPr algn="ctr" indent="0" marL="0">
+              <a:buNone/>
+            </a:pPr>
+            <a:r>
+              <a:rPr lang="en-US" sz="3600" b="1" dirty="0">
+                <a:solidFill>
+                  <a:srgbClr val="990011"/>
+                </a:solidFill>
+                <a:latin typeface="Times New Roman" pitchFamily="34" charset="0"/>
+                <a:ea typeface="Times New Roman" pitchFamily="34" charset="-122"/>
+                <a:cs typeface="Times New Roman" pitchFamily="34" charset="-120"/>
+              </a:rPr>
+              <a:t>3. Information</a:t>
+            </a:r>
+            <a:endParaRPr lang="en-US" sz="3600" dirty="0"/>
+          </a:p>
+        </p:txBody>
+      </p:sp>
+      <p:sp>
+        <p:nvSpPr>
+          <p:cNvPr id="5" name="Text 2"/>
+          <p:cNvSpPr/>
+          <p:nvPr/>
+        </p:nvSpPr>
+        <p:spPr>
+          <a:xfrm>
+            <a:off x="5349240" y="1783080"/>
+            <a:ext cx="6522415" cy="4663440"/>
+          </a:xfrm>
+          <a:prstGeom prst="rect">
+            <a:avLst/>
+          </a:prstGeom>
+          <a:noFill/>
+          <a:ln/>
+        </p:spPr>
+        <p:txBody>
+          <a:bodyPr wrap="square" lIns="0" tIns="0" rIns="0" bIns="0" rtlCol="0" anchor="t"/>
+          <a:lstStyle/>
+          <a:p>
+            <a:pPr algn="l" indent="0" marL="0">
+              <a:spcAft>
+                <a:spcPts val="800"/>
+              </a:spcAft>
+              <a:buNone/>
+            </a:pPr>
+            <a:r>
+              <a:rPr lang="en-US" sz="4000" i="1" dirty="0">
+                <a:solidFill>
+                  <a:srgbClr val="111111"/>
+                </a:solidFill>
+                <a:latin typeface="Times New Roman" pitchFamily="34" charset="0"/>
+                <a:ea typeface="Times New Roman" pitchFamily="34" charset="-122"/>
+                <a:cs typeface="Times New Roman" pitchFamily="34" charset="-120"/>
+              </a:rPr>
+              <a:t>Information flows between towns and country sides as follows:</a:t>
+            </a:r>
+            <a:endParaRPr lang="en-US" sz="4000" dirty="0"/>
+          </a:p>
+          <a:p>
+            <a:pPr algn="l" indent="0" marL="0">
+              <a:spcAft>
+                <a:spcPts val="800"/>
+              </a:spcAft>
+              <a:buNone/>
+            </a:pPr>
+            <a:r>
+              <a:rPr lang="en-US" sz="4000" b="1" dirty="0">
+                <a:solidFill>
+                  <a:srgbClr val="111111"/>
+                </a:solidFill>
+                <a:latin typeface="Times New Roman" pitchFamily="34" charset="0"/>
+                <a:ea typeface="Times New Roman" pitchFamily="34" charset="-122"/>
+                <a:cs typeface="Times New Roman" pitchFamily="34" charset="-120"/>
+              </a:rPr>
+              <a:t>Radio and television: </a:t>
+            </a:r>
+            <a:pPr algn="l" indent="0" marL="0">
+              <a:spcAft>
+                <a:spcPts val="800"/>
+              </a:spcAft>
+              <a:buNone/>
+            </a:pPr>
+            <a:r>
+              <a:rPr lang="en-US" sz="4000" dirty="0">
+                <a:solidFill>
+                  <a:srgbClr val="111111"/>
+                </a:solidFill>
+                <a:latin typeface="Times New Roman" pitchFamily="34" charset="0"/>
+                <a:ea typeface="Times New Roman" pitchFamily="34" charset="-122"/>
+                <a:cs typeface="Times New Roman" pitchFamily="34" charset="-120"/>
+              </a:rPr>
+              <a:t>Radio brings news, market prices and advice to farmers.</a:t>
+            </a:r>
+            <a:endParaRPr lang="en-US" sz="4000" dirty="0"/>
+          </a:p>
+        </p:txBody>
+      </p:sp>
+      <p:sp>
+        <p:nvSpPr>
+          <p:cNvPr id="25" name="Slide Number Placeholder 0"/>
+          <p:cNvSpPr>
+            <a:spLocks noGrp="1"/>
+          </p:cNvSpPr>
+          <p:nvPr>
+            <p:ph type="sldNum" sz="quarter" idx="4294967295"/>
+          </p:nvPr>
+        </p:nvSpPr>
+        <p:spPr>
+          <a:xfrm>
+            <a:off x="27432" y="91440"/>
+            <a:ext cx="585216" cy="475488"/>
+          </a:xfrm>
+          <a:prstGeom prst="rect">
+            <a:avLst/>
+          </a:prstGeom>
+          <a:extLst>
+            <a:ext uri="{C572A759-6A51-4108-AA02-DFA0A04FC94B}">
+              <ma14:wrappingTextBoxFlag xmlns:ma14="http://schemas.microsoft.com/office/mac/drawingml/2011/main" val="0"/>
+            </a:ext>
+          </a:extLst>
+        </p:spPr>
+        <p:txBody>
+          <a:bodyPr/>
+          <a:lstStyle>
+            <a:lvl1pPr>
+              <a:defRPr sz="2000">
+                <a:solidFill>
+                  <a:srgbClr val="FFFFFF"/>
+                </a:solidFill>
+                <a:latin typeface="Calibri"/>
+                <a:ea typeface="Calibri"/>
+                <a:cs typeface="Calibri"/>
+              </a:defRPr>
+            </a:lvl1pPr>
+          </a:lstStyle>
+          <a:p>
+            <a:pPr algn="ctr"/>
+            <a:fld id="{F7021451-1387-4CA6-816F-3879F97B5CBC}" type="slidenum">
+              <a:rPr b="1" lang="en-US"/>
+              <a:t>48</a:t>
+            </a:fld>
+            <a:endParaRPr lang="en-US"/>
+          </a:p>
+        </p:txBody>
+      </p:sp>
+    </p:spTree>
+  </p:cSld>
+  <p:clrMapOvr>
+    <a:masterClrMapping/>
+  </p:clrMapOvr>
+</p:sld>
+</file>
+
+<file path=ppt/slides/slide49.xml><?xml version="1.0" encoding="utf-8"?>
+<p:sld xmlns:a="http://schemas.openxmlformats.org/drawingml/2006/main" xmlns:r="http://schemas.openxmlformats.org/officeDocument/2006/relationships" xmlns:p="http://schemas.openxmlformats.org/presentationml/2006/main">
+  <p:cSld name="Slide 49">
+    <p:spTree>
+      <p:nvGrpSpPr>
+        <p:cNvPr id="1" name=""/>
+        <p:cNvGrpSpPr/>
+        <p:nvPr/>
+      </p:nvGrpSpPr>
+      <p:grpSpPr>
+        <a:xfrm>
+          <a:off x="0" y="0"/>
+          <a:ext cx="0" cy="0"/>
+          <a:chOff x="0" y="0"/>
+          <a:chExt cx="0" cy="0"/>
+        </a:xfrm>
+      </p:grpSpPr>
+      <p:sp>
+        <p:nvSpPr>
+          <p:cNvPr id="2" name="Text 0"/>
+          <p:cNvSpPr/>
+          <p:nvPr/>
+        </p:nvSpPr>
+        <p:spPr>
+          <a:xfrm>
+            <a:off x="457200" y="713232"/>
+            <a:ext cx="11368735" cy="274320"/>
+          </a:xfrm>
+          <a:prstGeom prst="rect">
+            <a:avLst/>
+          </a:prstGeom>
+          <a:noFill/>
+          <a:ln/>
+        </p:spPr>
+        <p:txBody>
+          <a:bodyPr wrap="square" lIns="0" tIns="0" rIns="0" bIns="0" rtlCol="0" anchor="ctr"/>
+          <a:lstStyle/>
+          <a:p>
+            <a:pPr algn="r" indent="0" marL="0">
+              <a:buNone/>
+            </a:pPr>
+            <a:r>
+              <a:rPr lang="en-US" sz="1400" b="1" dirty="0">
+                <a:solidFill>
+                  <a:srgbClr val="1C3F6E"/>
+                </a:solidFill>
+                <a:latin typeface="Calibri" pitchFamily="34" charset="0"/>
+                <a:ea typeface="Calibri" pitchFamily="34" charset="-122"/>
+                <a:cs typeface="Calibri" pitchFamily="34" charset="-120"/>
+              </a:rPr>
+              <a:t>BOARD SUMMARY</a:t>
+            </a:r>
+            <a:endParaRPr lang="en-US" sz="1400" dirty="0"/>
+          </a:p>
+        </p:txBody>
+      </p:sp>
+      <p:sp>
+        <p:nvSpPr>
+          <p:cNvPr id="3" name="Text 1"/>
+          <p:cNvSpPr/>
+          <p:nvPr/>
+        </p:nvSpPr>
+        <p:spPr>
+          <a:xfrm>
+            <a:off x="365760" y="1005840"/>
+            <a:ext cx="11460175" cy="731520"/>
+          </a:xfrm>
+          <a:prstGeom prst="rect">
+            <a:avLst/>
+          </a:prstGeom>
+          <a:noFill/>
+          <a:ln/>
+        </p:spPr>
+        <p:txBody>
+          <a:bodyPr wrap="square" lIns="0" tIns="0" rIns="0" bIns="0" rtlCol="0" anchor="ctr">
+            <a:normAutofit/>
+          </a:bodyPr>
+          <a:lstStyle/>
+          <a:p>
+            <a:pPr algn="ctr" indent="0" marL="0">
+              <a:buNone/>
+            </a:pPr>
+            <a:r>
+              <a:rPr lang="en-US" sz="3600" b="1" dirty="0">
+                <a:solidFill>
+                  <a:srgbClr val="990011"/>
+                </a:solidFill>
+                <a:latin typeface="Times New Roman" pitchFamily="34" charset="0"/>
+                <a:ea typeface="Times New Roman" pitchFamily="34" charset="-122"/>
+                <a:cs typeface="Times New Roman" pitchFamily="34" charset="-120"/>
+              </a:rPr>
+              <a:t>3. Information</a:t>
+            </a:r>
+            <a:endParaRPr lang="en-US" sz="3600" dirty="0"/>
+          </a:p>
+        </p:txBody>
+      </p:sp>
+      <p:sp>
+        <p:nvSpPr>
+          <p:cNvPr id="4" name="Text 2"/>
+          <p:cNvSpPr/>
+          <p:nvPr/>
+        </p:nvSpPr>
+        <p:spPr>
+          <a:xfrm>
+            <a:off x="365760" y="1783080"/>
+            <a:ext cx="4846320" cy="4617720"/>
+          </a:xfrm>
+          <a:prstGeom prst="rect">
+            <a:avLst/>
+          </a:prstGeom>
+          <a:noFill/>
+          <a:ln/>
+        </p:spPr>
+        <p:txBody>
+          <a:bodyPr wrap="square" lIns="0" tIns="0" rIns="0" bIns="0" rtlCol="0" anchor="t"/>
+          <a:lstStyle/>
+          <a:p>
+            <a:pPr algn="l" indent="0" marL="0">
+              <a:spcAft>
+                <a:spcPts val="800"/>
+              </a:spcAft>
+              <a:buNone/>
+            </a:pPr>
+            <a:r>
+              <a:rPr lang="en-US" sz="3600" b="1" dirty="0">
+                <a:solidFill>
+                  <a:srgbClr val="111111"/>
+                </a:solidFill>
+                <a:latin typeface="Times New Roman" pitchFamily="34" charset="0"/>
+                <a:ea typeface="Times New Roman" pitchFamily="34" charset="-122"/>
+                <a:cs typeface="Times New Roman" pitchFamily="34" charset="-120"/>
+              </a:rPr>
+              <a:t>Telephone and internet: </a:t>
+            </a:r>
+            <a:pPr algn="l" indent="0" marL="0">
+              <a:spcAft>
+                <a:spcPts val="800"/>
+              </a:spcAft>
+              <a:buNone/>
+            </a:pPr>
+            <a:r>
+              <a:rPr lang="en-US" sz="3600" dirty="0">
+                <a:solidFill>
+                  <a:srgbClr val="111111"/>
+                </a:solidFill>
+                <a:latin typeface="Times New Roman" pitchFamily="34" charset="0"/>
+                <a:ea typeface="Times New Roman" pitchFamily="34" charset="-122"/>
+                <a:cs typeface="Times New Roman" pitchFamily="34" charset="-120"/>
+              </a:rPr>
+              <a:t>Phones link families and give farmers the prices of crops in town.</a:t>
+            </a:r>
+            <a:endParaRPr lang="en-US" sz="3600" dirty="0"/>
+          </a:p>
+        </p:txBody>
+      </p:sp>
+      <p:pic>
+        <p:nvPicPr>
+          <p:cNvPr id="5" name="Image 0" descr="/home/claude/f4/img/v2/f2t_phone_farmer.jpg">    </p:cNvPr>
+          <p:cNvPicPr>
+            <a:picLocks noChangeAspect="1"/>
+          </p:cNvPicPr>
+          <p:nvPr/>
+        </p:nvPicPr>
+        <p:blipFill>
+          <a:blip r:embed="rId1"/>
+          <a:stretch>
+            <a:fillRect/>
+          </a:stretch>
+        </p:blipFill>
+        <p:spPr>
+          <a:xfrm>
+            <a:off x="5349240" y="2069407"/>
+            <a:ext cx="6659575" cy="3697594"/>
+          </a:xfrm>
+          <a:prstGeom prst="rect">
+            <a:avLst/>
+          </a:prstGeom>
+        </p:spPr>
+      </p:pic>
+      <p:sp>
+        <p:nvSpPr>
+          <p:cNvPr id="6" name="Text 3"/>
+          <p:cNvSpPr/>
+          <p:nvPr/>
+        </p:nvSpPr>
+        <p:spPr>
+          <a:xfrm>
+            <a:off x="5349240" y="6089904"/>
+            <a:ext cx="6659575" cy="347472"/>
+          </a:xfrm>
+          <a:prstGeom prst="rect">
+            <a:avLst/>
+          </a:prstGeom>
+          <a:noFill/>
+          <a:ln/>
+        </p:spPr>
+        <p:txBody>
+          <a:bodyPr wrap="square" lIns="0" tIns="0" rIns="0" bIns="0" rtlCol="0" anchor="ctr"/>
+          <a:lstStyle/>
+          <a:p>
+            <a:pPr algn="ctr" indent="0" marL="0">
+              <a:buNone/>
+            </a:pPr>
+            <a:r>
+              <a:rPr lang="en-US" sz="1600" i="1" dirty="0">
+                <a:solidFill>
+                  <a:srgbClr val="555555"/>
+                </a:solidFill>
+                <a:latin typeface="Times New Roman" pitchFamily="34" charset="0"/>
+                <a:ea typeface="Times New Roman" pitchFamily="34" charset="-122"/>
+                <a:cs typeface="Times New Roman" pitchFamily="34" charset="-120"/>
+              </a:rPr>
+              <a:t>Illustration: a farmer using a phone</a:t>
+            </a:r>
+            <a:endParaRPr lang="en-US" sz="1600" dirty="0"/>
+          </a:p>
+        </p:txBody>
+      </p:sp>
+      <p:sp>
+        <p:nvSpPr>
+          <p:cNvPr id="25" name="Slide Number Placeholder 0"/>
+          <p:cNvSpPr>
+            <a:spLocks noGrp="1"/>
+          </p:cNvSpPr>
+          <p:nvPr>
+            <p:ph type="sldNum" sz="quarter" idx="4294967295"/>
+          </p:nvPr>
+        </p:nvSpPr>
+        <p:spPr>
+          <a:xfrm>
+            <a:off x="27432" y="91440"/>
+            <a:ext cx="585216" cy="475488"/>
+          </a:xfrm>
+          <a:prstGeom prst="rect">
+            <a:avLst/>
+          </a:prstGeom>
+          <a:extLst>
+            <a:ext uri="{C572A759-6A51-4108-AA02-DFA0A04FC94B}">
+              <ma14:wrappingTextBoxFlag xmlns:ma14="http://schemas.microsoft.com/office/mac/drawingml/2011/main" val="0"/>
+            </a:ext>
+          </a:extLst>
+        </p:spPr>
+        <p:txBody>
+          <a:bodyPr/>
+          <a:lstStyle>
+            <a:lvl1pPr>
+              <a:defRPr sz="2000">
+                <a:solidFill>
+                  <a:srgbClr val="FFFFFF"/>
+                </a:solidFill>
+                <a:latin typeface="Calibri"/>
+                <a:ea typeface="Calibri"/>
+                <a:cs typeface="Calibri"/>
+              </a:defRPr>
+            </a:lvl1pPr>
+          </a:lstStyle>
+          <a:p>
+            <a:pPr algn="ctr"/>
+            <a:fld id="{F7021451-1387-4CA6-816F-3879F97B5CBC}" type="slidenum">
+              <a:rPr b="1" lang="en-US"/>
+              <a:t>49</a:t>
+            </a:fld>
+            <a:endParaRPr lang="en-US"/>
+          </a:p>
+        </p:txBody>
+      </p:sp>
+    </p:spTree>
+  </p:cSld>
+  <p:clrMapOvr>
+    <a:masterClrMapping/>
+  </p:clrMapOvr>
+</p:sld>
+</file>
+
+<file path=ppt/slides/slide5.xml><?xml version="1.0" encoding="utf-8"?>
+<p:sld xmlns:a="http://schemas.openxmlformats.org/drawingml/2006/main" xmlns:r="http://schemas.openxmlformats.org/officeDocument/2006/relationships" xmlns:p="http://schemas.openxmlformats.org/presentationml/2006/main">
+  <p:cSld name="Slide 5">
+    <p:spTree>
+      <p:nvGrpSpPr>
+        <p:cNvPr id="1" name=""/>
+        <p:cNvGrpSpPr/>
+        <p:nvPr/>
+      </p:nvGrpSpPr>
+      <p:grpSpPr>
+        <a:xfrm>
+          <a:off x="0" y="0"/>
+          <a:ext cx="0" cy="0"/>
+          <a:chOff x="0" y="0"/>
+          <a:chExt cx="0" cy="0"/>
+        </a:xfrm>
+      </p:grpSpPr>
+      <p:sp>
+        <p:nvSpPr>
+          <p:cNvPr id="2" name="Text 0"/>
+          <p:cNvSpPr/>
+          <p:nvPr/>
+        </p:nvSpPr>
+        <p:spPr>
+          <a:xfrm>
+            <a:off x="457200" y="713232"/>
+            <a:ext cx="11368735" cy="274320"/>
+          </a:xfrm>
+          <a:prstGeom prst="rect">
+            <a:avLst/>
+          </a:prstGeom>
+          <a:noFill/>
+          <a:ln/>
+        </p:spPr>
+        <p:txBody>
+          <a:bodyPr wrap="square" lIns="0" tIns="0" rIns="0" bIns="0" rtlCol="0" anchor="ctr"/>
+          <a:lstStyle/>
+          <a:p>
+            <a:pPr algn="r" indent="0" marL="0">
+              <a:buNone/>
+            </a:pPr>
+            <a:r>
+              <a:rPr lang="en-US" sz="1400" b="1" dirty="0">
+                <a:solidFill>
+                  <a:srgbClr val="1C3F6E"/>
+                </a:solidFill>
+                <a:latin typeface="Calibri" pitchFamily="34" charset="0"/>
+                <a:ea typeface="Calibri" pitchFamily="34" charset="-122"/>
+                <a:cs typeface="Calibri" pitchFamily="34" charset="-120"/>
+              </a:rPr>
+              <a:t>HOMEWORK CORRECTION</a:t>
+            </a:r>
+            <a:endParaRPr lang="en-US" sz="1400" dirty="0"/>
+          </a:p>
+        </p:txBody>
+      </p:sp>
+      <p:pic>
+        <p:nvPicPr>
+          <p:cNvPr id="3" name="Image 0" descr="/home/claude/f4/img/minesec_sheet.png">    </p:cNvPr>
+          <p:cNvPicPr>
+            <a:picLocks noChangeAspect="1"/>
+          </p:cNvPicPr>
+          <p:nvPr/>
+        </p:nvPicPr>
+        <p:blipFill>
+          <a:blip r:embed="rId1"/>
+          <a:stretch>
+            <a:fillRect/>
+          </a:stretch>
+        </p:blipFill>
+        <p:spPr>
+          <a:xfrm>
+            <a:off x="0" y="658368"/>
+            <a:ext cx="5120640" cy="5833872"/>
+          </a:xfrm>
+          <a:prstGeom prst="rect">
+            <a:avLst/>
+          </a:prstGeom>
+        </p:spPr>
+      </p:pic>
+      <p:sp>
+        <p:nvSpPr>
+          <p:cNvPr id="4" name="Text 1"/>
+          <p:cNvSpPr/>
+          <p:nvPr/>
+        </p:nvSpPr>
+        <p:spPr>
+          <a:xfrm>
+            <a:off x="5349240" y="1005840"/>
+            <a:ext cx="6522415" cy="731520"/>
+          </a:xfrm>
+          <a:prstGeom prst="rect">
+            <a:avLst/>
+          </a:prstGeom>
+          <a:noFill/>
+          <a:ln/>
+        </p:spPr>
+        <p:txBody>
+          <a:bodyPr wrap="square" lIns="0" tIns="0" rIns="0" bIns="0" rtlCol="0" anchor="ctr">
+            <a:normAutofit/>
+          </a:bodyPr>
+          <a:lstStyle/>
+          <a:p>
+            <a:pPr algn="ctr" indent="0" marL="0">
+              <a:buNone/>
+            </a:pPr>
+            <a:r>
+              <a:rPr lang="en-US" sz="3600" b="1" dirty="0">
+                <a:solidFill>
+                  <a:srgbClr val="990011"/>
+                </a:solidFill>
+                <a:latin typeface="Times New Roman" pitchFamily="34" charset="0"/>
+                <a:ea typeface="Times New Roman" pitchFamily="34" charset="-122"/>
+                <a:cs typeface="Times New Roman" pitchFamily="34" charset="-120"/>
+              </a:rPr>
+              <a:t>Correction: Possible Answer</a:t>
+            </a:r>
+            <a:endParaRPr lang="en-US" sz="3600" dirty="0"/>
+          </a:p>
+        </p:txBody>
+      </p:sp>
+      <p:sp>
+        <p:nvSpPr>
+          <p:cNvPr id="5" name="Text 2"/>
+          <p:cNvSpPr/>
+          <p:nvPr/>
+        </p:nvSpPr>
+        <p:spPr>
+          <a:xfrm>
+            <a:off x="5349240" y="1783080"/>
+            <a:ext cx="6522415" cy="4663440"/>
+          </a:xfrm>
+          <a:prstGeom prst="rect">
+            <a:avLst/>
+          </a:prstGeom>
+          <a:noFill/>
+          <a:ln/>
+        </p:spPr>
+        <p:txBody>
+          <a:bodyPr wrap="square" lIns="0" tIns="0" rIns="0" bIns="0" rtlCol="0" anchor="t"/>
+          <a:lstStyle/>
+          <a:p>
+            <a:pPr algn="l" indent="0" marL="0">
+              <a:spcAft>
+                <a:spcPts val="800"/>
+              </a:spcAft>
+              <a:buNone/>
+            </a:pPr>
+            <a:r>
+              <a:rPr lang="en-US" sz="4000" dirty="0">
+                <a:solidFill>
+                  <a:srgbClr val="111111"/>
+                </a:solidFill>
+                <a:latin typeface="Times New Roman" pitchFamily="34" charset="0"/>
+                <a:ea typeface="Times New Roman" pitchFamily="34" charset="-122"/>
+                <a:cs typeface="Times New Roman" pitchFamily="34" charset="-120"/>
+              </a:rPr>
+              <a:t>Answers vary. Example: blocked gutters that flood the quarter; solutions: clean the gutters every week and put dustbins along the street.</a:t>
+            </a:r>
+            <a:endParaRPr lang="en-US" sz="4000" dirty="0"/>
+          </a:p>
+        </p:txBody>
+      </p:sp>
+      <p:sp>
+        <p:nvSpPr>
+          <p:cNvPr id="25" name="Slide Number Placeholder 0"/>
+          <p:cNvSpPr>
+            <a:spLocks noGrp="1"/>
+          </p:cNvSpPr>
+          <p:nvPr>
+            <p:ph type="sldNum" sz="quarter" idx="4294967295"/>
+          </p:nvPr>
+        </p:nvSpPr>
+        <p:spPr>
+          <a:xfrm>
+            <a:off x="27432" y="91440"/>
+            <a:ext cx="585216" cy="475488"/>
+          </a:xfrm>
+          <a:prstGeom prst="rect">
+            <a:avLst/>
+          </a:prstGeom>
+          <a:extLst>
+            <a:ext uri="{C572A759-6A51-4108-AA02-DFA0A04FC94B}">
+              <ma14:wrappingTextBoxFlag xmlns:ma14="http://schemas.microsoft.com/office/mac/drawingml/2011/main" val="0"/>
+            </a:ext>
+          </a:extLst>
+        </p:spPr>
+        <p:txBody>
+          <a:bodyPr/>
+          <a:lstStyle>
+            <a:lvl1pPr>
+              <a:defRPr sz="2000">
+                <a:solidFill>
+                  <a:srgbClr val="FFFFFF"/>
+                </a:solidFill>
+                <a:latin typeface="Calibri"/>
+                <a:ea typeface="Calibri"/>
+                <a:cs typeface="Calibri"/>
+              </a:defRPr>
+            </a:lvl1pPr>
+          </a:lstStyle>
+          <a:p>
+            <a:pPr algn="ctr"/>
+            <a:fld id="{F7021451-1387-4CA6-816F-3879F97B5CBC}" type="slidenum">
+              <a:rPr b="1" lang="en-US"/>
+              <a:t>5</a:t>
+            </a:fld>
+            <a:endParaRPr lang="en-US"/>
+          </a:p>
+        </p:txBody>
+      </p:sp>
+    </p:spTree>
+  </p:cSld>
+  <p:clrMapOvr>
+    <a:masterClrMapping/>
+  </p:clrMapOvr>
+</p:sld>
+</file>
+
+<file path=ppt/slides/slide50.xml><?xml version="1.0" encoding="utf-8"?>
+<p:sld xmlns:a="http://schemas.openxmlformats.org/drawingml/2006/main" xmlns:r="http://schemas.openxmlformats.org/officeDocument/2006/relationships" xmlns:p="http://schemas.openxmlformats.org/presentationml/2006/main">
+  <p:cSld name="Slide 50">
+    <p:spTree>
+      <p:nvGrpSpPr>
+        <p:cNvPr id="1" name=""/>
+        <p:cNvGrpSpPr/>
+        <p:nvPr/>
+      </p:nvGrpSpPr>
+      <p:grpSpPr>
+        <a:xfrm>
+          <a:off x="0" y="0"/>
+          <a:ext cx="0" cy="0"/>
+          <a:chOff x="0" y="0"/>
+          <a:chExt cx="0" cy="0"/>
+        </a:xfrm>
+      </p:grpSpPr>
+      <p:sp>
+        <p:nvSpPr>
+          <p:cNvPr id="2" name="Text 0"/>
+          <p:cNvSpPr/>
+          <p:nvPr/>
+        </p:nvSpPr>
+        <p:spPr>
+          <a:xfrm>
+            <a:off x="457200" y="713232"/>
+            <a:ext cx="11368735" cy="274320"/>
+          </a:xfrm>
+          <a:prstGeom prst="rect">
+            <a:avLst/>
+          </a:prstGeom>
+          <a:noFill/>
+          <a:ln/>
+        </p:spPr>
+        <p:txBody>
+          <a:bodyPr wrap="square" lIns="0" tIns="0" rIns="0" bIns="0" rtlCol="0" anchor="ctr"/>
+          <a:lstStyle/>
+          <a:p>
+            <a:pPr algn="r" indent="0" marL="0">
+              <a:buNone/>
+            </a:pPr>
+            <a:r>
+              <a:rPr lang="en-US" sz="1400" b="1" dirty="0">
+                <a:solidFill>
+                  <a:srgbClr val="1C3F6E"/>
+                </a:solidFill>
+                <a:latin typeface="Calibri" pitchFamily="34" charset="0"/>
+                <a:ea typeface="Calibri" pitchFamily="34" charset="-122"/>
+                <a:cs typeface="Calibri" pitchFamily="34" charset="-120"/>
+              </a:rPr>
+              <a:t>BOARD SUMMARY</a:t>
+            </a:r>
+            <a:endParaRPr lang="en-US" sz="1400" dirty="0"/>
+          </a:p>
+        </p:txBody>
+      </p:sp>
+      <p:pic>
+        <p:nvPicPr>
+          <p:cNvPr id="3" name="Image 0" descr="/home/claude/f4/img/minesec_sheet.png">    </p:cNvPr>
+          <p:cNvPicPr>
+            <a:picLocks noChangeAspect="1"/>
+          </p:cNvPicPr>
+          <p:nvPr/>
+        </p:nvPicPr>
+        <p:blipFill>
+          <a:blip r:embed="rId1"/>
+          <a:stretch>
+            <a:fillRect/>
+          </a:stretch>
+        </p:blipFill>
+        <p:spPr>
+          <a:xfrm>
+            <a:off x="0" y="658368"/>
+            <a:ext cx="5120640" cy="5833872"/>
+          </a:xfrm>
+          <a:prstGeom prst="rect">
+            <a:avLst/>
+          </a:prstGeom>
+        </p:spPr>
+      </p:pic>
+      <p:sp>
+        <p:nvSpPr>
+          <p:cNvPr id="4" name="Text 1"/>
+          <p:cNvSpPr/>
+          <p:nvPr/>
+        </p:nvSpPr>
+        <p:spPr>
+          <a:xfrm>
+            <a:off x="5349240" y="1005840"/>
+            <a:ext cx="6522415" cy="731520"/>
+          </a:xfrm>
+          <a:prstGeom prst="rect">
+            <a:avLst/>
+          </a:prstGeom>
+          <a:noFill/>
+          <a:ln/>
+        </p:spPr>
+        <p:txBody>
+          <a:bodyPr wrap="square" lIns="0" tIns="0" rIns="0" bIns="0" rtlCol="0" anchor="ctr">
+            <a:normAutofit/>
+          </a:bodyPr>
+          <a:lstStyle/>
+          <a:p>
+            <a:pPr algn="ctr" indent="0" marL="0">
+              <a:buNone/>
+            </a:pPr>
+            <a:r>
+              <a:rPr lang="en-US" sz="3600" b="1" dirty="0">
+                <a:solidFill>
+                  <a:srgbClr val="990011"/>
+                </a:solidFill>
+                <a:latin typeface="Times New Roman" pitchFamily="34" charset="0"/>
+                <a:ea typeface="Times New Roman" pitchFamily="34" charset="-122"/>
+                <a:cs typeface="Times New Roman" pitchFamily="34" charset="-120"/>
+              </a:rPr>
+              <a:t>3. Information</a:t>
+            </a:r>
+            <a:endParaRPr lang="en-US" sz="3600" dirty="0"/>
+          </a:p>
+        </p:txBody>
+      </p:sp>
+      <p:sp>
+        <p:nvSpPr>
+          <p:cNvPr id="5" name="Text 2"/>
+          <p:cNvSpPr/>
+          <p:nvPr/>
+        </p:nvSpPr>
+        <p:spPr>
+          <a:xfrm>
+            <a:off x="5349240" y="1783080"/>
+            <a:ext cx="6522415" cy="4663440"/>
+          </a:xfrm>
+          <a:prstGeom prst="rect">
+            <a:avLst/>
+          </a:prstGeom>
+          <a:noFill/>
+          <a:ln/>
+        </p:spPr>
+        <p:txBody>
+          <a:bodyPr wrap="square" lIns="0" tIns="0" rIns="0" bIns="0" rtlCol="0" anchor="t"/>
+          <a:lstStyle/>
+          <a:p>
+            <a:pPr algn="l" indent="0" marL="0">
+              <a:spcAft>
+                <a:spcPts val="800"/>
+              </a:spcAft>
+              <a:buNone/>
+            </a:pPr>
+            <a:r>
+              <a:rPr lang="en-US" sz="4000" b="1" dirty="0">
+                <a:solidFill>
+                  <a:srgbClr val="111111"/>
+                </a:solidFill>
+                <a:latin typeface="Times New Roman" pitchFamily="34" charset="0"/>
+                <a:ea typeface="Times New Roman" pitchFamily="34" charset="-122"/>
+                <a:cs typeface="Times New Roman" pitchFamily="34" charset="-120"/>
+              </a:rPr>
+              <a:t>Newspapers: </a:t>
+            </a:r>
+            <a:pPr algn="l" indent="0" marL="0">
+              <a:spcAft>
+                <a:spcPts val="800"/>
+              </a:spcAft>
+              <a:buNone/>
+            </a:pPr>
+            <a:r>
+              <a:rPr lang="en-US" sz="4000" dirty="0">
+                <a:solidFill>
+                  <a:srgbClr val="111111"/>
+                </a:solidFill>
+                <a:latin typeface="Times New Roman" pitchFamily="34" charset="0"/>
+                <a:ea typeface="Times New Roman" pitchFamily="34" charset="-122"/>
+                <a:cs typeface="Times New Roman" pitchFamily="34" charset="-120"/>
+              </a:rPr>
+              <a:t>Newspapers printed in towns reach villages through travellers and traders.</a:t>
+            </a:r>
+            <a:endParaRPr lang="en-US" sz="4000" dirty="0"/>
+          </a:p>
+          <a:p>
+            <a:pPr algn="l" indent="0" marL="0">
+              <a:spcAft>
+                <a:spcPts val="800"/>
+              </a:spcAft>
+              <a:buNone/>
+            </a:pPr>
+            <a:r>
+              <a:rPr lang="en-US" sz="4000" b="1" dirty="0">
+                <a:solidFill>
+                  <a:srgbClr val="111111"/>
+                </a:solidFill>
+                <a:latin typeface="Times New Roman" pitchFamily="34" charset="0"/>
+                <a:ea typeface="Times New Roman" pitchFamily="34" charset="-122"/>
+                <a:cs typeface="Times New Roman" pitchFamily="34" charset="-120"/>
+              </a:rPr>
+              <a:t>People: </a:t>
+            </a:r>
+            <a:pPr algn="l" indent="0" marL="0">
+              <a:spcAft>
+                <a:spcPts val="800"/>
+              </a:spcAft>
+              <a:buNone/>
+            </a:pPr>
+            <a:r>
+              <a:rPr lang="en-US" sz="4000" dirty="0">
+                <a:solidFill>
+                  <a:srgbClr val="111111"/>
+                </a:solidFill>
+                <a:latin typeface="Times New Roman" pitchFamily="34" charset="0"/>
+                <a:ea typeface="Times New Roman" pitchFamily="34" charset="-122"/>
+                <a:cs typeface="Times New Roman" pitchFamily="34" charset="-120"/>
+              </a:rPr>
+              <a:t>Travellers, traders and extension workers carry news and advice.</a:t>
+            </a:r>
+            <a:endParaRPr lang="en-US" sz="4000" dirty="0"/>
+          </a:p>
+        </p:txBody>
+      </p:sp>
+      <p:sp>
+        <p:nvSpPr>
+          <p:cNvPr id="25" name="Slide Number Placeholder 0"/>
+          <p:cNvSpPr>
+            <a:spLocks noGrp="1"/>
+          </p:cNvSpPr>
+          <p:nvPr>
+            <p:ph type="sldNum" sz="quarter" idx="4294967295"/>
+          </p:nvPr>
+        </p:nvSpPr>
+        <p:spPr>
+          <a:xfrm>
+            <a:off x="27432" y="91440"/>
+            <a:ext cx="585216" cy="475488"/>
+          </a:xfrm>
+          <a:prstGeom prst="rect">
+            <a:avLst/>
+          </a:prstGeom>
+          <a:extLst>
+            <a:ext uri="{C572A759-6A51-4108-AA02-DFA0A04FC94B}">
+              <ma14:wrappingTextBoxFlag xmlns:ma14="http://schemas.microsoft.com/office/mac/drawingml/2011/main" val="0"/>
+            </a:ext>
+          </a:extLst>
+        </p:spPr>
+        <p:txBody>
+          <a:bodyPr/>
+          <a:lstStyle>
+            <a:lvl1pPr>
+              <a:defRPr sz="2000">
+                <a:solidFill>
+                  <a:srgbClr val="FFFFFF"/>
+                </a:solidFill>
+                <a:latin typeface="Calibri"/>
+                <a:ea typeface="Calibri"/>
+                <a:cs typeface="Calibri"/>
+              </a:defRPr>
+            </a:lvl1pPr>
+          </a:lstStyle>
+          <a:p>
+            <a:pPr algn="ctr"/>
+            <a:fld id="{F7021451-1387-4CA6-816F-3879F97B5CBC}" type="slidenum">
+              <a:rPr b="1" lang="en-US"/>
+              <a:t>50</a:t>
+            </a:fld>
+            <a:endParaRPr lang="en-US"/>
+          </a:p>
+        </p:txBody>
+      </p:sp>
+    </p:spTree>
+  </p:cSld>
+  <p:clrMapOvr>
+    <a:masterClrMapping/>
+  </p:clrMapOvr>
+</p:sld>
+</file>
+
+<file path=ppt/slides/slide51.xml><?xml version="1.0" encoding="utf-8"?>
+<p:sld xmlns:a="http://schemas.openxmlformats.org/drawingml/2006/main" xmlns:r="http://schemas.openxmlformats.org/officeDocument/2006/relationships" xmlns:p="http://schemas.openxmlformats.org/presentationml/2006/main">
+  <p:cSld name="Slide 51">
+    <p:spTree>
+      <p:nvGrpSpPr>
+        <p:cNvPr id="1" name=""/>
+        <p:cNvGrpSpPr/>
+        <p:nvPr/>
+      </p:nvGrpSpPr>
+      <p:grpSpPr>
+        <a:xfrm>
+          <a:off x="0" y="0"/>
+          <a:ext cx="0" cy="0"/>
+          <a:chOff x="0" y="0"/>
+          <a:chExt cx="0" cy="0"/>
+        </a:xfrm>
+      </p:grpSpPr>
+      <p:sp>
+        <p:nvSpPr>
+          <p:cNvPr id="2" name="Text 0"/>
+          <p:cNvSpPr/>
+          <p:nvPr/>
+        </p:nvSpPr>
+        <p:spPr>
+          <a:xfrm>
+            <a:off x="457200" y="713232"/>
+            <a:ext cx="11368735" cy="274320"/>
+          </a:xfrm>
+          <a:prstGeom prst="rect">
+            <a:avLst/>
+          </a:prstGeom>
+          <a:noFill/>
+          <a:ln/>
+        </p:spPr>
+        <p:txBody>
+          <a:bodyPr wrap="square" lIns="0" tIns="0" rIns="0" bIns="0" rtlCol="0" anchor="ctr"/>
+          <a:lstStyle/>
+          <a:p>
+            <a:pPr algn="r" indent="0" marL="0">
+              <a:buNone/>
+            </a:pPr>
+            <a:r>
+              <a:rPr lang="en-US" sz="1400" b="1" dirty="0">
+                <a:solidFill>
+                  <a:srgbClr val="1C3F6E"/>
+                </a:solidFill>
+                <a:latin typeface="Calibri" pitchFamily="34" charset="0"/>
+                <a:ea typeface="Calibri" pitchFamily="34" charset="-122"/>
+                <a:cs typeface="Calibri" pitchFamily="34" charset="-120"/>
+              </a:rPr>
+              <a:t>FORMATIVE EVALUATION</a:t>
+            </a:r>
+            <a:endParaRPr lang="en-US" sz="1400" dirty="0"/>
+          </a:p>
+        </p:txBody>
+      </p:sp>
+      <p:pic>
+        <p:nvPicPr>
+          <p:cNvPr id="3" name="Image 0" descr="/home/claude/f4/img/minesec_sheet.png">    </p:cNvPr>
+          <p:cNvPicPr>
+            <a:picLocks noChangeAspect="1"/>
+          </p:cNvPicPr>
+          <p:nvPr/>
+        </p:nvPicPr>
+        <p:blipFill>
+          <a:blip r:embed="rId1"/>
+          <a:stretch>
+            <a:fillRect/>
+          </a:stretch>
+        </p:blipFill>
+        <p:spPr>
+          <a:xfrm>
+            <a:off x="0" y="658368"/>
+            <a:ext cx="5120640" cy="5833872"/>
+          </a:xfrm>
+          <a:prstGeom prst="rect">
+            <a:avLst/>
+          </a:prstGeom>
+        </p:spPr>
+      </p:pic>
+      <p:sp>
+        <p:nvSpPr>
+          <p:cNvPr id="4" name="Text 1"/>
+          <p:cNvSpPr/>
+          <p:nvPr/>
+        </p:nvSpPr>
+        <p:spPr>
+          <a:xfrm>
+            <a:off x="5349240" y="1005840"/>
+            <a:ext cx="6522415" cy="731520"/>
+          </a:xfrm>
+          <a:prstGeom prst="rect">
+            <a:avLst/>
+          </a:prstGeom>
+          <a:noFill/>
+          <a:ln/>
+        </p:spPr>
+        <p:txBody>
+          <a:bodyPr wrap="square" lIns="0" tIns="0" rIns="0" bIns="0" rtlCol="0" anchor="ctr">
+            <a:normAutofit/>
+          </a:bodyPr>
+          <a:lstStyle/>
+          <a:p>
+            <a:pPr algn="ctr" indent="0" marL="0">
+              <a:buNone/>
+            </a:pPr>
+            <a:r>
+              <a:rPr lang="en-US" sz="3600" b="1" dirty="0">
+                <a:solidFill>
+                  <a:srgbClr val="990011"/>
+                </a:solidFill>
+                <a:latin typeface="Times New Roman" pitchFamily="34" charset="0"/>
+                <a:ea typeface="Times New Roman" pitchFamily="34" charset="-122"/>
+                <a:cs typeface="Times New Roman" pitchFamily="34" charset="-120"/>
+              </a:rPr>
+              <a:t>Evaluation 1</a:t>
+            </a:r>
+            <a:endParaRPr lang="en-US" sz="3600" dirty="0"/>
+          </a:p>
+        </p:txBody>
+      </p:sp>
+      <p:sp>
+        <p:nvSpPr>
+          <p:cNvPr id="5" name="Text 2"/>
+          <p:cNvSpPr/>
+          <p:nvPr/>
+        </p:nvSpPr>
+        <p:spPr>
+          <a:xfrm>
+            <a:off x="5349240" y="1783080"/>
+            <a:ext cx="6522415" cy="4663440"/>
+          </a:xfrm>
+          <a:prstGeom prst="rect">
+            <a:avLst/>
+          </a:prstGeom>
+          <a:noFill/>
+          <a:ln/>
+        </p:spPr>
+        <p:txBody>
+          <a:bodyPr wrap="square" lIns="0" tIns="0" rIns="0" bIns="0" rtlCol="0" anchor="t"/>
+          <a:lstStyle/>
+          <a:p>
+            <a:pPr algn="l" indent="0" marL="0">
+              <a:spcAft>
+                <a:spcPts val="800"/>
+              </a:spcAft>
+              <a:buNone/>
+            </a:pPr>
+            <a:r>
+              <a:rPr lang="en-US" sz="4000" dirty="0">
+                <a:solidFill>
+                  <a:srgbClr val="111111"/>
+                </a:solidFill>
+                <a:latin typeface="Times New Roman" pitchFamily="34" charset="0"/>
+                <a:ea typeface="Times New Roman" pitchFamily="34" charset="-122"/>
+                <a:cs typeface="Times New Roman" pitchFamily="34" charset="-120"/>
+              </a:rPr>
+              <a:t>Give two products sent from villages to towns.</a:t>
+            </a:r>
+            <a:endParaRPr lang="en-US" sz="4000" dirty="0"/>
+          </a:p>
+        </p:txBody>
+      </p:sp>
+      <p:sp>
+        <p:nvSpPr>
+          <p:cNvPr id="25" name="Slide Number Placeholder 0"/>
+          <p:cNvSpPr>
+            <a:spLocks noGrp="1"/>
+          </p:cNvSpPr>
+          <p:nvPr>
+            <p:ph type="sldNum" sz="quarter" idx="4294967295"/>
+          </p:nvPr>
+        </p:nvSpPr>
+        <p:spPr>
+          <a:xfrm>
+            <a:off x="27432" y="91440"/>
+            <a:ext cx="585216" cy="475488"/>
+          </a:xfrm>
+          <a:prstGeom prst="rect">
+            <a:avLst/>
+          </a:prstGeom>
+          <a:extLst>
+            <a:ext uri="{C572A759-6A51-4108-AA02-DFA0A04FC94B}">
+              <ma14:wrappingTextBoxFlag xmlns:ma14="http://schemas.microsoft.com/office/mac/drawingml/2011/main" val="0"/>
+            </a:ext>
+          </a:extLst>
+        </p:spPr>
+        <p:txBody>
+          <a:bodyPr/>
+          <a:lstStyle>
+            <a:lvl1pPr>
+              <a:defRPr sz="2000">
+                <a:solidFill>
+                  <a:srgbClr val="FFFFFF"/>
+                </a:solidFill>
+                <a:latin typeface="Calibri"/>
+                <a:ea typeface="Calibri"/>
+                <a:cs typeface="Calibri"/>
+              </a:defRPr>
+            </a:lvl1pPr>
+          </a:lstStyle>
+          <a:p>
+            <a:pPr algn="ctr"/>
+            <a:fld id="{F7021451-1387-4CA6-816F-3879F97B5CBC}" type="slidenum">
+              <a:rPr b="1" lang="en-US"/>
+              <a:t>51</a:t>
+            </a:fld>
+            <a:endParaRPr lang="en-US"/>
+          </a:p>
+        </p:txBody>
+      </p:sp>
+    </p:spTree>
+  </p:cSld>
+  <p:clrMapOvr>
+    <a:masterClrMapping/>
+  </p:clrMapOvr>
+</p:sld>
+</file>
+
+<file path=ppt/slides/slide52.xml><?xml version="1.0" encoding="utf-8"?>
+<p:sld xmlns:a="http://schemas.openxmlformats.org/drawingml/2006/main" xmlns:r="http://schemas.openxmlformats.org/officeDocument/2006/relationships" xmlns:p="http://schemas.openxmlformats.org/presentationml/2006/main">
+  <p:cSld name="Slide 52">
+    <p:spTree>
+      <p:nvGrpSpPr>
+        <p:cNvPr id="1" name=""/>
+        <p:cNvGrpSpPr/>
+        <p:nvPr/>
+      </p:nvGrpSpPr>
+      <p:grpSpPr>
+        <a:xfrm>
+          <a:off x="0" y="0"/>
+          <a:ext cx="0" cy="0"/>
+          <a:chOff x="0" y="0"/>
+          <a:chExt cx="0" cy="0"/>
+        </a:xfrm>
+      </p:grpSpPr>
+      <p:sp>
+        <p:nvSpPr>
+          <p:cNvPr id="2" name="Text 0"/>
+          <p:cNvSpPr/>
+          <p:nvPr/>
+        </p:nvSpPr>
+        <p:spPr>
+          <a:xfrm>
+            <a:off x="457200" y="713232"/>
+            <a:ext cx="11368735" cy="274320"/>
+          </a:xfrm>
+          <a:prstGeom prst="rect">
+            <a:avLst/>
+          </a:prstGeom>
+          <a:noFill/>
+          <a:ln/>
+        </p:spPr>
+        <p:txBody>
+          <a:bodyPr wrap="square" lIns="0" tIns="0" rIns="0" bIns="0" rtlCol="0" anchor="ctr"/>
+          <a:lstStyle/>
+          <a:p>
+            <a:pPr algn="r" indent="0" marL="0">
+              <a:buNone/>
+            </a:pPr>
+            <a:r>
+              <a:rPr lang="en-US" sz="1400" b="1" dirty="0">
+                <a:solidFill>
+                  <a:srgbClr val="1C3F6E"/>
+                </a:solidFill>
+                <a:latin typeface="Calibri" pitchFamily="34" charset="0"/>
+                <a:ea typeface="Calibri" pitchFamily="34" charset="-122"/>
+                <a:cs typeface="Calibri" pitchFamily="34" charset="-120"/>
+              </a:rPr>
+              <a:t>FORMATIVE EVALUATION</a:t>
+            </a:r>
+            <a:endParaRPr lang="en-US" sz="1400" dirty="0"/>
+          </a:p>
+        </p:txBody>
+      </p:sp>
+      <p:pic>
+        <p:nvPicPr>
+          <p:cNvPr id="3" name="Image 0" descr="/home/claude/f4/img/minesec_sheet.png">    </p:cNvPr>
+          <p:cNvPicPr>
+            <a:picLocks noChangeAspect="1"/>
+          </p:cNvPicPr>
+          <p:nvPr/>
+        </p:nvPicPr>
+        <p:blipFill>
+          <a:blip r:embed="rId1"/>
+          <a:stretch>
+            <a:fillRect/>
+          </a:stretch>
+        </p:blipFill>
+        <p:spPr>
+          <a:xfrm>
+            <a:off x="0" y="658368"/>
+            <a:ext cx="5120640" cy="5833872"/>
+          </a:xfrm>
+          <a:prstGeom prst="rect">
+            <a:avLst/>
+          </a:prstGeom>
+        </p:spPr>
+      </p:pic>
+      <p:sp>
+        <p:nvSpPr>
+          <p:cNvPr id="4" name="Text 1"/>
+          <p:cNvSpPr/>
+          <p:nvPr/>
+        </p:nvSpPr>
+        <p:spPr>
+          <a:xfrm>
+            <a:off x="5349240" y="1005840"/>
+            <a:ext cx="6522415" cy="731520"/>
+          </a:xfrm>
+          <a:prstGeom prst="rect">
+            <a:avLst/>
+          </a:prstGeom>
+          <a:noFill/>
+          <a:ln/>
+        </p:spPr>
+        <p:txBody>
+          <a:bodyPr wrap="square" lIns="0" tIns="0" rIns="0" bIns="0" rtlCol="0" anchor="ctr">
+            <a:normAutofit/>
+          </a:bodyPr>
+          <a:lstStyle/>
+          <a:p>
+            <a:pPr algn="ctr" indent="0" marL="0">
+              <a:buNone/>
+            </a:pPr>
+            <a:r>
+              <a:rPr lang="en-US" sz="3600" b="1" dirty="0">
+                <a:solidFill>
+                  <a:srgbClr val="990011"/>
+                </a:solidFill>
+                <a:latin typeface="Times New Roman" pitchFamily="34" charset="0"/>
+                <a:ea typeface="Times New Roman" pitchFamily="34" charset="-122"/>
+                <a:cs typeface="Times New Roman" pitchFamily="34" charset="-120"/>
+              </a:rPr>
+              <a:t>Expected Answer</a:t>
+            </a:r>
+            <a:endParaRPr lang="en-US" sz="3600" dirty="0"/>
+          </a:p>
+        </p:txBody>
+      </p:sp>
+      <p:sp>
+        <p:nvSpPr>
+          <p:cNvPr id="5" name="Text 2"/>
+          <p:cNvSpPr/>
+          <p:nvPr/>
+        </p:nvSpPr>
+        <p:spPr>
+          <a:xfrm>
+            <a:off x="5349240" y="1783080"/>
+            <a:ext cx="6522415" cy="4663440"/>
+          </a:xfrm>
+          <a:prstGeom prst="rect">
+            <a:avLst/>
+          </a:prstGeom>
+          <a:noFill/>
+          <a:ln/>
+        </p:spPr>
+        <p:txBody>
+          <a:bodyPr wrap="square" lIns="0" tIns="0" rIns="0" bIns="0" rtlCol="0" anchor="t"/>
+          <a:lstStyle/>
+          <a:p>
+            <a:pPr algn="l" indent="0" marL="0">
+              <a:spcAft>
+                <a:spcPts val="800"/>
+              </a:spcAft>
+              <a:buNone/>
+            </a:pPr>
+            <a:r>
+              <a:rPr lang="en-US" sz="4000" dirty="0">
+                <a:solidFill>
+                  <a:srgbClr val="111111"/>
+                </a:solidFill>
+                <a:latin typeface="Times New Roman" pitchFamily="34" charset="0"/>
+                <a:ea typeface="Times New Roman" pitchFamily="34" charset="-122"/>
+                <a:cs typeface="Times New Roman" pitchFamily="34" charset="-120"/>
+              </a:rPr>
+              <a:t>Food crops and cattle.</a:t>
+            </a:r>
+            <a:endParaRPr lang="en-US" sz="4000" dirty="0"/>
+          </a:p>
+        </p:txBody>
+      </p:sp>
+      <p:sp>
+        <p:nvSpPr>
+          <p:cNvPr id="25" name="Slide Number Placeholder 0"/>
+          <p:cNvSpPr>
+            <a:spLocks noGrp="1"/>
+          </p:cNvSpPr>
+          <p:nvPr>
+            <p:ph type="sldNum" sz="quarter" idx="4294967295"/>
+          </p:nvPr>
+        </p:nvSpPr>
+        <p:spPr>
+          <a:xfrm>
+            <a:off x="27432" y="91440"/>
+            <a:ext cx="585216" cy="475488"/>
+          </a:xfrm>
+          <a:prstGeom prst="rect">
+            <a:avLst/>
+          </a:prstGeom>
+          <a:extLst>
+            <a:ext uri="{C572A759-6A51-4108-AA02-DFA0A04FC94B}">
+              <ma14:wrappingTextBoxFlag xmlns:ma14="http://schemas.microsoft.com/office/mac/drawingml/2011/main" val="0"/>
+            </a:ext>
+          </a:extLst>
+        </p:spPr>
+        <p:txBody>
+          <a:bodyPr/>
+          <a:lstStyle>
+            <a:lvl1pPr>
+              <a:defRPr sz="2000">
+                <a:solidFill>
+                  <a:srgbClr val="FFFFFF"/>
+                </a:solidFill>
+                <a:latin typeface="Calibri"/>
+                <a:ea typeface="Calibri"/>
+                <a:cs typeface="Calibri"/>
+              </a:defRPr>
+            </a:lvl1pPr>
+          </a:lstStyle>
+          <a:p>
+            <a:pPr algn="ctr"/>
+            <a:fld id="{F7021451-1387-4CA6-816F-3879F97B5CBC}" type="slidenum">
+              <a:rPr b="1" lang="en-US"/>
+              <a:t>52</a:t>
+            </a:fld>
+            <a:endParaRPr lang="en-US"/>
+          </a:p>
+        </p:txBody>
+      </p:sp>
+    </p:spTree>
+  </p:cSld>
+  <p:clrMapOvr>
+    <a:masterClrMapping/>
+  </p:clrMapOvr>
+</p:sld>
+</file>
+
+<file path=ppt/slides/slide53.xml><?xml version="1.0" encoding="utf-8"?>
+<p:sld xmlns:a="http://schemas.openxmlformats.org/drawingml/2006/main" xmlns:r="http://schemas.openxmlformats.org/officeDocument/2006/relationships" xmlns:p="http://schemas.openxmlformats.org/presentationml/2006/main">
+  <p:cSld name="Slide 53">
+    <p:spTree>
+      <p:nvGrpSpPr>
+        <p:cNvPr id="1" name=""/>
+        <p:cNvGrpSpPr/>
+        <p:nvPr/>
+      </p:nvGrpSpPr>
+      <p:grpSpPr>
+        <a:xfrm>
+          <a:off x="0" y="0"/>
+          <a:ext cx="0" cy="0"/>
+          <a:chOff x="0" y="0"/>
+          <a:chExt cx="0" cy="0"/>
+        </a:xfrm>
+      </p:grpSpPr>
+      <p:sp>
+        <p:nvSpPr>
+          <p:cNvPr id="2" name="Text 0"/>
+          <p:cNvSpPr/>
+          <p:nvPr/>
+        </p:nvSpPr>
+        <p:spPr>
+          <a:xfrm>
+            <a:off x="457200" y="713232"/>
+            <a:ext cx="11368735" cy="274320"/>
+          </a:xfrm>
+          <a:prstGeom prst="rect">
+            <a:avLst/>
+          </a:prstGeom>
+          <a:noFill/>
+          <a:ln/>
+        </p:spPr>
+        <p:txBody>
+          <a:bodyPr wrap="square" lIns="0" tIns="0" rIns="0" bIns="0" rtlCol="0" anchor="ctr"/>
+          <a:lstStyle/>
+          <a:p>
+            <a:pPr algn="r" indent="0" marL="0">
+              <a:buNone/>
+            </a:pPr>
+            <a:r>
+              <a:rPr lang="en-US" sz="1400" b="1" dirty="0">
+                <a:solidFill>
+                  <a:srgbClr val="1C3F6E"/>
+                </a:solidFill>
+                <a:latin typeface="Calibri" pitchFamily="34" charset="0"/>
+                <a:ea typeface="Calibri" pitchFamily="34" charset="-122"/>
+                <a:cs typeface="Calibri" pitchFamily="34" charset="-120"/>
+              </a:rPr>
+              <a:t>FORMATIVE EVALUATION</a:t>
+            </a:r>
+            <a:endParaRPr lang="en-US" sz="1400" dirty="0"/>
+          </a:p>
+        </p:txBody>
+      </p:sp>
+      <p:pic>
+        <p:nvPicPr>
+          <p:cNvPr id="3" name="Image 0" descr="/home/claude/f4/img/minesec_sheet.png">    </p:cNvPr>
+          <p:cNvPicPr>
+            <a:picLocks noChangeAspect="1"/>
+          </p:cNvPicPr>
+          <p:nvPr/>
+        </p:nvPicPr>
+        <p:blipFill>
+          <a:blip r:embed="rId1"/>
+          <a:stretch>
+            <a:fillRect/>
+          </a:stretch>
+        </p:blipFill>
+        <p:spPr>
+          <a:xfrm>
+            <a:off x="0" y="658368"/>
+            <a:ext cx="5120640" cy="5833872"/>
+          </a:xfrm>
+          <a:prstGeom prst="rect">
+            <a:avLst/>
+          </a:prstGeom>
+        </p:spPr>
+      </p:pic>
+      <p:sp>
+        <p:nvSpPr>
+          <p:cNvPr id="4" name="Text 1"/>
+          <p:cNvSpPr/>
+          <p:nvPr/>
+        </p:nvSpPr>
+        <p:spPr>
+          <a:xfrm>
+            <a:off x="5349240" y="1005840"/>
+            <a:ext cx="6522415" cy="731520"/>
+          </a:xfrm>
+          <a:prstGeom prst="rect">
+            <a:avLst/>
+          </a:prstGeom>
+          <a:noFill/>
+          <a:ln/>
+        </p:spPr>
+        <p:txBody>
+          <a:bodyPr wrap="square" lIns="0" tIns="0" rIns="0" bIns="0" rtlCol="0" anchor="ctr">
+            <a:normAutofit/>
+          </a:bodyPr>
+          <a:lstStyle/>
+          <a:p>
+            <a:pPr algn="ctr" indent="0" marL="0">
+              <a:buNone/>
+            </a:pPr>
+            <a:r>
+              <a:rPr lang="en-US" sz="3600" b="1" dirty="0">
+                <a:solidFill>
+                  <a:srgbClr val="990011"/>
+                </a:solidFill>
+                <a:latin typeface="Times New Roman" pitchFamily="34" charset="0"/>
+                <a:ea typeface="Times New Roman" pitchFamily="34" charset="-122"/>
+                <a:cs typeface="Times New Roman" pitchFamily="34" charset="-120"/>
+              </a:rPr>
+              <a:t>Evaluation 2</a:t>
+            </a:r>
+            <a:endParaRPr lang="en-US" sz="3600" dirty="0"/>
+          </a:p>
+        </p:txBody>
+      </p:sp>
+      <p:sp>
+        <p:nvSpPr>
+          <p:cNvPr id="5" name="Text 2"/>
+          <p:cNvSpPr/>
+          <p:nvPr/>
+        </p:nvSpPr>
+        <p:spPr>
+          <a:xfrm>
+            <a:off x="5349240" y="1783080"/>
+            <a:ext cx="6522415" cy="4663440"/>
+          </a:xfrm>
+          <a:prstGeom prst="rect">
+            <a:avLst/>
+          </a:prstGeom>
+          <a:noFill/>
+          <a:ln/>
+        </p:spPr>
+        <p:txBody>
+          <a:bodyPr wrap="square" lIns="0" tIns="0" rIns="0" bIns="0" rtlCol="0" anchor="t"/>
+          <a:lstStyle/>
+          <a:p>
+            <a:pPr algn="l" indent="0" marL="0">
+              <a:spcAft>
+                <a:spcPts val="800"/>
+              </a:spcAft>
+              <a:buNone/>
+            </a:pPr>
+            <a:r>
+              <a:rPr lang="en-US" sz="4000" dirty="0">
+                <a:solidFill>
+                  <a:srgbClr val="111111"/>
+                </a:solidFill>
+                <a:latin typeface="Times New Roman" pitchFamily="34" charset="0"/>
+                <a:ea typeface="Times New Roman" pitchFamily="34" charset="-122"/>
+                <a:cs typeface="Times New Roman" pitchFamily="34" charset="-120"/>
+              </a:rPr>
+              <a:t>Give two socio-cultural links.</a:t>
+            </a:r>
+            <a:endParaRPr lang="en-US" sz="4000" dirty="0"/>
+          </a:p>
+        </p:txBody>
+      </p:sp>
+      <p:sp>
+        <p:nvSpPr>
+          <p:cNvPr id="25" name="Slide Number Placeholder 0"/>
+          <p:cNvSpPr>
+            <a:spLocks noGrp="1"/>
+          </p:cNvSpPr>
+          <p:nvPr>
+            <p:ph type="sldNum" sz="quarter" idx="4294967295"/>
+          </p:nvPr>
+        </p:nvSpPr>
+        <p:spPr>
+          <a:xfrm>
+            <a:off x="27432" y="91440"/>
+            <a:ext cx="585216" cy="475488"/>
+          </a:xfrm>
+          <a:prstGeom prst="rect">
+            <a:avLst/>
+          </a:prstGeom>
+          <a:extLst>
+            <a:ext uri="{C572A759-6A51-4108-AA02-DFA0A04FC94B}">
+              <ma14:wrappingTextBoxFlag xmlns:ma14="http://schemas.microsoft.com/office/mac/drawingml/2011/main" val="0"/>
+            </a:ext>
+          </a:extLst>
+        </p:spPr>
+        <p:txBody>
+          <a:bodyPr/>
+          <a:lstStyle>
+            <a:lvl1pPr>
+              <a:defRPr sz="2000">
+                <a:solidFill>
+                  <a:srgbClr val="FFFFFF"/>
+                </a:solidFill>
+                <a:latin typeface="Calibri"/>
+                <a:ea typeface="Calibri"/>
+                <a:cs typeface="Calibri"/>
+              </a:defRPr>
+            </a:lvl1pPr>
+          </a:lstStyle>
+          <a:p>
+            <a:pPr algn="ctr"/>
+            <a:fld id="{F7021451-1387-4CA6-816F-3879F97B5CBC}" type="slidenum">
+              <a:rPr b="1" lang="en-US"/>
+              <a:t>53</a:t>
+            </a:fld>
+            <a:endParaRPr lang="en-US"/>
+          </a:p>
+        </p:txBody>
+      </p:sp>
+    </p:spTree>
+  </p:cSld>
+  <p:clrMapOvr>
+    <a:masterClrMapping/>
+  </p:clrMapOvr>
+</p:sld>
+</file>
+
+<file path=ppt/slides/slide54.xml><?xml version="1.0" encoding="utf-8"?>
+<p:sld xmlns:a="http://schemas.openxmlformats.org/drawingml/2006/main" xmlns:r="http://schemas.openxmlformats.org/officeDocument/2006/relationships" xmlns:p="http://schemas.openxmlformats.org/presentationml/2006/main">
+  <p:cSld name="Slide 54">
+    <p:spTree>
+      <p:nvGrpSpPr>
+        <p:cNvPr id="1" name=""/>
+        <p:cNvGrpSpPr/>
+        <p:nvPr/>
+      </p:nvGrpSpPr>
+      <p:grpSpPr>
+        <a:xfrm>
+          <a:off x="0" y="0"/>
+          <a:ext cx="0" cy="0"/>
+          <a:chOff x="0" y="0"/>
+          <a:chExt cx="0" cy="0"/>
+        </a:xfrm>
+      </p:grpSpPr>
+      <p:sp>
+        <p:nvSpPr>
+          <p:cNvPr id="2" name="Text 0"/>
+          <p:cNvSpPr/>
+          <p:nvPr/>
+        </p:nvSpPr>
+        <p:spPr>
+          <a:xfrm>
+            <a:off x="457200" y="713232"/>
+            <a:ext cx="11368735" cy="274320"/>
+          </a:xfrm>
+          <a:prstGeom prst="rect">
+            <a:avLst/>
+          </a:prstGeom>
+          <a:noFill/>
+          <a:ln/>
+        </p:spPr>
+        <p:txBody>
+          <a:bodyPr wrap="square" lIns="0" tIns="0" rIns="0" bIns="0" rtlCol="0" anchor="ctr"/>
+          <a:lstStyle/>
+          <a:p>
+            <a:pPr algn="r" indent="0" marL="0">
+              <a:buNone/>
+            </a:pPr>
+            <a:r>
+              <a:rPr lang="en-US" sz="1400" b="1" dirty="0">
+                <a:solidFill>
+                  <a:srgbClr val="1C3F6E"/>
+                </a:solidFill>
+                <a:latin typeface="Calibri" pitchFamily="34" charset="0"/>
+                <a:ea typeface="Calibri" pitchFamily="34" charset="-122"/>
+                <a:cs typeface="Calibri" pitchFamily="34" charset="-120"/>
+              </a:rPr>
+              <a:t>FORMATIVE EVALUATION</a:t>
+            </a:r>
+            <a:endParaRPr lang="en-US" sz="1400" dirty="0"/>
+          </a:p>
+        </p:txBody>
+      </p:sp>
+      <p:pic>
+        <p:nvPicPr>
+          <p:cNvPr id="3" name="Image 0" descr="/home/claude/f4/img/minesec_sheet.png">    </p:cNvPr>
+          <p:cNvPicPr>
+            <a:picLocks noChangeAspect="1"/>
+          </p:cNvPicPr>
+          <p:nvPr/>
+        </p:nvPicPr>
+        <p:blipFill>
+          <a:blip r:embed="rId1"/>
+          <a:stretch>
+            <a:fillRect/>
+          </a:stretch>
+        </p:blipFill>
+        <p:spPr>
+          <a:xfrm>
+            <a:off x="0" y="658368"/>
+            <a:ext cx="5120640" cy="5833872"/>
+          </a:xfrm>
+          <a:prstGeom prst="rect">
+            <a:avLst/>
+          </a:prstGeom>
+        </p:spPr>
+      </p:pic>
+      <p:sp>
+        <p:nvSpPr>
+          <p:cNvPr id="4" name="Text 1"/>
+          <p:cNvSpPr/>
+          <p:nvPr/>
+        </p:nvSpPr>
+        <p:spPr>
+          <a:xfrm>
+            <a:off x="5349240" y="1005840"/>
+            <a:ext cx="6522415" cy="731520"/>
+          </a:xfrm>
+          <a:prstGeom prst="rect">
+            <a:avLst/>
+          </a:prstGeom>
+          <a:noFill/>
+          <a:ln/>
+        </p:spPr>
+        <p:txBody>
+          <a:bodyPr wrap="square" lIns="0" tIns="0" rIns="0" bIns="0" rtlCol="0" anchor="ctr">
+            <a:normAutofit/>
+          </a:bodyPr>
+          <a:lstStyle/>
+          <a:p>
+            <a:pPr algn="ctr" indent="0" marL="0">
+              <a:buNone/>
+            </a:pPr>
+            <a:r>
+              <a:rPr lang="en-US" sz="3600" b="1" dirty="0">
+                <a:solidFill>
+                  <a:srgbClr val="990011"/>
+                </a:solidFill>
+                <a:latin typeface="Times New Roman" pitchFamily="34" charset="0"/>
+                <a:ea typeface="Times New Roman" pitchFamily="34" charset="-122"/>
+                <a:cs typeface="Times New Roman" pitchFamily="34" charset="-120"/>
+              </a:rPr>
+              <a:t>Expected Answer</a:t>
+            </a:r>
+            <a:endParaRPr lang="en-US" sz="3600" dirty="0"/>
+          </a:p>
+        </p:txBody>
+      </p:sp>
+      <p:sp>
+        <p:nvSpPr>
+          <p:cNvPr id="5" name="Text 2"/>
+          <p:cNvSpPr/>
+          <p:nvPr/>
+        </p:nvSpPr>
+        <p:spPr>
+          <a:xfrm>
+            <a:off x="5349240" y="1783080"/>
+            <a:ext cx="6522415" cy="4663440"/>
+          </a:xfrm>
+          <a:prstGeom prst="rect">
+            <a:avLst/>
+          </a:prstGeom>
+          <a:noFill/>
+          <a:ln/>
+        </p:spPr>
+        <p:txBody>
+          <a:bodyPr wrap="square" lIns="0" tIns="0" rIns="0" bIns="0" rtlCol="0" anchor="t"/>
+          <a:lstStyle/>
+          <a:p>
+            <a:pPr algn="l" indent="0" marL="0">
+              <a:spcAft>
+                <a:spcPts val="800"/>
+              </a:spcAft>
+              <a:buNone/>
+            </a:pPr>
+            <a:r>
+              <a:rPr lang="en-US" sz="4000" dirty="0">
+                <a:solidFill>
+                  <a:srgbClr val="111111"/>
+                </a:solidFill>
+                <a:latin typeface="Times New Roman" pitchFamily="34" charset="0"/>
+                <a:ea typeface="Times New Roman" pitchFamily="34" charset="-122"/>
+                <a:cs typeface="Times New Roman" pitchFamily="34" charset="-120"/>
+              </a:rPr>
+              <a:t>Festivals and development associations.</a:t>
+            </a:r>
+            <a:endParaRPr lang="en-US" sz="4000" dirty="0"/>
+          </a:p>
+        </p:txBody>
+      </p:sp>
+      <p:sp>
+        <p:nvSpPr>
+          <p:cNvPr id="25" name="Slide Number Placeholder 0"/>
+          <p:cNvSpPr>
+            <a:spLocks noGrp="1"/>
+          </p:cNvSpPr>
+          <p:nvPr>
+            <p:ph type="sldNum" sz="quarter" idx="4294967295"/>
+          </p:nvPr>
+        </p:nvSpPr>
+        <p:spPr>
+          <a:xfrm>
+            <a:off x="27432" y="91440"/>
+            <a:ext cx="585216" cy="475488"/>
+          </a:xfrm>
+          <a:prstGeom prst="rect">
+            <a:avLst/>
+          </a:prstGeom>
+          <a:extLst>
+            <a:ext uri="{C572A759-6A51-4108-AA02-DFA0A04FC94B}">
+              <ma14:wrappingTextBoxFlag xmlns:ma14="http://schemas.microsoft.com/office/mac/drawingml/2011/main" val="0"/>
+            </a:ext>
+          </a:extLst>
+        </p:spPr>
+        <p:txBody>
+          <a:bodyPr/>
+          <a:lstStyle>
+            <a:lvl1pPr>
+              <a:defRPr sz="2000">
+                <a:solidFill>
+                  <a:srgbClr val="FFFFFF"/>
+                </a:solidFill>
+                <a:latin typeface="Calibri"/>
+                <a:ea typeface="Calibri"/>
+                <a:cs typeface="Calibri"/>
+              </a:defRPr>
+            </a:lvl1pPr>
+          </a:lstStyle>
+          <a:p>
+            <a:pPr algn="ctr"/>
+            <a:fld id="{F7021451-1387-4CA6-816F-3879F97B5CBC}" type="slidenum">
+              <a:rPr b="1" lang="en-US"/>
+              <a:t>54</a:t>
+            </a:fld>
+            <a:endParaRPr lang="en-US"/>
+          </a:p>
+        </p:txBody>
+      </p:sp>
+    </p:spTree>
+  </p:cSld>
+  <p:clrMapOvr>
+    <a:masterClrMapping/>
+  </p:clrMapOvr>
+</p:sld>
+</file>
+
+<file path=ppt/slides/slide55.xml><?xml version="1.0" encoding="utf-8"?>
+<p:sld xmlns:a="http://schemas.openxmlformats.org/drawingml/2006/main" xmlns:r="http://schemas.openxmlformats.org/officeDocument/2006/relationships" xmlns:p="http://schemas.openxmlformats.org/presentationml/2006/main">
+  <p:cSld name="Slide 55">
+    <p:spTree>
+      <p:nvGrpSpPr>
+        <p:cNvPr id="1" name=""/>
+        <p:cNvGrpSpPr/>
+        <p:nvPr/>
+      </p:nvGrpSpPr>
+      <p:grpSpPr>
+        <a:xfrm>
+          <a:off x="0" y="0"/>
+          <a:ext cx="0" cy="0"/>
+          <a:chOff x="0" y="0"/>
+          <a:chExt cx="0" cy="0"/>
+        </a:xfrm>
+      </p:grpSpPr>
+      <p:sp>
+        <p:nvSpPr>
+          <p:cNvPr id="2" name="Text 0"/>
+          <p:cNvSpPr/>
+          <p:nvPr/>
+        </p:nvSpPr>
+        <p:spPr>
+          <a:xfrm>
+            <a:off x="457200" y="713232"/>
+            <a:ext cx="11368735" cy="274320"/>
+          </a:xfrm>
+          <a:prstGeom prst="rect">
+            <a:avLst/>
+          </a:prstGeom>
+          <a:noFill/>
+          <a:ln/>
+        </p:spPr>
+        <p:txBody>
+          <a:bodyPr wrap="square" lIns="0" tIns="0" rIns="0" bIns="0" rtlCol="0" anchor="ctr"/>
+          <a:lstStyle/>
+          <a:p>
+            <a:pPr algn="r" indent="0" marL="0">
+              <a:buNone/>
+            </a:pPr>
+            <a:r>
+              <a:rPr lang="en-US" sz="1400" b="1" dirty="0">
+                <a:solidFill>
+                  <a:srgbClr val="1C3F6E"/>
+                </a:solidFill>
+                <a:latin typeface="Calibri" pitchFamily="34" charset="0"/>
+                <a:ea typeface="Calibri" pitchFamily="34" charset="-122"/>
+                <a:cs typeface="Calibri" pitchFamily="34" charset="-120"/>
+              </a:rPr>
+              <a:t>REMEDIATION</a:t>
+            </a:r>
+            <a:endParaRPr lang="en-US" sz="1400" dirty="0"/>
+          </a:p>
+        </p:txBody>
+      </p:sp>
+      <p:pic>
+        <p:nvPicPr>
+          <p:cNvPr id="3" name="Image 0" descr="/home/claude/f4/img/minesec_sheet.png">    </p:cNvPr>
+          <p:cNvPicPr>
+            <a:picLocks noChangeAspect="1"/>
+          </p:cNvPicPr>
+          <p:nvPr/>
+        </p:nvPicPr>
+        <p:blipFill>
+          <a:blip r:embed="rId1"/>
+          <a:stretch>
+            <a:fillRect/>
+          </a:stretch>
+        </p:blipFill>
+        <p:spPr>
+          <a:xfrm>
+            <a:off x="0" y="658368"/>
+            <a:ext cx="1463040" cy="5833872"/>
+          </a:xfrm>
+          <a:prstGeom prst="rect">
+            <a:avLst/>
+          </a:prstGeom>
+        </p:spPr>
+      </p:pic>
+      <p:sp>
+        <p:nvSpPr>
+          <p:cNvPr id="4" name="Text 1"/>
+          <p:cNvSpPr/>
+          <p:nvPr/>
+        </p:nvSpPr>
+        <p:spPr>
+          <a:xfrm>
+            <a:off x="1691640" y="1005840"/>
+            <a:ext cx="10180015" cy="731520"/>
+          </a:xfrm>
+          <a:prstGeom prst="rect">
+            <a:avLst/>
+          </a:prstGeom>
+          <a:noFill/>
+          <a:ln/>
+        </p:spPr>
+        <p:txBody>
+          <a:bodyPr wrap="square" lIns="0" tIns="0" rIns="0" bIns="0" rtlCol="0" anchor="ctr">
+            <a:normAutofit/>
+          </a:bodyPr>
+          <a:lstStyle/>
+          <a:p>
+            <a:pPr algn="ctr" indent="0" marL="0">
+              <a:buNone/>
+            </a:pPr>
+            <a:r>
+              <a:rPr lang="en-US" sz="3600" b="1" dirty="0">
+                <a:solidFill>
+                  <a:srgbClr val="990011"/>
+                </a:solidFill>
+                <a:latin typeface="Times New Roman" pitchFamily="34" charset="0"/>
+                <a:ea typeface="Times New Roman" pitchFamily="34" charset="-122"/>
+                <a:cs typeface="Times New Roman" pitchFamily="34" charset="-120"/>
+              </a:rPr>
+              <a:t>Remediation</a:t>
+            </a:r>
+            <a:endParaRPr lang="en-US" sz="3600" dirty="0"/>
+          </a:p>
+        </p:txBody>
+      </p:sp>
+      <p:sp>
+        <p:nvSpPr>
+          <p:cNvPr id="5" name="Text 2"/>
+          <p:cNvSpPr/>
+          <p:nvPr/>
+        </p:nvSpPr>
+        <p:spPr>
+          <a:xfrm>
+            <a:off x="1691640" y="1783080"/>
+            <a:ext cx="10180015" cy="4663440"/>
+          </a:xfrm>
+          <a:prstGeom prst="rect">
+            <a:avLst/>
+          </a:prstGeom>
+          <a:noFill/>
+          <a:ln/>
+        </p:spPr>
+        <p:txBody>
+          <a:bodyPr wrap="square" lIns="0" tIns="0" rIns="0" bIns="0" rtlCol="0" anchor="t"/>
+          <a:lstStyle/>
+          <a:p>
+            <a:pPr algn="l" indent="0" marL="0">
+              <a:spcAft>
+                <a:spcPts val="800"/>
+              </a:spcAft>
+              <a:buNone/>
+            </a:pPr>
+            <a:r>
+              <a:rPr lang="en-US" sz="4000" b="1" dirty="0">
+                <a:solidFill>
+                  <a:srgbClr val="111111"/>
+                </a:solidFill>
+                <a:latin typeface="Times New Roman" pitchFamily="34" charset="0"/>
+                <a:ea typeface="Times New Roman" pitchFamily="34" charset="-122"/>
+                <a:cs typeface="Times New Roman" pitchFamily="34" charset="-120"/>
+              </a:rPr>
+              <a:t>Fill in the blanks:</a:t>
+            </a:r>
+            <a:endParaRPr lang="en-US" sz="4000" dirty="0"/>
+          </a:p>
+          <a:p>
+            <a:pPr algn="l" marL="342900" indent="-342900">
+              <a:spcAft>
+                <a:spcPts val="800"/>
+              </a:spcAft>
+              <a:buSzPct val="100000"/>
+              <a:buFont typeface="+mj-lt"/>
+              <a:buAutoNum type="arabicPeriod" startAt="1"/>
+            </a:pPr>
+            <a:r>
+              <a:rPr lang="en-US" sz="4000" dirty="0">
+                <a:solidFill>
+                  <a:srgbClr val="111111"/>
+                </a:solidFill>
+                <a:latin typeface="Times New Roman" pitchFamily="34" charset="0"/>
+                <a:ea typeface="Times New Roman" pitchFamily="34" charset="-122"/>
+                <a:cs typeface="Times New Roman" pitchFamily="34" charset="-120"/>
+              </a:rPr>
+              <a:t>A trader who buys in villages and sells in town is a ______.</a:t>
+            </a:r>
+            <a:endParaRPr lang="en-US" sz="4000" dirty="0"/>
+          </a:p>
+          <a:p>
+            <a:pPr algn="l" marL="342900" indent="-342900">
+              <a:spcAft>
+                <a:spcPts val="800"/>
+              </a:spcAft>
+              <a:buSzPct val="100000"/>
+              <a:buFont typeface="+mj-lt"/>
+              <a:buAutoNum type="arabicPeriod" startAt="1"/>
+            </a:pPr>
+            <a:r>
+              <a:rPr lang="en-US" sz="4000" dirty="0">
+                <a:solidFill>
+                  <a:srgbClr val="111111"/>
+                </a:solidFill>
+                <a:latin typeface="Times New Roman" pitchFamily="34" charset="0"/>
+                <a:ea typeface="Times New Roman" pitchFamily="34" charset="-122"/>
+                <a:cs typeface="Times New Roman" pitchFamily="34" charset="-120"/>
+              </a:rPr>
+              <a:t>The movement of goods or people is a ______.</a:t>
+            </a:r>
+            <a:endParaRPr lang="en-US" sz="4000" dirty="0"/>
+          </a:p>
+          <a:p>
+            <a:pPr algn="l" marL="342900" indent="-342900">
+              <a:spcAft>
+                <a:spcPts val="800"/>
+              </a:spcAft>
+              <a:buSzPct val="100000"/>
+              <a:buFont typeface="+mj-lt"/>
+              <a:buAutoNum type="arabicPeriod" startAt="1"/>
+            </a:pPr>
+            <a:r>
+              <a:rPr lang="en-US" sz="4000" dirty="0">
+                <a:solidFill>
+                  <a:srgbClr val="111111"/>
+                </a:solidFill>
+                <a:latin typeface="Times New Roman" pitchFamily="34" charset="0"/>
+                <a:ea typeface="Times New Roman" pitchFamily="34" charset="-122"/>
+                <a:cs typeface="Times New Roman" pitchFamily="34" charset="-120"/>
+              </a:rPr>
+              <a:t>Farmers who group together form a ______.</a:t>
+            </a:r>
+            <a:endParaRPr lang="en-US" sz="4000" dirty="0"/>
+          </a:p>
+        </p:txBody>
+      </p:sp>
+      <p:sp>
+        <p:nvSpPr>
+          <p:cNvPr id="25" name="Slide Number Placeholder 0"/>
+          <p:cNvSpPr>
+            <a:spLocks noGrp="1"/>
+          </p:cNvSpPr>
+          <p:nvPr>
+            <p:ph type="sldNum" sz="quarter" idx="4294967295"/>
+          </p:nvPr>
+        </p:nvSpPr>
+        <p:spPr>
+          <a:xfrm>
+            <a:off x="27432" y="91440"/>
+            <a:ext cx="585216" cy="475488"/>
+          </a:xfrm>
+          <a:prstGeom prst="rect">
+            <a:avLst/>
+          </a:prstGeom>
+          <a:extLst>
+            <a:ext uri="{C572A759-6A51-4108-AA02-DFA0A04FC94B}">
+              <ma14:wrappingTextBoxFlag xmlns:ma14="http://schemas.microsoft.com/office/mac/drawingml/2011/main" val="0"/>
+            </a:ext>
+          </a:extLst>
+        </p:spPr>
+        <p:txBody>
+          <a:bodyPr/>
+          <a:lstStyle>
+            <a:lvl1pPr>
+              <a:defRPr sz="2000">
+                <a:solidFill>
+                  <a:srgbClr val="FFFFFF"/>
+                </a:solidFill>
+                <a:latin typeface="Calibri"/>
+                <a:ea typeface="Calibri"/>
+                <a:cs typeface="Calibri"/>
+              </a:defRPr>
+            </a:lvl1pPr>
+          </a:lstStyle>
+          <a:p>
+            <a:pPr algn="ctr"/>
+            <a:fld id="{F7021451-1387-4CA6-816F-3879F97B5CBC}" type="slidenum">
+              <a:rPr b="1" lang="en-US"/>
+              <a:t>55</a:t>
+            </a:fld>
+            <a:endParaRPr lang="en-US"/>
+          </a:p>
+        </p:txBody>
+      </p:sp>
+    </p:spTree>
+  </p:cSld>
+  <p:clrMapOvr>
+    <a:masterClrMapping/>
+  </p:clrMapOvr>
+</p:sld>
+</file>
+
+<file path=ppt/slides/slide56.xml><?xml version="1.0" encoding="utf-8"?>
+<p:sld xmlns:a="http://schemas.openxmlformats.org/drawingml/2006/main" xmlns:r="http://schemas.openxmlformats.org/officeDocument/2006/relationships" xmlns:p="http://schemas.openxmlformats.org/presentationml/2006/main">
+  <p:cSld name="Slide 56">
+    <p:spTree>
+      <p:nvGrpSpPr>
+        <p:cNvPr id="1" name=""/>
+        <p:cNvGrpSpPr/>
+        <p:nvPr/>
+      </p:nvGrpSpPr>
+      <p:grpSpPr>
+        <a:xfrm>
+          <a:off x="0" y="0"/>
+          <a:ext cx="0" cy="0"/>
+          <a:chOff x="0" y="0"/>
+          <a:chExt cx="0" cy="0"/>
+        </a:xfrm>
+      </p:grpSpPr>
+      <p:sp>
+        <p:nvSpPr>
+          <p:cNvPr id="2" name="Text 0"/>
+          <p:cNvSpPr/>
+          <p:nvPr/>
+        </p:nvSpPr>
+        <p:spPr>
+          <a:xfrm>
+            <a:off x="457200" y="713232"/>
+            <a:ext cx="11368735" cy="274320"/>
+          </a:xfrm>
+          <a:prstGeom prst="rect">
+            <a:avLst/>
+          </a:prstGeom>
+          <a:noFill/>
+          <a:ln/>
+        </p:spPr>
+        <p:txBody>
+          <a:bodyPr wrap="square" lIns="0" tIns="0" rIns="0" bIns="0" rtlCol="0" anchor="ctr"/>
+          <a:lstStyle/>
+          <a:p>
+            <a:pPr algn="r" indent="0" marL="0">
+              <a:buNone/>
+            </a:pPr>
+            <a:r>
+              <a:rPr lang="en-US" sz="1400" b="1" dirty="0">
+                <a:solidFill>
+                  <a:srgbClr val="1C3F6E"/>
+                </a:solidFill>
+                <a:latin typeface="Calibri" pitchFamily="34" charset="0"/>
+                <a:ea typeface="Calibri" pitchFamily="34" charset="-122"/>
+                <a:cs typeface="Calibri" pitchFamily="34" charset="-120"/>
+              </a:rPr>
+              <a:t>HOMEWORK</a:t>
+            </a:r>
+            <a:endParaRPr lang="en-US" sz="1400" dirty="0"/>
+          </a:p>
+        </p:txBody>
+      </p:sp>
+      <p:pic>
+        <p:nvPicPr>
+          <p:cNvPr id="3" name="Image 0" descr="/home/claude/f4/img/minesec_sheet.png">    </p:cNvPr>
+          <p:cNvPicPr>
+            <a:picLocks noChangeAspect="1"/>
+          </p:cNvPicPr>
+          <p:nvPr/>
+        </p:nvPicPr>
+        <p:blipFill>
+          <a:blip r:embed="rId1"/>
+          <a:stretch>
+            <a:fillRect/>
+          </a:stretch>
+        </p:blipFill>
+        <p:spPr>
+          <a:xfrm>
+            <a:off x="0" y="658368"/>
+            <a:ext cx="5120640" cy="5833872"/>
+          </a:xfrm>
+          <a:prstGeom prst="rect">
+            <a:avLst/>
+          </a:prstGeom>
+        </p:spPr>
+      </p:pic>
+      <p:sp>
+        <p:nvSpPr>
+          <p:cNvPr id="4" name="Text 1"/>
+          <p:cNvSpPr/>
+          <p:nvPr/>
+        </p:nvSpPr>
+        <p:spPr>
+          <a:xfrm>
+            <a:off x="5349240" y="1005840"/>
+            <a:ext cx="6522415" cy="731520"/>
+          </a:xfrm>
+          <a:prstGeom prst="rect">
+            <a:avLst/>
+          </a:prstGeom>
+          <a:noFill/>
+          <a:ln/>
+        </p:spPr>
+        <p:txBody>
+          <a:bodyPr wrap="square" lIns="0" tIns="0" rIns="0" bIns="0" rtlCol="0" anchor="ctr">
+            <a:normAutofit/>
+          </a:bodyPr>
+          <a:lstStyle/>
+          <a:p>
+            <a:pPr algn="ctr" indent="0" marL="0">
+              <a:buNone/>
+            </a:pPr>
+            <a:r>
+              <a:rPr lang="en-US" sz="3600" b="1" dirty="0">
+                <a:solidFill>
+                  <a:srgbClr val="990011"/>
+                </a:solidFill>
+                <a:latin typeface="Times New Roman" pitchFamily="34" charset="0"/>
+                <a:ea typeface="Times New Roman" pitchFamily="34" charset="-122"/>
+                <a:cs typeface="Times New Roman" pitchFamily="34" charset="-120"/>
+              </a:rPr>
+              <a:t>Homework</a:t>
+            </a:r>
+            <a:endParaRPr lang="en-US" sz="3600" dirty="0"/>
+          </a:p>
+        </p:txBody>
+      </p:sp>
+      <p:sp>
+        <p:nvSpPr>
+          <p:cNvPr id="5" name="Text 2"/>
+          <p:cNvSpPr/>
+          <p:nvPr/>
+        </p:nvSpPr>
+        <p:spPr>
+          <a:xfrm>
+            <a:off x="5349240" y="1783080"/>
+            <a:ext cx="6522415" cy="4663440"/>
+          </a:xfrm>
+          <a:prstGeom prst="rect">
+            <a:avLst/>
+          </a:prstGeom>
+          <a:noFill/>
+          <a:ln/>
+        </p:spPr>
+        <p:txBody>
+          <a:bodyPr wrap="square" lIns="0" tIns="0" rIns="0" bIns="0" rtlCol="0" anchor="t"/>
+          <a:lstStyle/>
+          <a:p>
+            <a:pPr algn="l" indent="0" marL="0">
+              <a:spcAft>
+                <a:spcPts val="800"/>
+              </a:spcAft>
+              <a:buNone/>
+            </a:pPr>
+            <a:r>
+              <a:rPr lang="en-US" sz="4000" dirty="0">
+                <a:solidFill>
+                  <a:srgbClr val="111111"/>
+                </a:solidFill>
+                <a:latin typeface="Times New Roman" pitchFamily="34" charset="0"/>
+                <a:ea typeface="Times New Roman" pitchFamily="34" charset="-122"/>
+                <a:cs typeface="Times New Roman" pitchFamily="34" charset="-120"/>
+              </a:rPr>
+              <a:t>List three products your family buys from villages and three goods villagers buy in town.</a:t>
+            </a:r>
+            <a:endParaRPr lang="en-US" sz="4000" dirty="0"/>
+          </a:p>
+        </p:txBody>
+      </p:sp>
+      <p:sp>
+        <p:nvSpPr>
+          <p:cNvPr id="25" name="Slide Number Placeholder 0"/>
+          <p:cNvSpPr>
+            <a:spLocks noGrp="1"/>
+          </p:cNvSpPr>
+          <p:nvPr>
+            <p:ph type="sldNum" sz="quarter" idx="4294967295"/>
+          </p:nvPr>
+        </p:nvSpPr>
+        <p:spPr>
+          <a:xfrm>
+            <a:off x="27432" y="91440"/>
+            <a:ext cx="585216" cy="475488"/>
+          </a:xfrm>
+          <a:prstGeom prst="rect">
+            <a:avLst/>
+          </a:prstGeom>
+          <a:extLst>
+            <a:ext uri="{C572A759-6A51-4108-AA02-DFA0A04FC94B}">
+              <ma14:wrappingTextBoxFlag xmlns:ma14="http://schemas.microsoft.com/office/mac/drawingml/2011/main" val="0"/>
+            </a:ext>
+          </a:extLst>
+        </p:spPr>
+        <p:txBody>
+          <a:bodyPr/>
+          <a:lstStyle>
+            <a:lvl1pPr>
+              <a:defRPr sz="2000">
+                <a:solidFill>
+                  <a:srgbClr val="FFFFFF"/>
+                </a:solidFill>
+                <a:latin typeface="Calibri"/>
+                <a:ea typeface="Calibri"/>
+                <a:cs typeface="Calibri"/>
+              </a:defRPr>
+            </a:lvl1pPr>
+          </a:lstStyle>
+          <a:p>
+            <a:pPr algn="ctr"/>
+            <a:fld id="{F7021451-1387-4CA6-816F-3879F97B5CBC}" type="slidenum">
+              <a:rPr b="1" lang="en-US"/>
+              <a:t>56</a:t>
+            </a:fld>
+            <a:endParaRPr lang="en-US"/>
+          </a:p>
+        </p:txBody>
+      </p:sp>
+    </p:spTree>
+  </p:cSld>
+  <p:clrMapOvr>
+    <a:masterClrMapping/>
+  </p:clrMapOvr>
+</p:sld>
+</file>
+
+<file path=ppt/slides/slide57.xml><?xml version="1.0" encoding="utf-8"?>
+<p:sld xmlns:a="http://schemas.openxmlformats.org/drawingml/2006/main" xmlns:r="http://schemas.openxmlformats.org/officeDocument/2006/relationships" xmlns:p="http://schemas.openxmlformats.org/presentationml/2006/main">
+  <p:cSld name="Slide 57">
+    <p:spTree>
+      <p:nvGrpSpPr>
+        <p:cNvPr id="1" name=""/>
+        <p:cNvGrpSpPr/>
+        <p:nvPr/>
+      </p:nvGrpSpPr>
+      <p:grpSpPr>
+        <a:xfrm>
+          <a:off x="0" y="0"/>
+          <a:ext cx="0" cy="0"/>
+          <a:chOff x="0" y="0"/>
+          <a:chExt cx="0" cy="0"/>
+        </a:xfrm>
+      </p:grpSpPr>
+      <p:sp>
+        <p:nvSpPr>
+          <p:cNvPr id="2" name="Text 0"/>
+          <p:cNvSpPr/>
+          <p:nvPr/>
+        </p:nvSpPr>
+        <p:spPr>
+          <a:xfrm>
+            <a:off x="457200" y="713232"/>
+            <a:ext cx="11368735" cy="274320"/>
+          </a:xfrm>
+          <a:prstGeom prst="rect">
+            <a:avLst/>
+          </a:prstGeom>
+          <a:noFill/>
+          <a:ln/>
+        </p:spPr>
+        <p:txBody>
+          <a:bodyPr wrap="square" lIns="0" tIns="0" rIns="0" bIns="0" rtlCol="0" anchor="ctr"/>
+          <a:lstStyle/>
+          <a:p>
+            <a:pPr algn="r" indent="0" marL="0">
+              <a:buNone/>
+            </a:pPr>
+            <a:r>
+              <a:rPr lang="en-US" sz="1400" b="1" dirty="0">
+                <a:solidFill>
+                  <a:srgbClr val="1C3F6E"/>
+                </a:solidFill>
+                <a:latin typeface="Calibri" pitchFamily="34" charset="0"/>
+                <a:ea typeface="Calibri" pitchFamily="34" charset="-122"/>
+                <a:cs typeface="Calibri" pitchFamily="34" charset="-120"/>
+              </a:rPr>
+              <a:t>NEXT LESSON</a:t>
+            </a:r>
+            <a:endParaRPr lang="en-US" sz="1400" dirty="0"/>
+          </a:p>
+        </p:txBody>
+      </p:sp>
+      <p:pic>
+        <p:nvPicPr>
+          <p:cNvPr id="3" name="Image 0" descr="/home/claude/f4/img/minesec_sheet.png">    </p:cNvPr>
+          <p:cNvPicPr>
+            <a:picLocks noChangeAspect="1"/>
+          </p:cNvPicPr>
+          <p:nvPr/>
+        </p:nvPicPr>
+        <p:blipFill>
+          <a:blip r:embed="rId1"/>
+          <a:stretch>
+            <a:fillRect/>
+          </a:stretch>
+        </p:blipFill>
+        <p:spPr>
+          <a:xfrm>
+            <a:off x="0" y="658368"/>
+            <a:ext cx="5120640" cy="5833872"/>
+          </a:xfrm>
+          <a:prstGeom prst="rect">
+            <a:avLst/>
+          </a:prstGeom>
+        </p:spPr>
+      </p:pic>
+      <p:sp>
+        <p:nvSpPr>
+          <p:cNvPr id="4" name="Text 1"/>
+          <p:cNvSpPr/>
+          <p:nvPr/>
+        </p:nvSpPr>
+        <p:spPr>
+          <a:xfrm>
+            <a:off x="5349240" y="1005840"/>
+            <a:ext cx="6522415" cy="731520"/>
+          </a:xfrm>
+          <a:prstGeom prst="rect">
+            <a:avLst/>
+          </a:prstGeom>
+          <a:noFill/>
+          <a:ln/>
+        </p:spPr>
+        <p:txBody>
+          <a:bodyPr wrap="square" lIns="0" tIns="0" rIns="0" bIns="0" rtlCol="0" anchor="ctr">
+            <a:normAutofit/>
+          </a:bodyPr>
+          <a:lstStyle/>
+          <a:p>
+            <a:pPr algn="ctr" indent="0" marL="0">
+              <a:buNone/>
+            </a:pPr>
+            <a:r>
+              <a:rPr lang="en-US" sz="3600" b="1" dirty="0">
+                <a:solidFill>
+                  <a:srgbClr val="990011"/>
+                </a:solidFill>
+                <a:latin typeface="Times New Roman" pitchFamily="34" charset="0"/>
+                <a:ea typeface="Times New Roman" pitchFamily="34" charset="-122"/>
+                <a:cs typeface="Times New Roman" pitchFamily="34" charset="-120"/>
+              </a:rPr>
+              <a:t>Next Lesson</a:t>
+            </a:r>
+            <a:endParaRPr lang="en-US" sz="3600" dirty="0"/>
+          </a:p>
+        </p:txBody>
+      </p:sp>
+      <p:sp>
+        <p:nvSpPr>
+          <p:cNvPr id="5" name="Text 2"/>
+          <p:cNvSpPr/>
+          <p:nvPr/>
+        </p:nvSpPr>
+        <p:spPr>
+          <a:xfrm>
+            <a:off x="5349240" y="1783080"/>
+            <a:ext cx="6522415" cy="4663440"/>
+          </a:xfrm>
+          <a:prstGeom prst="rect">
+            <a:avLst/>
+          </a:prstGeom>
+          <a:noFill/>
+          <a:ln/>
+        </p:spPr>
+        <p:txBody>
+          <a:bodyPr wrap="square" lIns="0" tIns="0" rIns="0" bIns="0" rtlCol="0" anchor="ctr"/>
+          <a:lstStyle/>
+          <a:p>
+            <a:pPr algn="ctr" indent="0" marL="0">
+              <a:spcAft>
+                <a:spcPts val="800"/>
+              </a:spcAft>
+              <a:buNone/>
+            </a:pPr>
+            <a:r>
+              <a:rPr lang="en-US" sz="4000" b="1" dirty="0">
+                <a:solidFill>
+                  <a:srgbClr val="111111"/>
+                </a:solidFill>
+                <a:latin typeface="Times New Roman" pitchFamily="34" charset="0"/>
+                <a:ea typeface="Times New Roman" pitchFamily="34" charset="-122"/>
+                <a:cs typeface="Times New Roman" pitchFamily="34" charset="-120"/>
+              </a:rPr>
+              <a:t>Our next lesson will be on:</a:t>
+            </a:r>
+            <a:endParaRPr lang="en-US" sz="4000" dirty="0"/>
+          </a:p>
+          <a:p>
+            <a:pPr algn="ctr" indent="0" marL="0">
+              <a:spcAft>
+                <a:spcPts val="800"/>
+              </a:spcAft>
+              <a:buNone/>
+            </a:pPr>
+            <a:r>
+              <a:rPr lang="en-US" sz="4000" b="1" dirty="0">
+                <a:solidFill>
+                  <a:srgbClr val="990011"/>
+                </a:solidFill>
+                <a:latin typeface="Times New Roman" pitchFamily="34" charset="0"/>
+                <a:ea typeface="Times New Roman" pitchFamily="34" charset="-122"/>
+                <a:cs typeface="Times New Roman" pitchFamily="34" charset="-120"/>
+              </a:rPr>
+              <a:t>Further Study 7: Rural Exodus in Cameroon</a:t>
+            </a:r>
+            <a:endParaRPr lang="en-US" sz="4000" dirty="0"/>
+          </a:p>
+        </p:txBody>
+      </p:sp>
+      <p:sp>
+        <p:nvSpPr>
+          <p:cNvPr id="25" name="Slide Number Placeholder 0"/>
+          <p:cNvSpPr>
+            <a:spLocks noGrp="1"/>
+          </p:cNvSpPr>
+          <p:nvPr>
+            <p:ph type="sldNum" sz="quarter" idx="4294967295"/>
+          </p:nvPr>
+        </p:nvSpPr>
+        <p:spPr>
+          <a:xfrm>
+            <a:off x="27432" y="91440"/>
+            <a:ext cx="585216" cy="475488"/>
+          </a:xfrm>
+          <a:prstGeom prst="rect">
+            <a:avLst/>
+          </a:prstGeom>
+          <a:extLst>
+            <a:ext uri="{C572A759-6A51-4108-AA02-DFA0A04FC94B}">
+              <ma14:wrappingTextBoxFlag xmlns:ma14="http://schemas.microsoft.com/office/mac/drawingml/2011/main" val="0"/>
+            </a:ext>
+          </a:extLst>
+        </p:spPr>
+        <p:txBody>
+          <a:bodyPr/>
+          <a:lstStyle>
+            <a:lvl1pPr>
+              <a:defRPr sz="2000">
+                <a:solidFill>
+                  <a:srgbClr val="FFFFFF"/>
+                </a:solidFill>
+                <a:latin typeface="Calibri"/>
+                <a:ea typeface="Calibri"/>
+                <a:cs typeface="Calibri"/>
+              </a:defRPr>
+            </a:lvl1pPr>
+          </a:lstStyle>
+          <a:p>
+            <a:pPr algn="ctr"/>
+            <a:fld id="{F7021451-1387-4CA6-816F-3879F97B5CBC}" type="slidenum">
+              <a:rPr b="1" lang="en-US"/>
+              <a:t>57</a:t>
+            </a:fld>
+            <a:endParaRPr lang="en-US"/>
+          </a:p>
+        </p:txBody>
+      </p:sp>
+    </p:spTree>
+  </p:cSld>
+  <p:clrMapOvr>
+    <a:masterClrMapping/>
+  </p:clrMapOvr>
+</p:sld>
+</file>
+
+<file path=ppt/slides/slide58.xml><?xml version="1.0" encoding="utf-8"?>
+<p:sld xmlns:a="http://schemas.openxmlformats.org/drawingml/2006/main" xmlns:r="http://schemas.openxmlformats.org/officeDocument/2006/relationships" xmlns:p="http://schemas.openxmlformats.org/presentationml/2006/main">
+  <p:cSld name="Slide 58">
+    <p:spTree>
+      <p:nvGrpSpPr>
+        <p:cNvPr id="1" name=""/>
+        <p:cNvGrpSpPr/>
+        <p:nvPr/>
+      </p:nvGrpSpPr>
+      <p:grpSpPr>
+        <a:xfrm>
+          <a:off x="0" y="0"/>
+          <a:ext cx="0" cy="0"/>
+          <a:chOff x="0" y="0"/>
+          <a:chExt cx="0" cy="0"/>
+        </a:xfrm>
+      </p:grpSpPr>
+      <p:sp>
+        <p:nvSpPr>
+          <p:cNvPr id="2" name="Text 0"/>
+          <p:cNvSpPr/>
+          <p:nvPr/>
+        </p:nvSpPr>
+        <p:spPr>
+          <a:xfrm>
+            <a:off x="457200" y="713232"/>
+            <a:ext cx="11368735" cy="274320"/>
+          </a:xfrm>
+          <a:prstGeom prst="rect">
+            <a:avLst/>
+          </a:prstGeom>
+          <a:noFill/>
+          <a:ln/>
+        </p:spPr>
+        <p:txBody>
+          <a:bodyPr wrap="square" lIns="0" tIns="0" rIns="0" bIns="0" rtlCol="0" anchor="ctr"/>
+          <a:lstStyle/>
+          <a:p>
+            <a:pPr algn="r" indent="0" marL="0">
+              <a:buNone/>
+            </a:pPr>
+            <a:r>
+              <a:rPr lang="en-US" sz="1400" b="1" dirty="0">
+                <a:solidFill>
+                  <a:srgbClr val="1C3F6E"/>
+                </a:solidFill>
+                <a:latin typeface="Calibri" pitchFamily="34" charset="0"/>
+                <a:ea typeface="Calibri" pitchFamily="34" charset="-122"/>
+                <a:cs typeface="Calibri" pitchFamily="34" charset="-120"/>
+              </a:rPr>
+              <a:t>BILINGUAL GAME</a:t>
+            </a:r>
+            <a:endParaRPr lang="en-US" sz="1400" dirty="0"/>
+          </a:p>
+        </p:txBody>
+      </p:sp>
+      <p:sp>
+        <p:nvSpPr>
+          <p:cNvPr id="3" name="Text 1"/>
+          <p:cNvSpPr/>
+          <p:nvPr/>
+        </p:nvSpPr>
+        <p:spPr>
+          <a:xfrm>
+            <a:off x="457200" y="1005840"/>
+            <a:ext cx="11277295" cy="731520"/>
+          </a:xfrm>
+          <a:prstGeom prst="rect">
+            <a:avLst/>
+          </a:prstGeom>
+          <a:noFill/>
+          <a:ln/>
+        </p:spPr>
+        <p:txBody>
+          <a:bodyPr wrap="square" lIns="0" tIns="0" rIns="0" bIns="0" rtlCol="0" anchor="ctr"/>
+          <a:lstStyle/>
+          <a:p>
+            <a:pPr algn="ctr" indent="0" marL="0">
+              <a:buNone/>
+            </a:pPr>
+            <a:r>
+              <a:rPr lang="en-US" sz="3600" b="1" dirty="0">
+                <a:solidFill>
+                  <a:srgbClr val="990011"/>
+                </a:solidFill>
+                <a:latin typeface="Times New Roman" pitchFamily="34" charset="0"/>
+                <a:ea typeface="Times New Roman" pitchFamily="34" charset="-122"/>
+                <a:cs typeface="Times New Roman" pitchFamily="34" charset="-120"/>
+              </a:rPr>
               <a:t>Bilingual Game (Jeu Bilingue)</a:t>
             </a:r>
             <a:endParaRPr lang="en-US" sz="3600" dirty="0"/>
@@ -16046,7 +21399,7 @@
       </p:sp>
       <p:graphicFrame>
         <p:nvGraphicFramePr>
-          <p:cNvPr id="46" name="Table 0"/>
+          <p:cNvPr id="59" name="Table 0"/>
           <p:cNvGraphicFramePr>
             <a:graphicFrameLocks noGrp="1"/>
           </p:cNvGraphicFramePr>
@@ -17082,7 +22435,7 @@
             <a:pPr algn="ctr"/>
             <a:fld id="{F7021451-1387-4CA6-816F-3879F97B5CBC}" type="slidenum">
               <a:rPr b="1" lang="en-US"/>
-              <a:t>45</a:t>
+              <a:t>58</a:t>
             </a:fld>
             <a:endParaRPr lang="en-US"/>
           </a:p>
@@ -17096,9 +22449,9 @@
 </p:sld>
 </file>
 
-<file path=ppt/slides/slide46.xml><?xml version="1.0" encoding="utf-8"?>
+<file path=ppt/slides/slide59.xml><?xml version="1.0" encoding="utf-8"?>
 <p:sld xmlns:a="http://schemas.openxmlformats.org/drawingml/2006/main" xmlns:r="http://schemas.openxmlformats.org/officeDocument/2006/relationships" xmlns:p="http://schemas.openxmlformats.org/presentationml/2006/main">
-  <p:cSld name="Slide 46">
+  <p:cSld name="Slide 59">
     <p:spTree>
       <p:nvGrpSpPr>
         <p:cNvPr id="1" name=""/>
@@ -17193,7 +22546,7 @@
       </p:sp>
       <p:graphicFrame>
         <p:nvGraphicFramePr>
-          <p:cNvPr id="47" name="Table 0"/>
+          <p:cNvPr id="60" name="Table 0"/>
           <p:cNvGraphicFramePr>
             <a:graphicFrameLocks noGrp="1"/>
           </p:cNvGraphicFramePr>
@@ -17717,7 +23070,7 @@
                           <a:ea typeface="Calibri" pitchFamily="34" charset="-122"/>
                           <a:cs typeface="Calibri" pitchFamily="34" charset="-120"/>
                         </a:rPr>
-                        <a:t>Learners are able to describe the flows between towns and country sides and explain why they depend on each other.</a:t>
+                        <a:t>Learners are able to identify the flows between towns and country sides and explain why they depend on each other.</a:t>
                       </a:r>
                       <a:endParaRPr lang="en-US" sz="1600" dirty="0">
                         <a:latin typeface="Calibri" charset="0"/>
@@ -17815,7 +23168,7 @@
             <a:pPr algn="ctr"/>
             <a:fld id="{F7021451-1387-4CA6-816F-3879F97B5CBC}" type="slidenum">
               <a:rPr b="1" lang="en-US"/>
-              <a:t>46</a:t>
+              <a:t>59</a:t>
             </a:fld>
             <a:endParaRPr lang="en-US"/>
           </a:p>
@@ -17829,9 +23182,9 @@
 </p:sld>
 </file>
 
-<file path=ppt/slides/slide47.xml><?xml version="1.0" encoding="utf-8"?>
+<file path=ppt/slides/slide6.xml><?xml version="1.0" encoding="utf-8"?>
 <p:sld xmlns:a="http://schemas.openxmlformats.org/drawingml/2006/main" xmlns:r="http://schemas.openxmlformats.org/officeDocument/2006/relationships" xmlns:p="http://schemas.openxmlformats.org/presentationml/2006/main">
-  <p:cSld name="Slide 47">
+  <p:cSld name="Slide 6">
     <p:spTree>
       <p:nvGrpSpPr>
         <p:cNvPr id="1" name=""/>
@@ -17879,22 +23232,46 @@
                 <a:ea typeface="Calibri" pitchFamily="34" charset="-122"/>
                 <a:cs typeface="Calibri" pitchFamily="34" charset="-120"/>
               </a:rPr>
-              <a:t>LOGBOOK</a:t>
+              <a:t>LESSON PLAN</a:t>
             </a:r>
             <a:endParaRPr lang="en-US" sz="1400" dirty="0"/>
           </a:p>
         </p:txBody>
       </p:sp>
-      <p:sp>
-        <p:nvSpPr>
-          <p:cNvPr id="3" name="Text 1"/>
+      <p:pic>
+        <p:nvPicPr>
+          <p:cNvPr id="3" name="Image 0" descr="/home/claude/f4/img/minesec_sheet.png">    </p:cNvPr>
+          <p:cNvPicPr>
+            <a:picLocks noChangeAspect="1"/>
+          </p:cNvPicPr>
+          <p:nvPr/>
+        </p:nvPicPr>
+        <p:blipFill>
+          <a:blip r:embed="rId1"/>
+          <a:stretch>
+            <a:fillRect/>
+          </a:stretch>
+        </p:blipFill>
+        <p:spPr>
+          <a:xfrm>
+            <a:off x="0" y="658368"/>
+            <a:ext cx="2468880" cy="5833872"/>
+          </a:xfrm>
+          <a:prstGeom prst="rect">
+            <a:avLst/>
+          </a:prstGeom>
+        </p:spPr>
+      </p:pic>
+      <p:sp>
+        <p:nvSpPr>
+          <p:cNvPr id="4" name="Text 1"/>
           <p:cNvSpPr/>
           <p:nvPr/>
         </p:nvSpPr>
         <p:spPr>
           <a:xfrm>
-            <a:off x="457200" y="1005840"/>
-            <a:ext cx="11277295" cy="731520"/>
+            <a:off x="2697480" y="1005840"/>
+            <a:ext cx="9174175" cy="731520"/>
           </a:xfrm>
           <a:prstGeom prst="rect">
             <a:avLst/>
@@ -17903,7 +23280,9 @@
           <a:ln/>
         </p:spPr>
         <p:txBody>
-          <a:bodyPr wrap="square" lIns="0" tIns="0" rIns="0" bIns="0" rtlCol="0" anchor="ctr"/>
+          <a:bodyPr wrap="square" lIns="0" tIns="0" rIns="0" bIns="0" rtlCol="0" anchor="ctr">
+            <a:normAutofit/>
+          </a:bodyPr>
           <a:lstStyle/>
           <a:p>
             <a:pPr algn="ctr" indent="0" marL="0">
@@ -17918,6 +23297,311 @@
                 <a:ea typeface="Times New Roman" pitchFamily="34" charset="-122"/>
                 <a:cs typeface="Times New Roman" pitchFamily="34" charset="-120"/>
               </a:rPr>
+              <a:t>Lesson Plan</a:t>
+            </a:r>
+            <a:endParaRPr lang="en-US" sz="3600" dirty="0"/>
+          </a:p>
+        </p:txBody>
+      </p:sp>
+      <p:sp>
+        <p:nvSpPr>
+          <p:cNvPr id="5" name="Text 2"/>
+          <p:cNvSpPr/>
+          <p:nvPr/>
+        </p:nvSpPr>
+        <p:spPr>
+          <a:xfrm>
+            <a:off x="2697480" y="1783080"/>
+            <a:ext cx="9174175" cy="4663440"/>
+          </a:xfrm>
+          <a:prstGeom prst="rect">
+            <a:avLst/>
+          </a:prstGeom>
+          <a:noFill/>
+          <a:ln/>
+        </p:spPr>
+        <p:txBody>
+          <a:bodyPr wrap="square" lIns="0" tIns="0" rIns="0" bIns="0" rtlCol="0" anchor="t"/>
+          <a:lstStyle/>
+          <a:p>
+            <a:pPr algn="l" marL="342900" indent="-342900">
+              <a:spcAft>
+                <a:spcPts val="800"/>
+              </a:spcAft>
+              <a:buSzPct val="100000"/>
+              <a:buFont typeface="+mj-lt"/>
+              <a:buAutoNum type="arabicPeriod" startAt="1"/>
+            </a:pPr>
+            <a:r>
+              <a:rPr lang="en-US" sz="4000" dirty="0">
+                <a:solidFill>
+                  <a:srgbClr val="111111"/>
+                </a:solidFill>
+                <a:latin typeface="Times New Roman" pitchFamily="34" charset="0"/>
+                <a:ea typeface="Times New Roman" pitchFamily="34" charset="-122"/>
+                <a:cs typeface="Times New Roman" pitchFamily="34" charset="-120"/>
+              </a:rPr>
+              <a:t>Correction of the homework</a:t>
+            </a:r>
+            <a:endParaRPr lang="en-US" sz="4000" dirty="0"/>
+          </a:p>
+          <a:p>
+            <a:pPr algn="l" marL="342900" indent="-342900">
+              <a:spcAft>
+                <a:spcPts val="800"/>
+              </a:spcAft>
+              <a:buSzPct val="100000"/>
+              <a:buFont typeface="+mj-lt"/>
+              <a:buAutoNum type="arabicPeriod" startAt="1"/>
+            </a:pPr>
+            <a:r>
+              <a:rPr lang="en-US" sz="4000" dirty="0">
+                <a:solidFill>
+                  <a:srgbClr val="111111"/>
+                </a:solidFill>
+                <a:latin typeface="Times New Roman" pitchFamily="34" charset="0"/>
+                <a:ea typeface="Times New Roman" pitchFamily="34" charset="-122"/>
+                <a:cs typeface="Times New Roman" pitchFamily="34" charset="-120"/>
+              </a:rPr>
+              <a:t>Objectives and recall</a:t>
+            </a:r>
+            <a:endParaRPr lang="en-US" sz="4000" dirty="0"/>
+          </a:p>
+          <a:p>
+            <a:pPr algn="l" marL="342900" indent="-342900">
+              <a:spcAft>
+                <a:spcPts val="800"/>
+              </a:spcAft>
+              <a:buSzPct val="100000"/>
+              <a:buFont typeface="+mj-lt"/>
+              <a:buAutoNum type="arabicPeriod" startAt="1"/>
+            </a:pPr>
+            <a:r>
+              <a:rPr lang="en-US" sz="4000" dirty="0">
+                <a:solidFill>
+                  <a:srgbClr val="111111"/>
+                </a:solidFill>
+                <a:latin typeface="Times New Roman" pitchFamily="34" charset="0"/>
+                <a:ea typeface="Times New Roman" pitchFamily="34" charset="-122"/>
+                <a:cs typeface="Times New Roman" pitchFamily="34" charset="-120"/>
+              </a:rPr>
+              <a:t>Real-life situation and action to take</a:t>
+            </a:r>
+            <a:endParaRPr lang="en-US" sz="4000" dirty="0"/>
+          </a:p>
+          <a:p>
+            <a:pPr algn="l" marL="342900" indent="-342900">
+              <a:spcAft>
+                <a:spcPts val="800"/>
+              </a:spcAft>
+              <a:buSzPct val="100000"/>
+              <a:buFont typeface="+mj-lt"/>
+              <a:buAutoNum type="arabicPeriod" startAt="1"/>
+            </a:pPr>
+            <a:r>
+              <a:rPr lang="en-US" sz="4000" dirty="0">
+                <a:solidFill>
+                  <a:srgbClr val="111111"/>
+                </a:solidFill>
+                <a:latin typeface="Times New Roman" pitchFamily="34" charset="0"/>
+                <a:ea typeface="Times New Roman" pitchFamily="34" charset="-122"/>
+                <a:cs typeface="Times New Roman" pitchFamily="34" charset="-120"/>
+              </a:rPr>
+              <a:t>Learning activities</a:t>
+            </a:r>
+            <a:endParaRPr lang="en-US" sz="4000" dirty="0"/>
+          </a:p>
+          <a:p>
+            <a:pPr algn="l" marL="342900" indent="-342900">
+              <a:spcAft>
+                <a:spcPts val="800"/>
+              </a:spcAft>
+              <a:buSzPct val="100000"/>
+              <a:buFont typeface="+mj-lt"/>
+              <a:buAutoNum type="arabicPeriod" startAt="1"/>
+            </a:pPr>
+            <a:r>
+              <a:rPr lang="en-US" sz="4000" dirty="0">
+                <a:solidFill>
+                  <a:srgbClr val="111111"/>
+                </a:solidFill>
+                <a:latin typeface="Times New Roman" pitchFamily="34" charset="0"/>
+                <a:ea typeface="Times New Roman" pitchFamily="34" charset="-122"/>
+                <a:cs typeface="Times New Roman" pitchFamily="34" charset="-120"/>
+              </a:rPr>
+              <a:t>Board summary</a:t>
+            </a:r>
+            <a:endParaRPr lang="en-US" sz="4000" dirty="0"/>
+          </a:p>
+          <a:p>
+            <a:pPr algn="l" marL="342900" indent="-342900">
+              <a:spcAft>
+                <a:spcPts val="800"/>
+              </a:spcAft>
+              <a:buSzPct val="100000"/>
+              <a:buFont typeface="+mj-lt"/>
+              <a:buAutoNum type="arabicPeriod" startAt="1"/>
+            </a:pPr>
+            <a:r>
+              <a:rPr lang="en-US" sz="4000" dirty="0">
+                <a:solidFill>
+                  <a:srgbClr val="111111"/>
+                </a:solidFill>
+                <a:latin typeface="Times New Roman" pitchFamily="34" charset="0"/>
+                <a:ea typeface="Times New Roman" pitchFamily="34" charset="-122"/>
+                <a:cs typeface="Times New Roman" pitchFamily="34" charset="-120"/>
+              </a:rPr>
+              <a:t>Evaluation, remediation and homework</a:t>
+            </a:r>
+            <a:endParaRPr lang="en-US" sz="4000" dirty="0"/>
+          </a:p>
+        </p:txBody>
+      </p:sp>
+      <p:sp>
+        <p:nvSpPr>
+          <p:cNvPr id="25" name="Slide Number Placeholder 0"/>
+          <p:cNvSpPr>
+            <a:spLocks noGrp="1"/>
+          </p:cNvSpPr>
+          <p:nvPr>
+            <p:ph type="sldNum" sz="quarter" idx="4294967295"/>
+          </p:nvPr>
+        </p:nvSpPr>
+        <p:spPr>
+          <a:xfrm>
+            <a:off x="27432" y="91440"/>
+            <a:ext cx="585216" cy="475488"/>
+          </a:xfrm>
+          <a:prstGeom prst="rect">
+            <a:avLst/>
+          </a:prstGeom>
+          <a:extLst>
+            <a:ext uri="{C572A759-6A51-4108-AA02-DFA0A04FC94B}">
+              <ma14:wrappingTextBoxFlag xmlns:ma14="http://schemas.microsoft.com/office/mac/drawingml/2011/main" val="0"/>
+            </a:ext>
+          </a:extLst>
+        </p:spPr>
+        <p:txBody>
+          <a:bodyPr/>
+          <a:lstStyle>
+            <a:lvl1pPr>
+              <a:defRPr sz="2000">
+                <a:solidFill>
+                  <a:srgbClr val="FFFFFF"/>
+                </a:solidFill>
+                <a:latin typeface="Calibri"/>
+                <a:ea typeface="Calibri"/>
+                <a:cs typeface="Calibri"/>
+              </a:defRPr>
+            </a:lvl1pPr>
+          </a:lstStyle>
+          <a:p>
+            <a:pPr algn="ctr"/>
+            <a:fld id="{F7021451-1387-4CA6-816F-3879F97B5CBC}" type="slidenum">
+              <a:rPr b="1" lang="en-US"/>
+              <a:t>6</a:t>
+            </a:fld>
+            <a:endParaRPr lang="en-US"/>
+          </a:p>
+        </p:txBody>
+      </p:sp>
+    </p:spTree>
+  </p:cSld>
+  <p:clrMapOvr>
+    <a:masterClrMapping/>
+  </p:clrMapOvr>
+</p:sld>
+</file>
+
+<file path=ppt/slides/slide60.xml><?xml version="1.0" encoding="utf-8"?>
+<p:sld xmlns:a="http://schemas.openxmlformats.org/drawingml/2006/main" xmlns:r="http://schemas.openxmlformats.org/officeDocument/2006/relationships" xmlns:p="http://schemas.openxmlformats.org/presentationml/2006/main">
+  <p:cSld name="Slide 60">
+    <p:spTree>
+      <p:nvGrpSpPr>
+        <p:cNvPr id="1" name=""/>
+        <p:cNvGrpSpPr/>
+        <p:nvPr/>
+      </p:nvGrpSpPr>
+      <p:grpSpPr>
+        <a:xfrm>
+          <a:off x="0" y="0"/>
+          <a:ext cx="0" cy="0"/>
+          <a:chOff x="0" y="0"/>
+          <a:chExt cx="0" cy="0"/>
+        </a:xfrm>
+      </p:grpSpPr>
+      <p:sp>
+        <p:nvSpPr>
+          <p:cNvPr id="2" name="Text 0"/>
+          <p:cNvSpPr/>
+          <p:nvPr/>
+        </p:nvSpPr>
+        <p:spPr>
+          <a:xfrm>
+            <a:off x="457200" y="713232"/>
+            <a:ext cx="11368735" cy="274320"/>
+          </a:xfrm>
+          <a:prstGeom prst="rect">
+            <a:avLst/>
+          </a:prstGeom>
+          <a:noFill/>
+          <a:ln/>
+        </p:spPr>
+        <p:txBody>
+          <a:bodyPr wrap="square" lIns="0" tIns="0" rIns="0" bIns="0" rtlCol="0" anchor="ctr"/>
+          <a:lstStyle/>
+          <a:p>
+            <a:pPr algn="r" indent="0" marL="0">
+              <a:buNone/>
+            </a:pPr>
+            <a:r>
+              <a:rPr lang="en-US" sz="1400" b="1" dirty="0">
+                <a:solidFill>
+                  <a:srgbClr val="1C3F6E"/>
+                </a:solidFill>
+                <a:latin typeface="Calibri" pitchFamily="34" charset="0"/>
+                <a:ea typeface="Calibri" pitchFamily="34" charset="-122"/>
+                <a:cs typeface="Calibri" pitchFamily="34" charset="-120"/>
+              </a:rPr>
+              <a:t>LOGBOOK</a:t>
+            </a:r>
+            <a:endParaRPr lang="en-US" sz="1400" dirty="0"/>
+          </a:p>
+        </p:txBody>
+      </p:sp>
+      <p:sp>
+        <p:nvSpPr>
+          <p:cNvPr id="3" name="Text 1"/>
+          <p:cNvSpPr/>
+          <p:nvPr/>
+        </p:nvSpPr>
+        <p:spPr>
+          <a:xfrm>
+            <a:off x="457200" y="1005840"/>
+            <a:ext cx="11277295" cy="731520"/>
+          </a:xfrm>
+          <a:prstGeom prst="rect">
+            <a:avLst/>
+          </a:prstGeom>
+          <a:noFill/>
+          <a:ln/>
+        </p:spPr>
+        <p:txBody>
+          <a:bodyPr wrap="square" lIns="0" tIns="0" rIns="0" bIns="0" rtlCol="0" anchor="ctr"/>
+          <a:lstStyle/>
+          <a:p>
+            <a:pPr algn="ctr" indent="0" marL="0">
+              <a:buNone/>
+            </a:pPr>
+            <a:r>
+              <a:rPr lang="en-US" sz="3600" b="1" dirty="0">
+                <a:solidFill>
+                  <a:srgbClr val="990011"/>
+                </a:solidFill>
+                <a:latin typeface="Times New Roman" pitchFamily="34" charset="0"/>
+                <a:ea typeface="Times New Roman" pitchFamily="34" charset="-122"/>
+                <a:cs typeface="Times New Roman" pitchFamily="34" charset="-120"/>
+              </a:rPr>
               <a:t>Official Logbook (2/2)</a:t>
             </a:r>
             <a:endParaRPr lang="en-US" sz="3600" dirty="0"/>
@@ -17926,7 +23610,7 @@
       </p:sp>
       <p:graphicFrame>
         <p:nvGraphicFramePr>
-          <p:cNvPr id="48" name="Table 0"/>
+          <p:cNvPr id="61" name="Table 0"/>
           <p:cNvGraphicFramePr>
             <a:graphicFrameLocks noGrp="1"/>
           </p:cNvGraphicFramePr>
@@ -18036,7 +23720,7 @@
                           <a:ea typeface="Calibri" pitchFamily="34" charset="-122"/>
                           <a:cs typeface="Calibri" pitchFamily="34" charset="-120"/>
                         </a:rPr>
-                        <a:t>DEFINITIONS; Economic Relationships; Socio-cultural Relationships; Information.</a:t>
+                        <a:t>DEFINITIONS; From the Country Side to the Town; From the Town to the Country Side; The Actors of the Exchanges; Socio-cultural Relationships; Information.</a:t>
                       </a:r>
                       <a:endParaRPr lang="en-US" sz="1600" dirty="0">
                         <a:latin typeface="Calibri" charset="0"/>
@@ -18686,7 +24370,7 @@
             <a:pPr algn="ctr"/>
             <a:fld id="{F7021451-1387-4CA6-816F-3879F97B5CBC}" type="slidenum">
               <a:rPr b="1" lang="en-US"/>
-              <a:t>47</a:t>
+              <a:t>60</a:t>
             </a:fld>
             <a:endParaRPr lang="en-US"/>
           </a:p>
@@ -18700,9 +24384,9 @@
 </p:sld>
 </file>
 
-<file path=ppt/slides/slide48.xml><?xml version="1.0" encoding="utf-8"?>
+<file path=ppt/slides/slide61.xml><?xml version="1.0" encoding="utf-8"?>
 <p:sld xmlns:a="http://schemas.openxmlformats.org/drawingml/2006/main" xmlns:r="http://schemas.openxmlformats.org/officeDocument/2006/relationships" xmlns:p="http://schemas.openxmlformats.org/presentationml/2006/main">
-  <p:cSld name="Slide 48">
+  <p:cSld name="Slide 61">
     <p:spTree>
       <p:nvGrpSpPr>
         <p:cNvPr id="1" name=""/>
@@ -18942,7 +24626,7 @@
                 <a:ea typeface="Calibri" pitchFamily="34" charset="-122"/>
                 <a:cs typeface="Calibri" pitchFamily="34" charset="-120"/>
               </a:rPr>
-              <a:t>Without the projector (Activity 4): name village festivals.</a:t>
+              <a:t>Without the projector (Activity 4): name associations of the area.</a:t>
             </a:r>
             <a:endParaRPr lang="en-US" sz="2000" dirty="0"/>
           </a:p>
@@ -19011,7 +24695,7 @@
             <a:pPr algn="ctr"/>
             <a:fld id="{F7021451-1387-4CA6-816F-3879F97B5CBC}" type="slidenum">
               <a:rPr b="1" lang="en-US"/>
-              <a:t>48</a:t>
+              <a:t>61</a:t>
             </a:fld>
             <a:endParaRPr lang="en-US"/>
           </a:p>
@@ -19025,9 +24709,9 @@
 </p:sld>
 </file>
 
-<file path=ppt/slides/slide49.xml><?xml version="1.0" encoding="utf-8"?>
+<file path=ppt/slides/slide62.xml><?xml version="1.0" encoding="utf-8"?>
 <p:sld xmlns:a="http://schemas.openxmlformats.org/drawingml/2006/main" xmlns:r="http://schemas.openxmlformats.org/officeDocument/2006/relationships" xmlns:p="http://schemas.openxmlformats.org/presentationml/2006/main">
-  <p:cSld name="Slide 49">
+  <p:cSld name="Slide 62">
     <p:spTree>
       <p:nvGrpSpPr>
         <p:cNvPr id="1" name=""/>
@@ -19292,27 +24976,6 @@
             </a:r>
             <a:endParaRPr lang="en-US" sz="1800" dirty="0"/>
           </a:p>
-          <a:p>
-            <a:pPr algn="l" marL="342900" indent="-342900">
-              <a:spcAft>
-                <a:spcPts val="800"/>
-              </a:spcAft>
-              <a:buSzPct val="100000"/>
-              <a:buChar char="•"/>
-            </a:pPr>
-            <a:r>
-              <a:rPr lang="en-US" sz="1800" dirty="0">
-                <a:solidFill>
-                  <a:srgbClr val="111111"/>
-                </a:solidFill>
-                <a:latin typeface="Calibri" pitchFamily="34" charset="0"/>
-                <a:ea typeface="Calibri" pitchFamily="34" charset="-122"/>
-                <a:cs typeface="Calibri" pitchFamily="34" charset="-120"/>
-              </a:rPr>
-              <a:t>Diagrams and animations: drawn for this lesson (Geography Department).</a:t>
-            </a:r>
-            <a:endParaRPr lang="en-US" sz="1800" dirty="0"/>
-          </a:p>
         </p:txBody>
       </p:sp>
       <p:sp>
@@ -19357,7 +25020,7 @@
             <a:pPr algn="ctr"/>
             <a:fld id="{F7021451-1387-4CA6-816F-3879F97B5CBC}" type="slidenum">
               <a:rPr b="1" lang="en-US"/>
-              <a:t>49</a:t>
+              <a:t>62</a:t>
             </a:fld>
             <a:endParaRPr lang="en-US"/>
           </a:p>
@@ -19371,9 +25034,9 @@
 </p:sld>
 </file>
 
-<file path=ppt/slides/slide5.xml><?xml version="1.0" encoding="utf-8"?>
+<file path=ppt/slides/slide63.xml><?xml version="1.0" encoding="utf-8"?>
 <p:sld xmlns:a="http://schemas.openxmlformats.org/drawingml/2006/main" xmlns:r="http://schemas.openxmlformats.org/officeDocument/2006/relationships" xmlns:p="http://schemas.openxmlformats.org/presentationml/2006/main">
-  <p:cSld name="Slide 5">
+  <p:cSld name="Slide 63">
     <p:spTree>
       <p:nvGrpSpPr>
         <p:cNvPr id="1" name=""/>
@@ -19421,7 +25084,7 @@
                 <a:ea typeface="Calibri" pitchFamily="34" charset="-122"/>
                 <a:cs typeface="Calibri" pitchFamily="34" charset="-120"/>
               </a:rPr>
-              <a:t>HOMEWORK CORRECTION</a:t>
+              <a:t>REFERENCES</a:t>
             </a:r>
             <a:endParaRPr lang="en-US" sz="1400" dirty="0"/>
           </a:p>
@@ -19486,7 +25149,7 @@
                 <a:ea typeface="Times New Roman" pitchFamily="34" charset="-122"/>
                 <a:cs typeface="Times New Roman" pitchFamily="34" charset="-120"/>
               </a:rPr>
-              <a:t>Correction: Possible Answer</a:t>
+              <a:t>References (continued)</a:t>
             </a:r>
             <a:endParaRPr lang="en-US" sz="3600" dirty="0"/>
           </a:p>
@@ -19513,24 +25176,67 @@
           <a:bodyPr wrap="square" lIns="0" tIns="0" rIns="0" bIns="0" rtlCol="0" anchor="t"/>
           <a:lstStyle/>
           <a:p>
-            <a:pPr algn="l" indent="0" marL="0">
+            <a:pPr algn="l" marL="342900" indent="-342900">
               <a:spcAft>
                 <a:spcPts val="800"/>
               </a:spcAft>
-              <a:buNone/>
-            </a:pPr>
-            <a:r>
-              <a:rPr lang="en-US" sz="4000" dirty="0">
+              <a:buSzPct val="100000"/>
+              <a:buChar char="•"/>
+            </a:pPr>
+            <a:r>
+              <a:rPr lang="en-US" sz="1800" dirty="0">
                 <a:solidFill>
                   <a:srgbClr val="111111"/>
                 </a:solidFill>
-                <a:latin typeface="Times New Roman" pitchFamily="34" charset="0"/>
-                <a:ea typeface="Times New Roman" pitchFamily="34" charset="-122"/>
-                <a:cs typeface="Times New Roman" pitchFamily="34" charset="-120"/>
-              </a:rPr>
-              <a:t>Answers vary. Example: blocked gutters that flood the quarter; solutions: clean the gutters every week and put dustbins along the street.</a:t>
-            </a:r>
-            <a:endParaRPr lang="en-US" sz="4000" dirty="0"/>
+                <a:latin typeface="Calibri" pitchFamily="34" charset="0"/>
+                <a:ea typeface="Calibri" pitchFamily="34" charset="-122"/>
+                <a:cs typeface="Calibri" pitchFamily="34" charset="-120"/>
+              </a:rPr>
+              <a:t>Photo, board summary (Food): “Sandga Market in Douala, Cameroon” by The Advocacy Project, CC BY-NC-SA 2.0, via Flickr (https://www.flickr.com/photos/42487558@N00/3636438732)</a:t>
+            </a:r>
+            <a:endParaRPr lang="en-US" sz="1800" dirty="0"/>
+          </a:p>
+          <a:p>
+            <a:pPr algn="l" marL="342900" indent="-342900">
+              <a:spcAft>
+                <a:spcPts val="800"/>
+              </a:spcAft>
+              <a:buSzPct val="100000"/>
+              <a:buChar char="•"/>
+            </a:pPr>
+            <a:r>
+              <a:rPr lang="en-US" sz="1800" dirty="0">
+                <a:solidFill>
+                  <a:srgbClr val="111111"/>
+                </a:solidFill>
+                <a:latin typeface="Calibri" pitchFamily="34" charset="0"/>
+                <a:ea typeface="Calibri" pitchFamily="34" charset="-122"/>
+                <a:cs typeface="Calibri" pitchFamily="34" charset="-120"/>
+              </a:rPr>
+              <a:t>Photo, board summary (Buyam-sellams): “Roadside vendor roasts maize cobs for sale in Timau” by CIMMYT, CC BY-NC 2.0, via Flickr (https://www.flickr.com/photos/44760652@N05/25375356457)</a:t>
+            </a:r>
+            <a:endParaRPr lang="en-US" sz="1800" dirty="0"/>
+          </a:p>
+          <a:p>
+            <a:pPr algn="l" marL="342900" indent="-342900">
+              <a:spcAft>
+                <a:spcPts val="800"/>
+              </a:spcAft>
+              <a:buSzPct val="100000"/>
+              <a:buChar char="•"/>
+            </a:pPr>
+            <a:r>
+              <a:rPr lang="en-US" sz="1800" dirty="0">
+                <a:solidFill>
+                  <a:srgbClr val="111111"/>
+                </a:solidFill>
+                <a:latin typeface="Calibri" pitchFamily="34" charset="0"/>
+                <a:ea typeface="Calibri" pitchFamily="34" charset="-122"/>
+                <a:cs typeface="Calibri" pitchFamily="34" charset="-120"/>
+              </a:rPr>
+              <a:t>Diagrams and animations: drawn for this lesson (Geography Department).</a:t>
+            </a:r>
+            <a:endParaRPr lang="en-US" sz="1800" dirty="0"/>
           </a:p>
         </p:txBody>
       </p:sp>
@@ -19576,338 +25282,7 @@
             <a:pPr algn="ctr"/>
             <a:fld id="{F7021451-1387-4CA6-816F-3879F97B5CBC}" type="slidenum">
               <a:rPr b="1" lang="en-US"/>
-              <a:t>5</a:t>
-            </a:fld>
-            <a:endParaRPr lang="en-US"/>
-          </a:p>
-        </p:txBody>
-      </p:sp>
-    </p:spTree>
-  </p:cSld>
-  <p:clrMapOvr>
-    <a:masterClrMapping/>
-  </p:clrMapOvr>
-</p:sld>
-</file>
-
-<file path=ppt/slides/slide6.xml><?xml version="1.0" encoding="utf-8"?>
-<p:sld xmlns:a="http://schemas.openxmlformats.org/drawingml/2006/main" xmlns:r="http://schemas.openxmlformats.org/officeDocument/2006/relationships" xmlns:p="http://schemas.openxmlformats.org/presentationml/2006/main">
-  <p:cSld name="Slide 6">
-    <p:spTree>
-      <p:nvGrpSpPr>
-        <p:cNvPr id="1" name=""/>
-        <p:cNvGrpSpPr/>
-        <p:nvPr/>
-      </p:nvGrpSpPr>
-      <p:grpSpPr>
-        <a:xfrm>
-          <a:off x="0" y="0"/>
-          <a:ext cx="0" cy="0"/>
-          <a:chOff x="0" y="0"/>
-          <a:chExt cx="0" cy="0"/>
-        </a:xfrm>
-      </p:grpSpPr>
-      <p:sp>
-        <p:nvSpPr>
-          <p:cNvPr id="2" name="Text 0"/>
-          <p:cNvSpPr/>
-          <p:nvPr/>
-        </p:nvSpPr>
-        <p:spPr>
-          <a:xfrm>
-            <a:off x="457200" y="713232"/>
-            <a:ext cx="11368735" cy="274320"/>
-          </a:xfrm>
-          <a:prstGeom prst="rect">
-            <a:avLst/>
-          </a:prstGeom>
-          <a:noFill/>
-          <a:ln/>
-        </p:spPr>
-        <p:txBody>
-          <a:bodyPr wrap="square" lIns="0" tIns="0" rIns="0" bIns="0" rtlCol="0" anchor="ctr"/>
-          <a:lstStyle/>
-          <a:p>
-            <a:pPr algn="r" indent="0" marL="0">
-              <a:buNone/>
-            </a:pPr>
-            <a:r>
-              <a:rPr lang="en-US" sz="1400" b="1" dirty="0">
-                <a:solidFill>
-                  <a:srgbClr val="1C3F6E"/>
-                </a:solidFill>
-                <a:latin typeface="Calibri" pitchFamily="34" charset="0"/>
-                <a:ea typeface="Calibri" pitchFamily="34" charset="-122"/>
-                <a:cs typeface="Calibri" pitchFamily="34" charset="-120"/>
-              </a:rPr>
-              <a:t>LESSON PLAN</a:t>
-            </a:r>
-            <a:endParaRPr lang="en-US" sz="1400" dirty="0"/>
-          </a:p>
-        </p:txBody>
-      </p:sp>
-      <p:pic>
-        <p:nvPicPr>
-          <p:cNvPr id="3" name="Image 0" descr="/home/claude/f4/img/minesec_sheet.png">    </p:cNvPr>
-          <p:cNvPicPr>
-            <a:picLocks noChangeAspect="1"/>
-          </p:cNvPicPr>
-          <p:nvPr/>
-        </p:nvPicPr>
-        <p:blipFill>
-          <a:blip r:embed="rId1"/>
-          <a:stretch>
-            <a:fillRect/>
-          </a:stretch>
-        </p:blipFill>
-        <p:spPr>
-          <a:xfrm>
-            <a:off x="0" y="658368"/>
-            <a:ext cx="2468880" cy="5833872"/>
-          </a:xfrm>
-          <a:prstGeom prst="rect">
-            <a:avLst/>
-          </a:prstGeom>
-        </p:spPr>
-      </p:pic>
-      <p:sp>
-        <p:nvSpPr>
-          <p:cNvPr id="4" name="Text 1"/>
-          <p:cNvSpPr/>
-          <p:nvPr/>
-        </p:nvSpPr>
-        <p:spPr>
-          <a:xfrm>
-            <a:off x="2697480" y="1005840"/>
-            <a:ext cx="9174175" cy="731520"/>
-          </a:xfrm>
-          <a:prstGeom prst="rect">
-            <a:avLst/>
-          </a:prstGeom>
-          <a:noFill/>
-          <a:ln/>
-        </p:spPr>
-        <p:txBody>
-          <a:bodyPr wrap="square" lIns="0" tIns="0" rIns="0" bIns="0" rtlCol="0" anchor="ctr">
-            <a:normAutofit/>
-          </a:bodyPr>
-          <a:lstStyle/>
-          <a:p>
-            <a:pPr algn="ctr" indent="0" marL="0">
-              <a:buNone/>
-            </a:pPr>
-            <a:r>
-              <a:rPr lang="en-US" sz="3600" b="1" dirty="0">
-                <a:solidFill>
-                  <a:srgbClr val="990011"/>
-                </a:solidFill>
-                <a:latin typeface="Times New Roman" pitchFamily="34" charset="0"/>
-                <a:ea typeface="Times New Roman" pitchFamily="34" charset="-122"/>
-                <a:cs typeface="Times New Roman" pitchFamily="34" charset="-120"/>
-              </a:rPr>
-              <a:t>Lesson Plan</a:t>
-            </a:r>
-            <a:endParaRPr lang="en-US" sz="3600" dirty="0"/>
-          </a:p>
-        </p:txBody>
-      </p:sp>
-      <p:sp>
-        <p:nvSpPr>
-          <p:cNvPr id="5" name="Text 2"/>
-          <p:cNvSpPr/>
-          <p:nvPr/>
-        </p:nvSpPr>
-        <p:spPr>
-          <a:xfrm>
-            <a:off x="2697480" y="1783080"/>
-            <a:ext cx="9174175" cy="4663440"/>
-          </a:xfrm>
-          <a:prstGeom prst="rect">
-            <a:avLst/>
-          </a:prstGeom>
-          <a:noFill/>
-          <a:ln/>
-        </p:spPr>
-        <p:txBody>
-          <a:bodyPr wrap="square" lIns="0" tIns="0" rIns="0" bIns="0" rtlCol="0" anchor="t"/>
-          <a:lstStyle/>
-          <a:p>
-            <a:pPr algn="l" marL="342900" indent="-342900">
-              <a:spcAft>
-                <a:spcPts val="800"/>
-              </a:spcAft>
-              <a:buSzPct val="100000"/>
-              <a:buFont typeface="+mj-lt"/>
-              <a:buAutoNum type="arabicPeriod" startAt="1"/>
-            </a:pPr>
-            <a:r>
-              <a:rPr lang="en-US" sz="4000" dirty="0">
-                <a:solidFill>
-                  <a:srgbClr val="111111"/>
-                </a:solidFill>
-                <a:latin typeface="Times New Roman" pitchFamily="34" charset="0"/>
-                <a:ea typeface="Times New Roman" pitchFamily="34" charset="-122"/>
-                <a:cs typeface="Times New Roman" pitchFamily="34" charset="-120"/>
-              </a:rPr>
-              <a:t>Correction of the homework</a:t>
-            </a:r>
-            <a:endParaRPr lang="en-US" sz="4000" dirty="0"/>
-          </a:p>
-          <a:p>
-            <a:pPr algn="l" marL="342900" indent="-342900">
-              <a:spcAft>
-                <a:spcPts val="800"/>
-              </a:spcAft>
-              <a:buSzPct val="100000"/>
-              <a:buFont typeface="+mj-lt"/>
-              <a:buAutoNum type="arabicPeriod" startAt="1"/>
-            </a:pPr>
-            <a:r>
-              <a:rPr lang="en-US" sz="4000" dirty="0">
-                <a:solidFill>
-                  <a:srgbClr val="111111"/>
-                </a:solidFill>
-                <a:latin typeface="Times New Roman" pitchFamily="34" charset="0"/>
-                <a:ea typeface="Times New Roman" pitchFamily="34" charset="-122"/>
-                <a:cs typeface="Times New Roman" pitchFamily="34" charset="-120"/>
-              </a:rPr>
-              <a:t>Objectives and recall</a:t>
-            </a:r>
-            <a:endParaRPr lang="en-US" sz="4000" dirty="0"/>
-          </a:p>
-          <a:p>
-            <a:pPr algn="l" marL="342900" indent="-342900">
-              <a:spcAft>
-                <a:spcPts val="800"/>
-              </a:spcAft>
-              <a:buSzPct val="100000"/>
-              <a:buFont typeface="+mj-lt"/>
-              <a:buAutoNum type="arabicPeriod" startAt="1"/>
-            </a:pPr>
-            <a:r>
-              <a:rPr lang="en-US" sz="4000" dirty="0">
-                <a:solidFill>
-                  <a:srgbClr val="111111"/>
-                </a:solidFill>
-                <a:latin typeface="Times New Roman" pitchFamily="34" charset="0"/>
-                <a:ea typeface="Times New Roman" pitchFamily="34" charset="-122"/>
-                <a:cs typeface="Times New Roman" pitchFamily="34" charset="-120"/>
-              </a:rPr>
-              <a:t>Real-life situation and action to take</a:t>
-            </a:r>
-            <a:endParaRPr lang="en-US" sz="4000" dirty="0"/>
-          </a:p>
-          <a:p>
-            <a:pPr algn="l" marL="342900" indent="-342900">
-              <a:spcAft>
-                <a:spcPts val="800"/>
-              </a:spcAft>
-              <a:buSzPct val="100000"/>
-              <a:buFont typeface="+mj-lt"/>
-              <a:buAutoNum type="arabicPeriod" startAt="1"/>
-            </a:pPr>
-            <a:r>
-              <a:rPr lang="en-US" sz="4000" dirty="0">
-                <a:solidFill>
-                  <a:srgbClr val="111111"/>
-                </a:solidFill>
-                <a:latin typeface="Times New Roman" pitchFamily="34" charset="0"/>
-                <a:ea typeface="Times New Roman" pitchFamily="34" charset="-122"/>
-                <a:cs typeface="Times New Roman" pitchFamily="34" charset="-120"/>
-              </a:rPr>
-              <a:t>Learning activities</a:t>
-            </a:r>
-            <a:endParaRPr lang="en-US" sz="4000" dirty="0"/>
-          </a:p>
-          <a:p>
-            <a:pPr algn="l" marL="342900" indent="-342900">
-              <a:spcAft>
-                <a:spcPts val="800"/>
-              </a:spcAft>
-              <a:buSzPct val="100000"/>
-              <a:buFont typeface="+mj-lt"/>
-              <a:buAutoNum type="arabicPeriod" startAt="1"/>
-            </a:pPr>
-            <a:r>
-              <a:rPr lang="en-US" sz="4000" dirty="0">
-                <a:solidFill>
-                  <a:srgbClr val="111111"/>
-                </a:solidFill>
-                <a:latin typeface="Times New Roman" pitchFamily="34" charset="0"/>
-                <a:ea typeface="Times New Roman" pitchFamily="34" charset="-122"/>
-                <a:cs typeface="Times New Roman" pitchFamily="34" charset="-120"/>
-              </a:rPr>
-              <a:t>Board summary</a:t>
-            </a:r>
-            <a:endParaRPr lang="en-US" sz="4000" dirty="0"/>
-          </a:p>
-          <a:p>
-            <a:pPr algn="l" marL="342900" indent="-342900">
-              <a:spcAft>
-                <a:spcPts val="800"/>
-              </a:spcAft>
-              <a:buSzPct val="100000"/>
-              <a:buFont typeface="+mj-lt"/>
-              <a:buAutoNum type="arabicPeriod" startAt="1"/>
-            </a:pPr>
-            <a:r>
-              <a:rPr lang="en-US" sz="4000" dirty="0">
-                <a:solidFill>
-                  <a:srgbClr val="111111"/>
-                </a:solidFill>
-                <a:latin typeface="Times New Roman" pitchFamily="34" charset="0"/>
-                <a:ea typeface="Times New Roman" pitchFamily="34" charset="-122"/>
-                <a:cs typeface="Times New Roman" pitchFamily="34" charset="-120"/>
-              </a:rPr>
-              <a:t>Evaluation, remediation and homework</a:t>
-            </a:r>
-            <a:endParaRPr lang="en-US" sz="4000" dirty="0"/>
-          </a:p>
-        </p:txBody>
-      </p:sp>
-      <p:sp>
-        <p:nvSpPr>
-          <p:cNvPr id="25" name="Slide Number Placeholder 0"/>
-          <p:cNvSpPr>
-            <a:spLocks noGrp="1"/>
-          </p:cNvSpPr>
-          <p:nvPr>
-            <p:ph type="sldNum" sz="quarter" idx="4294967295"/>
-          </p:nvPr>
-        </p:nvSpPr>
-        <p:spPr>
-          <a:xfrm>
-            <a:off x="27432" y="91440"/>
-            <a:ext cx="585216" cy="475488"/>
-          </a:xfrm>
-          <a:prstGeom prst="rect">
-            <a:avLst/>
-          </a:prstGeom>
-          <a:extLst>
-            <a:ext uri="{C572A759-6A51-4108-AA02-DFA0A04FC94B}">
-              <ma14:wrappingTextBoxFlag xmlns:ma14="http://schemas.microsoft.com/office/mac/drawingml/2011/main" val="0"/>
-            </a:ext>
-          </a:extLst>
-        </p:spPr>
-        <p:txBody>
-          <a:bodyPr/>
-          <a:lstStyle>
-            <a:lvl1pPr>
-              <a:defRPr sz="2000">
-                <a:solidFill>
-                  <a:srgbClr val="FFFFFF"/>
-                </a:solidFill>
-                <a:latin typeface="Calibri"/>
-                <a:ea typeface="Calibri"/>
-                <a:cs typeface="Calibri"/>
-              </a:defRPr>
-            </a:lvl1pPr>
-          </a:lstStyle>
-          <a:p>
-            <a:pPr algn="ctr"/>
-            <a:fld id="{F7021451-1387-4CA6-816F-3879F97B5CBC}" type="slidenum">
-              <a:rPr b="1" lang="en-US"/>
-              <a:t>6</a:t>
+              <a:t>63</a:t>
             </a:fld>
             <a:endParaRPr lang="en-US"/>
           </a:p>
@@ -20541,7 +25916,7 @@
         <p:spPr>
           <a:xfrm>
             <a:off x="0" y="658368"/>
-            <a:ext cx="3840480" cy="5833872"/>
+            <a:ext cx="1463040" cy="5833872"/>
           </a:xfrm>
           <a:prstGeom prst="rect">
             <a:avLst/>
@@ -20556,8 +25931,8 @@
         </p:nvSpPr>
         <p:spPr>
           <a:xfrm>
-            <a:off x="4069080" y="1005840"/>
-            <a:ext cx="7802575" cy="731520"/>
+            <a:off x="1691640" y="1005840"/>
+            <a:ext cx="10180015" cy="731520"/>
           </a:xfrm>
           <a:prstGeom prst="rect">
             <a:avLst/>
@@ -20597,8 +25972,8 @@
         </p:nvSpPr>
         <p:spPr>
           <a:xfrm>
-            <a:off x="4069080" y="1783080"/>
-            <a:ext cx="7802575" cy="4663440"/>
+            <a:off x="1691640" y="1783080"/>
+            <a:ext cx="10180015" cy="4663440"/>
           </a:xfrm>
           <a:prstGeom prst="rect">
             <a:avLst/>
@@ -20625,7 +26000,7 @@
                 <a:ea typeface="Times New Roman" pitchFamily="34" charset="-122"/>
                 <a:cs typeface="Times New Roman" pitchFamily="34" charset="-120"/>
               </a:rPr>
-              <a:t>Every Friday, a buyam-sellam takes onions and groundnuts from a village near Garoua to the town market, and returns with soap, oil and clothes for the villagers. At festivals, town dwellers go back to the village.</a:t>
+              <a:t>Every Friday, a buyam-sellam takes onions and groundnuts from a village near Garoua to the town market and returns with soap, oil and clothes. At festivals, town dwellers go back to the village. A pupil asks: "Could the town live without the village, or the village without the town?"</a:t>
             </a:r>
             <a:endParaRPr lang="en-US" sz="4000" dirty="0"/>
           </a:p>

--- a/lecons/F2/18_F2_M2_L08_Relationships_between_Towns_and_Country_Sides.pptx
+++ b/lecons/F2/18_F2_M2_L08_Relationships_between_Towns_and_Country_Sides.pptx
@@ -3468,7 +3468,7 @@
           <a:p>
             <a:r>
               <a:rPr lang="en-US" dirty="0"/>
-              <a:t>Before we start the new lesson, let us correct the homework I gave you at the end of Further Study 6: Urban Problems in Cameroon. The question was: Identify one urban problem in your quarter and propose two solutions. Take out your exercise books.</a:t>
+              <a:t>Before we start the new lesson, let us correct the homework I gave you at the end of Further Study 6: Urban Problems in Cameroon. The question was: Give two products that villages send to towns. Take out your exercise books.</a:t>
             </a:r>
             <a:endParaRPr lang="en-US" dirty="0"/>
           </a:p>
@@ -4436,7 +4436,7 @@
           <a:p>
             <a:r>
               <a:rPr lang="en-US" dirty="0"/>
-              <a:t>Here is a good answer. Answers vary. Example: blocked gutters that flood the quarter; solutions: clean the gutters every week and put dustbins along the street. Compare it with your own answer and correct your work in red.</a:t>
+              <a:t>Here is a good answer. Food crops and cattle (also firewood). Compare it with your own answer and correct your work in red.</a:t>
             </a:r>
             <a:endParaRPr lang="en-US" dirty="0"/>
           </a:p>
@@ -5052,7 +5052,7 @@
           <a:p>
             <a:r>
               <a:rPr lang="en-US" dirty="0"/>
-              <a:t>For your homework: List three products your family buys from villages and three goods villagers buy in town. We shall correct it at the beginning of our next lesson.</a:t>
+              <a:t>For your homework: Define rural exodus. We shall correct it at the beginning of our next lesson.</a:t>
             </a:r>
             <a:endParaRPr lang="en-US" dirty="0"/>
           </a:p>
@@ -16321,7 +16321,7 @@
                 <a:ea typeface="Times New Roman" pitchFamily="34" charset="-122"/>
                 <a:cs typeface="Times New Roman" pitchFamily="34" charset="-120"/>
               </a:rPr>
-              <a:t>Identify one urban problem in your quarter and propose two solutions.</a:t>
+              <a:t>Give two products that villages send to towns.</a:t>
             </a:r>
             <a:endParaRPr lang="en-US" sz="4000" dirty="0"/>
           </a:p>
@@ -19348,7 +19348,7 @@
                 <a:ea typeface="Times New Roman" pitchFamily="34" charset="-122"/>
                 <a:cs typeface="Times New Roman" pitchFamily="34" charset="-120"/>
               </a:rPr>
-              <a:t>Answers vary. Example: blocked gutters that flood the quarter; solutions: clean the gutters every week and put dustbins along the street.</a:t>
+              <a:t>Food crops and cattle (also firewood).</a:t>
             </a:r>
             <a:endParaRPr lang="en-US" sz="4000" dirty="0"/>
           </a:p>
@@ -21001,7 +21001,7 @@
                 <a:ea typeface="Times New Roman" pitchFamily="34" charset="-122"/>
                 <a:cs typeface="Times New Roman" pitchFamily="34" charset="-120"/>
               </a:rPr>
-              <a:t>List three products your family buys from villages and three goods villagers buy in town.</a:t>
+              <a:t>Define rural exodus.</a:t>
             </a:r>
             <a:endParaRPr lang="en-US" sz="4000" dirty="0"/>
           </a:p>
@@ -23996,7 +23996,7 @@
                           <a:ea typeface="Calibri" pitchFamily="34" charset="-122"/>
                           <a:cs typeface="Calibri" pitchFamily="34" charset="-120"/>
                         </a:rPr>
-                        <a:t>List three products your family buys from villages and three goods villagers buy in town.</a:t>
+                        <a:t>Define rural exodus.</a:t>
                       </a:r>
                       <a:endParaRPr lang="en-US" sz="1600" dirty="0">
                         <a:latin typeface="Calibri" charset="0"/>
